--- a/practice_basic/fig/slide.pptx
+++ b/practice_basic/fig/slide.pptx
@@ -239,7 +239,7 @@
           </a:lstStyle>
           <a:p>
             <a:fld id="{6B8D1B20-A248-FB47-8240-73C0C5F47C9D}" type="datetimeFigureOut">
-              <a:t>2025/10/20</a:t>
+              <a:t>2026/10/14</a:t>
             </a:fld>
             <a:endParaRPr kumimoji="1" lang="ja-JP" altLang="en-US"/>
           </a:p>
@@ -1381,6 +1381,36 @@
           <a:chExt cx="0" cy="0"/>
         </a:xfrm>
       </p:grpSpPr>
+      <p:pic>
+        <p:nvPicPr>
+          <p:cNvPr id="9" name="図 8">
+            <a:extLst>
+              <a:ext uri="{FF2B5EF4-FFF2-40B4-BE49-F238E27FC236}">
+                <a16:creationId xmlns:a16="http://schemas.microsoft.com/office/drawing/2014/main" id="{8E459097-6039-898B-A41F-345483BCF7FC}"/>
+              </a:ext>
+            </a:extLst>
+          </p:cNvPr>
+          <p:cNvPicPr>
+            <a:picLocks noChangeAspect="1"/>
+          </p:cNvPicPr>
+          <p:nvPr/>
+        </p:nvPicPr>
+        <p:blipFill>
+          <a:blip r:embed="rId2"/>
+          <a:stretch>
+            <a:fillRect/>
+          </a:stretch>
+        </p:blipFill>
+        <p:spPr>
+          <a:xfrm>
+            <a:off x="1403648" y="1483043"/>
+            <a:ext cx="4690619" cy="4826277"/>
+          </a:xfrm>
+          <a:prstGeom prst="rect">
+            <a:avLst/>
+          </a:prstGeom>
+        </p:spPr>
+      </p:pic>
       <p:sp>
         <p:nvSpPr>
           <p:cNvPr id="2" name="テキスト プレースホルダー 1">
@@ -1413,53 +1443,6 @@
           </a:p>
         </p:txBody>
       </p:sp>
-      <p:pic>
-        <p:nvPicPr>
-          <p:cNvPr id="2050" name="Picture 2">
-            <a:extLst>
-              <a:ext uri="{FF2B5EF4-FFF2-40B4-BE49-F238E27FC236}">
-                <a16:creationId xmlns:a16="http://schemas.microsoft.com/office/drawing/2014/main" id="{2DA8D962-C685-9419-E882-642120E99210}"/>
-              </a:ext>
-            </a:extLst>
-          </p:cNvPr>
-          <p:cNvPicPr>
-            <a:picLocks noChangeAspect="1" noChangeArrowheads="1"/>
-          </p:cNvPicPr>
-          <p:nvPr/>
-        </p:nvPicPr>
-        <p:blipFill>
-          <a:blip r:embed="rId2">
-            <a:extLst>
-              <a:ext uri="{28A0092B-C50C-407E-A947-70E740481C1C}">
-                <a14:useLocalDpi xmlns:a14="http://schemas.microsoft.com/office/drawing/2010/main" val="0"/>
-              </a:ext>
-            </a:extLst>
-          </a:blip>
-          <a:srcRect/>
-          <a:stretch>
-            <a:fillRect/>
-          </a:stretch>
-        </p:blipFill>
-        <p:spPr bwMode="auto">
-          <a:xfrm>
-            <a:off x="1547664" y="1628800"/>
-            <a:ext cx="5734050" cy="4695825"/>
-          </a:xfrm>
-          <a:prstGeom prst="rect">
-            <a:avLst/>
-          </a:prstGeom>
-          <a:noFill/>
-          <a:extLst>
-            <a:ext uri="{909E8E84-426E-40DD-AFC4-6F175D3DCCD1}">
-              <a14:hiddenFill xmlns:a14="http://schemas.microsoft.com/office/drawing/2010/main">
-                <a:solidFill>
-                  <a:srgbClr val="FFFFFF"/>
-                </a:solidFill>
-              </a14:hiddenFill>
-            </a:ext>
-          </a:extLst>
-        </p:spPr>
-      </p:pic>
       <p:sp>
         <p:nvSpPr>
           <p:cNvPr id="3" name="四角形: 角を丸くする 2">
@@ -1474,8 +1457,8 @@
         </p:nvSpPr>
         <p:spPr>
           <a:xfrm>
-            <a:off x="1835696" y="6021288"/>
-            <a:ext cx="2448272" cy="288032"/>
+            <a:off x="1393985" y="6028275"/>
+            <a:ext cx="1521831" cy="281045"/>
           </a:xfrm>
           <a:prstGeom prst="roundRect">
             <a:avLst/>
@@ -1526,8 +1509,8 @@
         </p:nvSpPr>
         <p:spPr>
           <a:xfrm>
-            <a:off x="1907704" y="2204864"/>
-            <a:ext cx="2304256" cy="432048"/>
+            <a:off x="1789521" y="2129622"/>
+            <a:ext cx="1521831" cy="360040"/>
           </a:xfrm>
           <a:prstGeom prst="roundRect">
             <a:avLst/>
@@ -1601,8 +1584,8 @@
               <a:t>検索ボックスに</a:t>
             </a:r>
             <a:r>
-              <a:rPr lang="en-US" altLang="ja-JP" dirty="0"/>
-              <a:t>vs code</a:t>
+              <a:rPr lang="en-US" altLang="ja-JP" dirty="0" err="1"/>
+              <a:t>vscode</a:t>
             </a:r>
             <a:r>
               <a:rPr lang="ja-JP" altLang="en-US" dirty="0"/>
@@ -1648,12 +1631,12 @@
         </p:nvCxnSpPr>
         <p:spPr>
           <a:xfrm rot="10800000" flipH="1" flipV="1">
-            <a:off x="395536" y="1159878"/>
-            <a:ext cx="1440160" cy="5005426"/>
+            <a:off x="395535" y="1159878"/>
+            <a:ext cx="998449" cy="5008920"/>
           </a:xfrm>
           <a:prstGeom prst="bentConnector3">
             <a:avLst>
-              <a:gd name="adj1" fmla="val -15873"/>
+              <a:gd name="adj1" fmla="val -22896"/>
             </a:avLst>
           </a:prstGeom>
           <a:ln>
@@ -1689,14 +1672,15 @@
             </a:extLst>
           </p:cNvPr>
           <p:cNvCxnSpPr>
+            <a:cxnSpLocks/>
             <a:endCxn id="4" idx="1"/>
           </p:cNvCxnSpPr>
           <p:nvPr/>
         </p:nvCxnSpPr>
         <p:spPr>
           <a:xfrm rot="16200000" flipH="1">
-            <a:off x="971600" y="1484784"/>
-            <a:ext cx="1080120" cy="792088"/>
+            <a:off x="871419" y="1391540"/>
+            <a:ext cx="1044116" cy="792088"/>
           </a:xfrm>
           <a:prstGeom prst="bentConnector2">
             <a:avLst/>
@@ -1800,8 +1784,8 @@
         </p:nvSpPr>
         <p:spPr>
           <a:xfrm>
-            <a:off x="467544" y="5340280"/>
-            <a:ext cx="7750840" cy="923330"/>
+            <a:off x="251520" y="5229200"/>
+            <a:ext cx="7632848" cy="1477328"/>
           </a:xfrm>
           <a:prstGeom prst="rect">
             <a:avLst/>
@@ -1809,7 +1793,7 @@
           <a:noFill/>
         </p:spPr>
         <p:txBody>
-          <a:bodyPr wrap="none" rtlCol="0">
+          <a:bodyPr wrap="square" rtlCol="0">
             <a:spAutoFit/>
           </a:bodyPr>
           <a:lstStyle/>
@@ -1818,11 +1802,11 @@
               <a:buAutoNum type="arabicPeriod"/>
             </a:pPr>
             <a:r>
-              <a:rPr kumimoji="1" lang="ja-JP" altLang="en-US"/>
+              <a:rPr kumimoji="1" lang="ja-JP" altLang="en-US" dirty="0"/>
               <a:t>左の「拡張機能</a:t>
             </a:r>
             <a:r>
-              <a:rPr lang="ja-JP" altLang="en-US"/>
+              <a:rPr lang="ja-JP" altLang="en-US" dirty="0"/>
               <a:t>」アイコンをクリック</a:t>
             </a:r>
             <a:endParaRPr lang="en-US" altLang="ja-JP" dirty="0"/>
@@ -1832,7 +1816,7 @@
               <a:buAutoNum type="arabicPeriod"/>
             </a:pPr>
             <a:r>
-              <a:rPr lang="ja-JP" altLang="en-US"/>
+              <a:rPr lang="ja-JP" altLang="en-US" dirty="0"/>
               <a:t>現れた検索窓に「</a:t>
             </a:r>
             <a:r>
@@ -1840,7 +1824,7 @@
               <a:t>japanese</a:t>
             </a:r>
             <a:r>
-              <a:rPr lang="ja-JP" altLang="en-US"/>
+              <a:rPr lang="ja-JP" altLang="en-US" dirty="0"/>
               <a:t>」と入力</a:t>
             </a:r>
             <a:endParaRPr lang="en-US" altLang="ja-JP" dirty="0"/>
@@ -1850,16 +1834,34 @@
               <a:buAutoNum type="arabicPeriod"/>
             </a:pPr>
             <a:r>
-              <a:rPr lang="ja-JP" altLang="en-US"/>
+              <a:rPr lang="ja-JP" altLang="en-US" dirty="0"/>
               <a:t>「</a:t>
             </a:r>
             <a:r>
               <a:rPr lang="en-US" altLang="ja-JP" dirty="0"/>
-              <a:t>Japanese Language Pack for VS Code</a:t>
-            </a:r>
-            <a:r>
-              <a:rPr lang="ja-JP" altLang="en-US"/>
-              <a:t>」をインストールして再起動</a:t>
+              <a:t>Japanese Language Pack for Visual Studio Code</a:t>
+            </a:r>
+            <a:r>
+              <a:rPr lang="ja-JP" altLang="en-US" dirty="0"/>
+              <a:t>」をインストール</a:t>
+            </a:r>
+            <a:endParaRPr lang="en-US" altLang="ja-JP" dirty="0"/>
+          </a:p>
+          <a:p>
+            <a:pPr marL="342900" indent="-342900">
+              <a:buAutoNum type="arabicPeriod"/>
+            </a:pPr>
+            <a:r>
+              <a:rPr lang="ja-JP" altLang="en-US" dirty="0"/>
+              <a:t>インストール後、再起動ダイアログがでるので「</a:t>
+            </a:r>
+            <a:r>
+              <a:rPr lang="en-US" altLang="ja-JP" dirty="0"/>
+              <a:t>Change Language and Restart</a:t>
+            </a:r>
+            <a:r>
+              <a:rPr lang="ja-JP" altLang="en-US" dirty="0"/>
+              <a:t>」をクリック</a:t>
             </a:r>
             <a:endParaRPr lang="en-US" altLang="ja-JP" dirty="0"/>
           </a:p>
@@ -1887,7 +1889,7 @@
         </p:blipFill>
         <p:spPr>
           <a:xfrm>
-            <a:off x="2051720" y="944195"/>
+            <a:off x="683568" y="916761"/>
             <a:ext cx="4419600" cy="3886200"/>
           </a:xfrm>
           <a:prstGeom prst="rect">
@@ -1909,7 +1911,7 @@
         </p:nvSpPr>
         <p:spPr>
           <a:xfrm>
-            <a:off x="2843808" y="1487567"/>
+            <a:off x="1475656" y="1460133"/>
             <a:ext cx="3384376" cy="391616"/>
           </a:xfrm>
           <a:prstGeom prst="roundRect">
@@ -1961,7 +1963,7 @@
         </p:nvSpPr>
         <p:spPr>
           <a:xfrm>
-            <a:off x="5580112" y="2495679"/>
+            <a:off x="4211960" y="2468245"/>
             <a:ext cx="891208" cy="391616"/>
           </a:xfrm>
           <a:prstGeom prst="roundRect">
@@ -2013,7 +2015,7 @@
         </p:nvSpPr>
         <p:spPr>
           <a:xfrm>
-            <a:off x="2046680" y="3487442"/>
+            <a:off x="678528" y="3460008"/>
             <a:ext cx="558800" cy="504056"/>
           </a:xfrm>
           <a:prstGeom prst="roundRect">
@@ -2065,7 +2067,7 @@
         </p:nvSpPr>
         <p:spPr>
           <a:xfrm>
-            <a:off x="1547664" y="3613266"/>
+            <a:off x="179512" y="3585832"/>
             <a:ext cx="360040" cy="360040"/>
           </a:xfrm>
           <a:prstGeom prst="ellipse">
@@ -2122,7 +2124,7 @@
         </p:nvSpPr>
         <p:spPr>
           <a:xfrm>
-            <a:off x="2430592" y="1503095"/>
+            <a:off x="1062440" y="1475661"/>
             <a:ext cx="360040" cy="360040"/>
           </a:xfrm>
           <a:prstGeom prst="ellipse">
@@ -2180,7 +2182,7 @@
         </p:nvSpPr>
         <p:spPr>
           <a:xfrm>
-            <a:off x="5166896" y="2518127"/>
+            <a:off x="3798744" y="2490693"/>
             <a:ext cx="360040" cy="360040"/>
           </a:xfrm>
           <a:prstGeom prst="ellipse">
@@ -2219,6 +2221,146 @@
             <a:r>
               <a:rPr kumimoji="1" lang="en-US" altLang="ja-JP" dirty="0"/>
               <a:t>3</a:t>
+            </a:r>
+            <a:endParaRPr kumimoji="1" lang="ja-JP" altLang="en-US" dirty="0"/>
+          </a:p>
+        </p:txBody>
+      </p:sp>
+      <p:pic>
+        <p:nvPicPr>
+          <p:cNvPr id="5" name="図 4">
+            <a:extLst>
+              <a:ext uri="{FF2B5EF4-FFF2-40B4-BE49-F238E27FC236}">
+                <a16:creationId xmlns:a16="http://schemas.microsoft.com/office/drawing/2014/main" id="{2A762CAD-DF92-857B-F837-68F39FAE3954}"/>
+              </a:ext>
+            </a:extLst>
+          </p:cNvPr>
+          <p:cNvPicPr>
+            <a:picLocks noChangeAspect="1"/>
+          </p:cNvPicPr>
+          <p:nvPr/>
+        </p:nvPicPr>
+        <p:blipFill>
+          <a:blip r:embed="rId3"/>
+          <a:stretch>
+            <a:fillRect/>
+          </a:stretch>
+        </p:blipFill>
+        <p:spPr>
+          <a:xfrm>
+            <a:off x="5436096" y="3281222"/>
+            <a:ext cx="3681611" cy="765973"/>
+          </a:xfrm>
+          <a:prstGeom prst="rect">
+            <a:avLst/>
+          </a:prstGeom>
+        </p:spPr>
+      </p:pic>
+      <p:sp>
+        <p:nvSpPr>
+          <p:cNvPr id="10" name="四角形: 角を丸くする 3">
+            <a:extLst>
+              <a:ext uri="{FF2B5EF4-FFF2-40B4-BE49-F238E27FC236}">
+                <a16:creationId xmlns:a16="http://schemas.microsoft.com/office/drawing/2014/main" id="{D0934CC4-B6CA-33A1-A5FA-BCA1650D4CBC}"/>
+              </a:ext>
+            </a:extLst>
+          </p:cNvPr>
+          <p:cNvSpPr/>
+          <p:nvPr/>
+        </p:nvSpPr>
+        <p:spPr>
+          <a:xfrm>
+            <a:off x="7524327" y="3734423"/>
+            <a:ext cx="1593379" cy="312772"/>
+          </a:xfrm>
+          <a:prstGeom prst="roundRect">
+            <a:avLst/>
+          </a:prstGeom>
+          <a:noFill/>
+          <a:ln w="38100">
+            <a:solidFill>
+              <a:srgbClr val="FF0000"/>
+            </a:solidFill>
+          </a:ln>
+        </p:spPr>
+        <p:style>
+          <a:lnRef idx="2">
+            <a:schemeClr val="accent1">
+              <a:shade val="50000"/>
+            </a:schemeClr>
+          </a:lnRef>
+          <a:fillRef idx="1">
+            <a:schemeClr val="accent1"/>
+          </a:fillRef>
+          <a:effectRef idx="0">
+            <a:schemeClr val="accent1"/>
+          </a:effectRef>
+          <a:fontRef idx="minor">
+            <a:schemeClr val="lt1"/>
+          </a:fontRef>
+        </p:style>
+        <p:txBody>
+          <a:bodyPr rtlCol="0" anchor="ctr"/>
+          <a:lstStyle/>
+          <a:p>
+            <a:pPr algn="ctr"/>
+            <a:endParaRPr kumimoji="1" lang="ja-JP" altLang="en-US"/>
+          </a:p>
+        </p:txBody>
+      </p:sp>
+      <p:sp>
+        <p:nvSpPr>
+          <p:cNvPr id="16" name="楕円 5">
+            <a:extLst>
+              <a:ext uri="{FF2B5EF4-FFF2-40B4-BE49-F238E27FC236}">
+                <a16:creationId xmlns:a16="http://schemas.microsoft.com/office/drawing/2014/main" id="{CAB2987E-51B9-C9B1-79DA-F83D698BE242}"/>
+              </a:ext>
+            </a:extLst>
+          </p:cNvPr>
+          <p:cNvSpPr/>
+          <p:nvPr/>
+        </p:nvSpPr>
+        <p:spPr>
+          <a:xfrm>
+            <a:off x="7096881" y="3734423"/>
+            <a:ext cx="360040" cy="360040"/>
+          </a:xfrm>
+          <a:prstGeom prst="ellipse">
+            <a:avLst/>
+          </a:prstGeom>
+          <a:solidFill>
+            <a:srgbClr val="FF0000"/>
+          </a:solidFill>
+          <a:ln>
+            <a:solidFill>
+              <a:schemeClr val="tx1"/>
+            </a:solidFill>
+          </a:ln>
+        </p:spPr>
+        <p:style>
+          <a:lnRef idx="2">
+            <a:schemeClr val="accent1">
+              <a:shade val="50000"/>
+            </a:schemeClr>
+          </a:lnRef>
+          <a:fillRef idx="1">
+            <a:schemeClr val="accent1"/>
+          </a:fillRef>
+          <a:effectRef idx="0">
+            <a:schemeClr val="accent1"/>
+          </a:effectRef>
+          <a:fontRef idx="minor">
+            <a:schemeClr val="lt1"/>
+          </a:fontRef>
+        </p:style>
+        <p:txBody>
+          <a:bodyPr rtlCol="0" anchor="ctr"/>
+          <a:lstStyle/>
+          <a:p>
+            <a:pPr algn="ctr"/>
+            <a:r>
+              <a:rPr kumimoji="1" lang="en-US" altLang="ja-JP" dirty="0"/>
+              <a:t>4</a:t>
             </a:r>
             <a:endParaRPr kumimoji="1" lang="ja-JP" altLang="en-US" dirty="0"/>
           </a:p>
@@ -2283,41 +2425,6 @@
           </a:p>
         </p:txBody>
       </p:sp>
-      <p:sp>
-        <p:nvSpPr>
-          <p:cNvPr id="4" name="テキスト ボックス 3">
-            <a:extLst>
-              <a:ext uri="{FF2B5EF4-FFF2-40B4-BE49-F238E27FC236}">
-                <a16:creationId xmlns:a16="http://schemas.microsoft.com/office/drawing/2014/main" id="{99DFD70E-B0CF-BB7B-5471-E2A294592AEF}"/>
-              </a:ext>
-            </a:extLst>
-          </p:cNvPr>
-          <p:cNvSpPr txBox="1"/>
-          <p:nvPr/>
-        </p:nvSpPr>
-        <p:spPr>
-          <a:xfrm>
-            <a:off x="0" y="1196752"/>
-            <a:ext cx="2236510" cy="400110"/>
-          </a:xfrm>
-          <a:prstGeom prst="rect">
-            <a:avLst/>
-          </a:prstGeom>
-          <a:noFill/>
-        </p:spPr>
-        <p:txBody>
-          <a:bodyPr wrap="none" rtlCol="0">
-            <a:spAutoFit/>
-          </a:bodyPr>
-          <a:lstStyle/>
-          <a:p>
-            <a:r>
-              <a:rPr kumimoji="1" lang="ja-JP" altLang="en-US" sz="2000" dirty="0"/>
-              <a:t>フォルダの開き方</a:t>
-            </a:r>
-          </a:p>
-        </p:txBody>
-      </p:sp>
       <p:pic>
         <p:nvPicPr>
           <p:cNvPr id="6" name="図 5">
@@ -2340,7 +2447,7 @@
         </p:blipFill>
         <p:spPr>
           <a:xfrm>
-            <a:off x="576064" y="2276872"/>
+            <a:off x="251520" y="1556792"/>
             <a:ext cx="3779848" cy="3398815"/>
           </a:xfrm>
           <a:prstGeom prst="rect">
@@ -2362,7 +2469,7 @@
         </p:nvSpPr>
         <p:spPr>
           <a:xfrm>
-            <a:off x="864096" y="2276872"/>
+            <a:off x="539552" y="1556792"/>
             <a:ext cx="720080" cy="288032"/>
           </a:xfrm>
           <a:prstGeom prst="roundRect">
@@ -2414,7 +2521,7 @@
         </p:nvSpPr>
         <p:spPr>
           <a:xfrm>
-            <a:off x="1080120" y="3861048"/>
+            <a:off x="755576" y="3140968"/>
             <a:ext cx="3096344" cy="288032"/>
           </a:xfrm>
           <a:prstGeom prst="roundRect">
@@ -2466,7 +2573,7 @@
         </p:nvSpPr>
         <p:spPr>
           <a:xfrm>
-            <a:off x="432048" y="1628800"/>
+            <a:off x="107504" y="1010368"/>
             <a:ext cx="5570756" cy="400110"/>
           </a:xfrm>
           <a:prstGeom prst="rect">
@@ -2501,8 +2608,8 @@
         </p:nvSpPr>
         <p:spPr>
           <a:xfrm>
-            <a:off x="4392488" y="3429000"/>
-            <a:ext cx="4570482" cy="923330"/>
+            <a:off x="251520" y="5385967"/>
+            <a:ext cx="7560840" cy="923330"/>
           </a:xfrm>
           <a:prstGeom prst="rect">
             <a:avLst/>
@@ -2510,7 +2617,7 @@
           <a:noFill/>
         </p:spPr>
         <p:txBody>
-          <a:bodyPr wrap="none" rtlCol="0">
+          <a:bodyPr wrap="square" rtlCol="0">
             <a:spAutoFit/>
           </a:bodyPr>
           <a:lstStyle/>
@@ -2519,20 +2626,112 @@
               <a:rPr lang="ja-JP" altLang="en-US" dirty="0"/>
               <a:t>「このフォルダー内のファイルの作成者を</a:t>
             </a:r>
-            <a:endParaRPr lang="en-US" altLang="ja-JP" dirty="0"/>
-          </a:p>
-          <a:p>
             <a:r>
               <a:rPr kumimoji="1" lang="ja-JP" altLang="en-US" dirty="0"/>
               <a:t>信頼しますか？」という表示が出たら</a:t>
             </a:r>
-            <a:endParaRPr kumimoji="1" lang="en-US" altLang="ja-JP" dirty="0"/>
-          </a:p>
-          <a:p>
             <a:r>
               <a:rPr lang="ja-JP" altLang="en-US" dirty="0"/>
-              <a:t>「はい、作成者を信頼します」を選ぶ</a:t>
-            </a:r>
+              <a:t>「親フォルダー</a:t>
+            </a:r>
+            <a:r>
+              <a:rPr lang="en-US" altLang="ja-JP" dirty="0"/>
+              <a:t>`</a:t>
+            </a:r>
+            <a:r>
+              <a:rPr lang="en-US" altLang="ja-JP" dirty="0" err="1"/>
+              <a:t>github</a:t>
+            </a:r>
+            <a:r>
+              <a:rPr lang="en-US" altLang="ja-JP" dirty="0"/>
+              <a:t>`</a:t>
+            </a:r>
+            <a:r>
+              <a:rPr lang="ja-JP" altLang="en-US" dirty="0"/>
+              <a:t>内のすべてのファイルの作成者を信頼します」にチェックを入れてから「はい、作成者を信頼します」を選ぶ</a:t>
+            </a:r>
+            <a:endParaRPr kumimoji="1" lang="ja-JP" altLang="en-US" dirty="0"/>
+          </a:p>
+        </p:txBody>
+      </p:sp>
+      <p:pic>
+        <p:nvPicPr>
+          <p:cNvPr id="5" name="図 4">
+            <a:extLst>
+              <a:ext uri="{FF2B5EF4-FFF2-40B4-BE49-F238E27FC236}">
+                <a16:creationId xmlns:a16="http://schemas.microsoft.com/office/drawing/2014/main" id="{936DF84B-4490-980A-6ECC-44BFF8B48005}"/>
+              </a:ext>
+            </a:extLst>
+          </p:cNvPr>
+          <p:cNvPicPr>
+            <a:picLocks noChangeAspect="1"/>
+          </p:cNvPicPr>
+          <p:nvPr/>
+        </p:nvPicPr>
+        <p:blipFill>
+          <a:blip r:embed="rId3"/>
+          <a:stretch>
+            <a:fillRect/>
+          </a:stretch>
+        </p:blipFill>
+        <p:spPr>
+          <a:xfrm>
+            <a:off x="4319400" y="1700808"/>
+            <a:ext cx="4564487" cy="3285753"/>
+          </a:xfrm>
+          <a:prstGeom prst="rect">
+            <a:avLst/>
+          </a:prstGeom>
+        </p:spPr>
+      </p:pic>
+      <p:sp>
+        <p:nvSpPr>
+          <p:cNvPr id="12" name="四角形: 角を丸くする 11">
+            <a:extLst>
+              <a:ext uri="{FF2B5EF4-FFF2-40B4-BE49-F238E27FC236}">
+                <a16:creationId xmlns:a16="http://schemas.microsoft.com/office/drawing/2014/main" id="{BF0E868D-556E-6AD2-E425-5C02725127FA}"/>
+              </a:ext>
+            </a:extLst>
+          </p:cNvPr>
+          <p:cNvSpPr/>
+          <p:nvPr/>
+        </p:nvSpPr>
+        <p:spPr>
+          <a:xfrm>
+            <a:off x="5076056" y="4293096"/>
+            <a:ext cx="2088232" cy="288032"/>
+          </a:xfrm>
+          <a:prstGeom prst="roundRect">
+            <a:avLst/>
+          </a:prstGeom>
+          <a:noFill/>
+          <a:ln w="28575">
+            <a:solidFill>
+              <a:srgbClr val="FF0000"/>
+            </a:solidFill>
+          </a:ln>
+        </p:spPr>
+        <p:style>
+          <a:lnRef idx="2">
+            <a:schemeClr val="accent1">
+              <a:shade val="50000"/>
+            </a:schemeClr>
+          </a:lnRef>
+          <a:fillRef idx="1">
+            <a:schemeClr val="accent1"/>
+          </a:fillRef>
+          <a:effectRef idx="0">
+            <a:schemeClr val="accent1"/>
+          </a:effectRef>
+          <a:fontRef idx="minor">
+            <a:schemeClr val="lt1"/>
+          </a:fontRef>
+        </p:style>
+        <p:txBody>
+          <a:bodyPr rtlCol="0" anchor="ctr"/>
+          <a:lstStyle/>
+          <a:p>
+            <a:pPr algn="ctr"/>
             <a:endParaRPr kumimoji="1" lang="ja-JP" altLang="en-US" dirty="0"/>
           </a:p>
         </p:txBody>
@@ -5440,7 +5639,7 @@
               <a:buChar char="•"/>
             </a:pPr>
             <a:r>
-              <a:rPr kumimoji="1" lang="en-US" altLang="ja-JP" sz="2400" dirty="0" err="1"/>
+              <a:rPr kumimoji="1" lang="en-US" altLang="ja-JP" sz="2400" dirty="0"/>
               <a:t>VSCode</a:t>
             </a:r>
             <a:r>
@@ -16383,14 +16582,13 @@
           <a:lstStyle/>
           <a:p>
             <a:r>
-              <a:rPr kumimoji="1" lang="en-US" altLang="ja-JP" sz="2400" dirty="0" err="1"/>
+              <a:rPr kumimoji="1" lang="en-US" altLang="ja-JP" sz="2400" dirty="0"/>
               <a:t>VSCode</a:t>
             </a:r>
             <a:r>
-              <a:rPr kumimoji="1" lang="ja-JP" altLang="en-US" sz="2400"/>
+              <a:rPr kumimoji="1" lang="ja-JP" altLang="en-US" sz="2400" dirty="0"/>
               <a:t>からのコミット</a:t>
             </a:r>
-            <a:endParaRPr kumimoji="1" lang="ja-JP" altLang="en-US" sz="2400" dirty="0"/>
           </a:p>
         </p:txBody>
       </p:sp>
@@ -16885,19 +17083,7 @@
               <a:rPr kumimoji="1" lang="en-US" altLang="ja-JP" sz="2000" dirty="0">
                 <a:latin typeface="Consolas" panose="020B0609020204030204" pitchFamily="49" charset="0"/>
               </a:rPr>
-              <a:t>git commit –m ”commit from </a:t>
-            </a:r>
-            <a:r>
-              <a:rPr kumimoji="1" lang="en-US" altLang="ja-JP" sz="2000" dirty="0" err="1">
-                <a:latin typeface="Consolas" panose="020B0609020204030204" pitchFamily="49" charset="0"/>
-              </a:rPr>
-              <a:t>VSCode</a:t>
-            </a:r>
-            <a:r>
-              <a:rPr kumimoji="1" lang="en-US" altLang="ja-JP" sz="2000" dirty="0">
-                <a:latin typeface="Consolas" panose="020B0609020204030204" pitchFamily="49" charset="0"/>
-              </a:rPr>
-              <a:t>”</a:t>
+              <a:t>git commit –m ”commit from VSCode”</a:t>
             </a:r>
             <a:endParaRPr kumimoji="1" lang="ja-JP" altLang="en-US" sz="2000" dirty="0">
               <a:latin typeface="Consolas" panose="020B0609020204030204" pitchFamily="49" charset="0"/>
@@ -17692,26 +17878,26 @@
           <a:lstStyle/>
           <a:p>
             <a:r>
-              <a:rPr lang="ja-JP" altLang="en-US"/>
+              <a:rPr lang="ja-JP" altLang="en-US" dirty="0"/>
               <a:t>一番上に</a:t>
             </a:r>
             <a:r>
-              <a:rPr kumimoji="1" lang="ja-JP" altLang="en-US"/>
+              <a:rPr kumimoji="1" lang="ja-JP" altLang="en-US" dirty="0"/>
               <a:t>「</a:t>
             </a:r>
             <a:r>
-              <a:rPr kumimoji="1" lang="en-US" altLang="ja-JP"/>
+              <a:rPr kumimoji="1" lang="en-US" altLang="ja-JP" dirty="0"/>
               <a:t>commit from VSCode</a:t>
             </a:r>
             <a:r>
-              <a:rPr kumimoji="1" lang="ja-JP" altLang="en-US"/>
+              <a:rPr kumimoji="1" lang="ja-JP" altLang="en-US" dirty="0"/>
               <a:t>」と入力</a:t>
             </a:r>
             <a:r>
-              <a:rPr lang="ja-JP" altLang="en-US"/>
+              <a:rPr lang="ja-JP" altLang="en-US" dirty="0"/>
               <a:t>する</a:t>
             </a:r>
-            <a:endParaRPr lang="en-US" altLang="ja-JP"/>
+            <a:endParaRPr lang="en-US" altLang="ja-JP" dirty="0"/>
           </a:p>
         </p:txBody>
       </p:sp>
@@ -18794,13 +18980,7 @@
               <a:rPr kumimoji="1" lang="en-US" altLang="ja-JP" dirty="0">
                 <a:latin typeface="Consolas" panose="020B0609020204030204" pitchFamily="49" charset="0"/>
               </a:rPr>
-              <a:t>commit from </a:t>
-            </a:r>
-            <a:r>
-              <a:rPr kumimoji="1" lang="en-US" altLang="ja-JP" dirty="0" err="1">
-                <a:latin typeface="Consolas" panose="020B0609020204030204" pitchFamily="49" charset="0"/>
-              </a:rPr>
-              <a:t>VSCode</a:t>
+              <a:t>commit from VSCode</a:t>
             </a:r>
             <a:endParaRPr kumimoji="1" lang="ja-JP" altLang="en-US" dirty="0">
               <a:latin typeface="Consolas" panose="020B0609020204030204" pitchFamily="49" charset="0"/>
@@ -18924,6 +19104,36 @@
           <a:chExt cx="0" cy="0"/>
         </a:xfrm>
       </p:grpSpPr>
+      <p:pic>
+        <p:nvPicPr>
+          <p:cNvPr id="11" name="図 10">
+            <a:extLst>
+              <a:ext uri="{FF2B5EF4-FFF2-40B4-BE49-F238E27FC236}">
+                <a16:creationId xmlns:a16="http://schemas.microsoft.com/office/drawing/2014/main" id="{2CAA9242-5C9F-A693-096A-DBA29366545F}"/>
+              </a:ext>
+            </a:extLst>
+          </p:cNvPr>
+          <p:cNvPicPr>
+            <a:picLocks noChangeAspect="1"/>
+          </p:cNvPicPr>
+          <p:nvPr/>
+        </p:nvPicPr>
+        <p:blipFill>
+          <a:blip r:embed="rId2"/>
+          <a:stretch>
+            <a:fillRect/>
+          </a:stretch>
+        </p:blipFill>
+        <p:spPr>
+          <a:xfrm>
+            <a:off x="1547664" y="1690845"/>
+            <a:ext cx="4464496" cy="4690483"/>
+          </a:xfrm>
+          <a:prstGeom prst="rect">
+            <a:avLst/>
+          </a:prstGeom>
+        </p:spPr>
+      </p:pic>
       <p:sp>
         <p:nvSpPr>
           <p:cNvPr id="2" name="テキスト プレースホルダー 1">
@@ -18956,53 +19166,6 @@
           </a:p>
         </p:txBody>
       </p:sp>
-      <p:pic>
-        <p:nvPicPr>
-          <p:cNvPr id="1026" name="Picture 2">
-            <a:extLst>
-              <a:ext uri="{FF2B5EF4-FFF2-40B4-BE49-F238E27FC236}">
-                <a16:creationId xmlns:a16="http://schemas.microsoft.com/office/drawing/2014/main" id="{3063EEB0-5923-62C6-036E-10C948040125}"/>
-              </a:ext>
-            </a:extLst>
-          </p:cNvPr>
-          <p:cNvPicPr>
-            <a:picLocks noChangeAspect="1" noChangeArrowheads="1"/>
-          </p:cNvPicPr>
-          <p:nvPr/>
-        </p:nvPicPr>
-        <p:blipFill>
-          <a:blip r:embed="rId2">
-            <a:extLst>
-              <a:ext uri="{28A0092B-C50C-407E-A947-70E740481C1C}">
-                <a14:useLocalDpi xmlns:a14="http://schemas.microsoft.com/office/drawing/2010/main" val="0"/>
-              </a:ext>
-            </a:extLst>
-          </a:blip>
-          <a:srcRect/>
-          <a:stretch>
-            <a:fillRect/>
-          </a:stretch>
-        </p:blipFill>
-        <p:spPr bwMode="auto">
-          <a:xfrm>
-            <a:off x="1259632" y="1628800"/>
-            <a:ext cx="5734050" cy="4724400"/>
-          </a:xfrm>
-          <a:prstGeom prst="rect">
-            <a:avLst/>
-          </a:prstGeom>
-          <a:noFill/>
-          <a:extLst>
-            <a:ext uri="{909E8E84-426E-40DD-AFC4-6F175D3DCCD1}">
-              <a14:hiddenFill xmlns:a14="http://schemas.microsoft.com/office/drawing/2010/main">
-                <a:solidFill>
-                  <a:srgbClr val="FFFFFF"/>
-                </a:solidFill>
-              </a14:hiddenFill>
-            </a:ext>
-          </a:extLst>
-        </p:spPr>
-      </p:pic>
       <p:sp>
         <p:nvSpPr>
           <p:cNvPr id="3" name="四角形: 角を丸くする 2">
@@ -19018,7 +19181,7 @@
         <p:spPr>
           <a:xfrm>
             <a:off x="1547664" y="6093296"/>
-            <a:ext cx="2304256" cy="288032"/>
+            <a:ext cx="1440160" cy="288032"/>
           </a:xfrm>
           <a:prstGeom prst="roundRect">
             <a:avLst/>
@@ -19069,8 +19232,8 @@
         </p:nvSpPr>
         <p:spPr>
           <a:xfrm>
-            <a:off x="1547664" y="2276872"/>
-            <a:ext cx="2304256" cy="432048"/>
+            <a:off x="1763688" y="2253582"/>
+            <a:ext cx="1944216" cy="432048"/>
           </a:xfrm>
           <a:prstGeom prst="roundRect">
             <a:avLst/>
@@ -19232,13 +19395,14 @@
             </a:extLst>
           </p:cNvPr>
           <p:cNvCxnSpPr>
+            <a:cxnSpLocks/>
             <a:endCxn id="4" idx="1"/>
           </p:cNvCxnSpPr>
           <p:nvPr/>
         </p:nvCxnSpPr>
         <p:spPr>
           <a:xfrm rot="16200000" flipH="1">
-            <a:off x="611560" y="1556792"/>
+            <a:off x="827584" y="1533502"/>
             <a:ext cx="1080120" cy="792088"/>
           </a:xfrm>
           <a:prstGeom prst="bentConnector2">

--- a/practice_basic/fig/slide.pptx
+++ b/practice_basic/fig/slide.pptx
@@ -13,12 +13,12 @@
     <p:sldId id="411" r:id="rId4"/>
     <p:sldId id="400" r:id="rId5"/>
     <p:sldId id="395" r:id="rId6"/>
-    <p:sldId id="355" r:id="rId7"/>
-    <p:sldId id="356" r:id="rId8"/>
-    <p:sldId id="409" r:id="rId9"/>
-    <p:sldId id="396" r:id="rId10"/>
-    <p:sldId id="401" r:id="rId11"/>
-    <p:sldId id="412" r:id="rId12"/>
+    <p:sldId id="413" r:id="rId7"/>
+    <p:sldId id="355" r:id="rId8"/>
+    <p:sldId id="356" r:id="rId9"/>
+    <p:sldId id="409" r:id="rId10"/>
+    <p:sldId id="396" r:id="rId11"/>
+    <p:sldId id="401" r:id="rId12"/>
     <p:sldId id="399" r:id="rId13"/>
     <p:sldId id="402" r:id="rId14"/>
     <p:sldId id="403" r:id="rId15"/>
@@ -239,7 +239,7 @@
           </a:lstStyle>
           <a:p>
             <a:fld id="{6B8D1B20-A248-FB47-8240-73C0C5F47C9D}" type="datetimeFigureOut">
-              <a:t>2026/10/14</a:t>
+              <a:t>2026/10/19</a:t>
             </a:fld>
             <a:endParaRPr kumimoji="1" lang="ja-JP" altLang="en-US"/>
           </a:p>
@@ -1381,12 +1381,88 @@
           <a:chExt cx="0" cy="0"/>
         </a:xfrm>
       </p:grpSpPr>
+      <p:sp>
+        <p:nvSpPr>
+          <p:cNvPr id="2" name="テキスト プレースホルダー 1">
+            <a:extLst>
+              <a:ext uri="{FF2B5EF4-FFF2-40B4-BE49-F238E27FC236}">
+                <a16:creationId xmlns:a16="http://schemas.microsoft.com/office/drawing/2014/main" id="{FBD201B4-8564-9EEC-7283-7789AB16B4CF}"/>
+              </a:ext>
+            </a:extLst>
+          </p:cNvPr>
+          <p:cNvSpPr>
+            <a:spLocks noGrp="1"/>
+          </p:cNvSpPr>
+          <p:nvPr>
+            <p:ph type="body" sz="quarter" idx="10"/>
+          </p:nvPr>
+        </p:nvSpPr>
+        <p:spPr/>
+        <p:txBody>
+          <a:bodyPr/>
+          <a:lstStyle/>
+          <a:p>
+            <a:r>
+              <a:rPr kumimoji="1" lang="en-US" altLang="ja-JP" dirty="0"/>
+              <a:t>Git Bash</a:t>
+            </a:r>
+            <a:r>
+              <a:rPr kumimoji="1" lang="ja-JP" altLang="en-US" dirty="0"/>
+              <a:t>のプロンプト</a:t>
+            </a:r>
+          </a:p>
+        </p:txBody>
+      </p:sp>
+      <p:sp>
+        <p:nvSpPr>
+          <p:cNvPr id="3" name="テキスト ボックス 2">
+            <a:extLst>
+              <a:ext uri="{FF2B5EF4-FFF2-40B4-BE49-F238E27FC236}">
+                <a16:creationId xmlns:a16="http://schemas.microsoft.com/office/drawing/2014/main" id="{B9677FCC-56E0-B4BA-7C1E-F2C96EDD96FC}"/>
+              </a:ext>
+            </a:extLst>
+          </p:cNvPr>
+          <p:cNvSpPr txBox="1"/>
+          <p:nvPr/>
+        </p:nvSpPr>
+        <p:spPr>
+          <a:xfrm>
+            <a:off x="251520" y="1052736"/>
+            <a:ext cx="7848872" cy="400110"/>
+          </a:xfrm>
+          <a:prstGeom prst="rect">
+            <a:avLst/>
+          </a:prstGeom>
+          <a:noFill/>
+        </p:spPr>
+        <p:txBody>
+          <a:bodyPr wrap="square" rtlCol="0">
+            <a:spAutoFit/>
+          </a:bodyPr>
+          <a:lstStyle/>
+          <a:p>
+            <a:r>
+              <a:rPr kumimoji="1" lang="en-US" altLang="ja-JP" sz="2000" dirty="0"/>
+              <a:t>Git Bash</a:t>
+            </a:r>
+            <a:r>
+              <a:rPr kumimoji="1" lang="ja-JP" altLang="en-US" sz="2000" dirty="0"/>
+              <a:t>はカレントディレクトリとカレントブランチを</a:t>
+            </a:r>
+            <a:r>
+              <a:rPr lang="ja-JP" altLang="en-US" sz="2000" dirty="0"/>
+              <a:t>表示する</a:t>
+            </a:r>
+            <a:endParaRPr kumimoji="1" lang="ja-JP" altLang="en-US" sz="2000" dirty="0"/>
+          </a:p>
+        </p:txBody>
+      </p:sp>
       <p:pic>
         <p:nvPicPr>
-          <p:cNvPr id="9" name="図 8">
-            <a:extLst>
-              <a:ext uri="{FF2B5EF4-FFF2-40B4-BE49-F238E27FC236}">
-                <a16:creationId xmlns:a16="http://schemas.microsoft.com/office/drawing/2014/main" id="{8E459097-6039-898B-A41F-345483BCF7FC}"/>
+          <p:cNvPr id="5" name="図 4">
+            <a:extLst>
+              <a:ext uri="{FF2B5EF4-FFF2-40B4-BE49-F238E27FC236}">
+                <a16:creationId xmlns:a16="http://schemas.microsoft.com/office/drawing/2014/main" id="{8E48B141-EED6-E679-6425-6F233CBBAFC0}"/>
               </a:ext>
             </a:extLst>
           </p:cNvPr>
@@ -1403,8 +1479,8 @@
         </p:blipFill>
         <p:spPr>
           <a:xfrm>
-            <a:off x="1403648" y="1483043"/>
-            <a:ext cx="4690619" cy="4826277"/>
+            <a:off x="1043608" y="2996952"/>
+            <a:ext cx="6919560" cy="1783235"/>
           </a:xfrm>
           <a:prstGeom prst="rect">
             <a:avLst/>
@@ -1413,42 +1489,147 @@
       </p:pic>
       <p:sp>
         <p:nvSpPr>
-          <p:cNvPr id="2" name="テキスト プレースホルダー 1">
-            <a:extLst>
-              <a:ext uri="{FF2B5EF4-FFF2-40B4-BE49-F238E27FC236}">
-                <a16:creationId xmlns:a16="http://schemas.microsoft.com/office/drawing/2014/main" id="{3012622C-AF18-0A16-A8B4-58B412C1CD93}"/>
-              </a:ext>
-            </a:extLst>
-          </p:cNvPr>
-          <p:cNvSpPr>
-            <a:spLocks noGrp="1"/>
-          </p:cNvSpPr>
-          <p:nvPr>
-            <p:ph type="body" sz="quarter" idx="10"/>
-          </p:nvPr>
-        </p:nvSpPr>
-        <p:spPr/>
-        <p:txBody>
-          <a:bodyPr/>
-          <a:lstStyle/>
-          <a:p>
+          <p:cNvPr id="6" name="テキスト ボックス 5">
+            <a:extLst>
+              <a:ext uri="{FF2B5EF4-FFF2-40B4-BE49-F238E27FC236}">
+                <a16:creationId xmlns:a16="http://schemas.microsoft.com/office/drawing/2014/main" id="{CD8D1EE7-CE52-63C0-D93E-0C46FB692823}"/>
+              </a:ext>
+            </a:extLst>
+          </p:cNvPr>
+          <p:cNvSpPr txBox="1"/>
+          <p:nvPr/>
+        </p:nvSpPr>
+        <p:spPr>
+          <a:xfrm>
+            <a:off x="465936" y="1990581"/>
+            <a:ext cx="7994496" cy="646331"/>
+          </a:xfrm>
+          <a:prstGeom prst="rect">
+            <a:avLst/>
+          </a:prstGeom>
+          <a:noFill/>
+        </p:spPr>
+        <p:txBody>
+          <a:bodyPr wrap="none" rtlCol="0">
+            <a:spAutoFit/>
+          </a:bodyPr>
+          <a:lstStyle/>
+          <a:p>
+            <a:r>
+              <a:rPr lang="en-US" altLang="ja-JP" dirty="0"/>
+              <a:t>Git</a:t>
+            </a:r>
+            <a:r>
+              <a:rPr lang="ja-JP" altLang="en-US" dirty="0"/>
+              <a:t> </a:t>
+            </a:r>
+            <a:r>
+              <a:rPr lang="en-US" altLang="ja-JP" dirty="0"/>
+              <a:t>Bash</a:t>
+            </a:r>
+            <a:r>
+              <a:rPr lang="ja-JP" altLang="en-US" dirty="0"/>
+              <a:t>を開いた直後は「ホームディレクトリ」がカレントディレクトリに</a:t>
+            </a:r>
+            <a:endParaRPr lang="en-US" altLang="ja-JP" dirty="0"/>
+          </a:p>
+          <a:p>
+            <a:r>
+              <a:rPr kumimoji="1" lang="ja-JP" altLang="en-US" dirty="0"/>
+              <a:t>なっている </a:t>
+            </a:r>
             <a:r>
               <a:rPr kumimoji="1" lang="en-US" altLang="ja-JP" dirty="0"/>
-              <a:t>VS Code</a:t>
+              <a:t>(PC</a:t>
             </a:r>
             <a:r>
               <a:rPr kumimoji="1" lang="ja-JP" altLang="en-US" dirty="0"/>
-              <a:t>の起動</a:t>
-            </a:r>
-          </a:p>
-        </p:txBody>
-      </p:sp>
-      <p:sp>
-        <p:nvSpPr>
-          <p:cNvPr id="3" name="四角形: 角を丸くする 2">
-            <a:extLst>
-              <a:ext uri="{FF2B5EF4-FFF2-40B4-BE49-F238E27FC236}">
-                <a16:creationId xmlns:a16="http://schemas.microsoft.com/office/drawing/2014/main" id="{82A18DF6-AB1C-D82B-7313-6A794BC4F169}"/>
+              <a:t>室の環境では</a:t>
+            </a:r>
+            <a:r>
+              <a:rPr kumimoji="1" lang="en-US" altLang="ja-JP" dirty="0"/>
+              <a:t>/z/</a:t>
+            </a:r>
+            <a:r>
+              <a:rPr kumimoji="1" lang="ja-JP" altLang="en-US" dirty="0"/>
+              <a:t>になっているはず</a:t>
+            </a:r>
+            <a:r>
+              <a:rPr kumimoji="1" lang="en-US" altLang="ja-JP" dirty="0"/>
+              <a:t>)</a:t>
+            </a:r>
+            <a:endParaRPr kumimoji="1" lang="ja-JP" altLang="en-US" dirty="0"/>
+          </a:p>
+        </p:txBody>
+      </p:sp>
+      <p:sp>
+        <p:nvSpPr>
+          <p:cNvPr id="7" name="テキスト ボックス 6">
+            <a:extLst>
+              <a:ext uri="{FF2B5EF4-FFF2-40B4-BE49-F238E27FC236}">
+                <a16:creationId xmlns:a16="http://schemas.microsoft.com/office/drawing/2014/main" id="{5B70546C-C6E7-FD5D-61F4-F814FA6EDF47}"/>
+              </a:ext>
+            </a:extLst>
+          </p:cNvPr>
+          <p:cNvSpPr txBox="1"/>
+          <p:nvPr/>
+        </p:nvSpPr>
+        <p:spPr>
+          <a:xfrm>
+            <a:off x="251520" y="5373216"/>
+            <a:ext cx="7981672" cy="646331"/>
+          </a:xfrm>
+          <a:prstGeom prst="rect">
+            <a:avLst/>
+          </a:prstGeom>
+          <a:noFill/>
+        </p:spPr>
+        <p:txBody>
+          <a:bodyPr wrap="none" rtlCol="0">
+            <a:spAutoFit/>
+          </a:bodyPr>
+          <a:lstStyle/>
+          <a:p>
+            <a:r>
+              <a:rPr kumimoji="1" lang="ja-JP" altLang="en-US" dirty="0"/>
+              <a:t>「</a:t>
+            </a:r>
+            <a:r>
+              <a:rPr kumimoji="1" lang="en-US" altLang="ja-JP" dirty="0"/>
+              <a:t>cd </a:t>
+            </a:r>
+            <a:r>
+              <a:rPr kumimoji="1" lang="en-US" altLang="ja-JP" dirty="0" err="1"/>
+              <a:t>github</a:t>
+            </a:r>
+            <a:r>
+              <a:rPr kumimoji="1" lang="ja-JP" altLang="en-US" dirty="0"/>
+              <a:t>」コマンドにより、カレントディレクトリを</a:t>
+            </a:r>
+            <a:r>
+              <a:rPr kumimoji="1" lang="en-US" altLang="ja-JP" dirty="0" err="1"/>
+              <a:t>github</a:t>
+            </a:r>
+            <a:r>
+              <a:rPr kumimoji="1" lang="ja-JP" altLang="en-US" dirty="0"/>
+              <a:t>に移動すると</a:t>
+            </a:r>
+            <a:endParaRPr kumimoji="1" lang="en-US" altLang="ja-JP" dirty="0"/>
+          </a:p>
+          <a:p>
+            <a:r>
+              <a:rPr kumimoji="1" lang="ja-JP" altLang="en-US" dirty="0"/>
+              <a:t>右の表示が変わる</a:t>
+            </a:r>
+          </a:p>
+        </p:txBody>
+      </p:sp>
+      <p:sp>
+        <p:nvSpPr>
+          <p:cNvPr id="8" name="四角形: 角を丸くする 7">
+            <a:extLst>
+              <a:ext uri="{FF2B5EF4-FFF2-40B4-BE49-F238E27FC236}">
+                <a16:creationId xmlns:a16="http://schemas.microsoft.com/office/drawing/2014/main" id="{9495AE80-03CE-C93E-E8B9-D2CFC05F2275}"/>
               </a:ext>
             </a:extLst>
           </p:cNvPr>
@@ -1457,8 +1638,8 @@
         </p:nvSpPr>
         <p:spPr>
           <a:xfrm>
-            <a:off x="1393985" y="6028275"/>
-            <a:ext cx="1521831" cy="281045"/>
+            <a:off x="5652120" y="3140968"/>
+            <a:ext cx="504056" cy="360040"/>
           </a:xfrm>
           <a:prstGeom prst="roundRect">
             <a:avLst/>
@@ -1495,12 +1676,58 @@
           </a:p>
         </p:txBody>
       </p:sp>
-      <p:sp>
-        <p:nvSpPr>
-          <p:cNvPr id="4" name="四角形: 角を丸くする 3">
-            <a:extLst>
-              <a:ext uri="{FF2B5EF4-FFF2-40B4-BE49-F238E27FC236}">
-                <a16:creationId xmlns:a16="http://schemas.microsoft.com/office/drawing/2014/main" id="{8FBE4B02-5423-8BD1-7803-2E7A1354E955}"/>
+      <p:cxnSp>
+        <p:nvCxnSpPr>
+          <p:cNvPr id="10" name="コネクタ: カギ線 9">
+            <a:extLst>
+              <a:ext uri="{FF2B5EF4-FFF2-40B4-BE49-F238E27FC236}">
+                <a16:creationId xmlns:a16="http://schemas.microsoft.com/office/drawing/2014/main" id="{4B855E2C-7F55-73A8-E767-3B7EDA2E6C0D}"/>
+              </a:ext>
+            </a:extLst>
+          </p:cNvPr>
+          <p:cNvCxnSpPr>
+            <a:stCxn id="6" idx="2"/>
+            <a:endCxn id="8" idx="0"/>
+          </p:cNvCxnSpPr>
+          <p:nvPr/>
+        </p:nvCxnSpPr>
+        <p:spPr>
+          <a:xfrm rot="16200000" flipH="1">
+            <a:off x="4931638" y="2168458"/>
+            <a:ext cx="504056" cy="1440964"/>
+          </a:xfrm>
+          <a:prstGeom prst="bentConnector3">
+            <a:avLst/>
+          </a:prstGeom>
+          <a:ln w="19050">
+            <a:solidFill>
+              <a:srgbClr val="FF0000"/>
+            </a:solidFill>
+            <a:headEnd type="none" w="med" len="med"/>
+            <a:tailEnd type="triangle"/>
+          </a:ln>
+        </p:spPr>
+        <p:style>
+          <a:lnRef idx="1">
+            <a:schemeClr val="accent1"/>
+          </a:lnRef>
+          <a:fillRef idx="0">
+            <a:schemeClr val="accent1"/>
+          </a:fillRef>
+          <a:effectRef idx="0">
+            <a:schemeClr val="accent1"/>
+          </a:effectRef>
+          <a:fontRef idx="minor">
+            <a:schemeClr val="tx1"/>
+          </a:fontRef>
+        </p:style>
+      </p:cxnSp>
+      <p:sp>
+        <p:nvSpPr>
+          <p:cNvPr id="11" name="四角形: 角を丸くする 10">
+            <a:extLst>
+              <a:ext uri="{FF2B5EF4-FFF2-40B4-BE49-F238E27FC236}">
+                <a16:creationId xmlns:a16="http://schemas.microsoft.com/office/drawing/2014/main" id="{F2340EEE-4C99-1D4E-B685-B5BAFDDBBC03}"/>
               </a:ext>
             </a:extLst>
           </p:cNvPr>
@@ -1509,8 +1736,8 @@
         </p:nvSpPr>
         <p:spPr>
           <a:xfrm>
-            <a:off x="1789521" y="2129622"/>
-            <a:ext cx="1521831" cy="360040"/>
+            <a:off x="5724128" y="3933056"/>
+            <a:ext cx="1296144" cy="360040"/>
           </a:xfrm>
           <a:prstGeom prst="roundRect">
             <a:avLst/>
@@ -1547,147 +1774,35 @@
           </a:p>
         </p:txBody>
       </p:sp>
-      <p:sp>
-        <p:nvSpPr>
-          <p:cNvPr id="5" name="テキスト ボックス 4">
-            <a:extLst>
-              <a:ext uri="{FF2B5EF4-FFF2-40B4-BE49-F238E27FC236}">
-                <a16:creationId xmlns:a16="http://schemas.microsoft.com/office/drawing/2014/main" id="{C159D715-C6FD-B111-BD16-EF5CC6BA287D}"/>
-              </a:ext>
-            </a:extLst>
-          </p:cNvPr>
-          <p:cNvSpPr txBox="1"/>
-          <p:nvPr/>
-        </p:nvSpPr>
-        <p:spPr>
-          <a:xfrm>
-            <a:off x="395536" y="836712"/>
-            <a:ext cx="5258812" cy="646331"/>
-          </a:xfrm>
-          <a:prstGeom prst="rect">
-            <a:avLst/>
-          </a:prstGeom>
-          <a:noFill/>
-        </p:spPr>
-        <p:txBody>
-          <a:bodyPr wrap="none" rtlCol="0">
-            <a:spAutoFit/>
-          </a:bodyPr>
-          <a:lstStyle/>
-          <a:p>
-            <a:pPr marL="342900" indent="-342900">
-              <a:buFont typeface="+mj-lt"/>
-              <a:buAutoNum type="arabicPeriod"/>
-            </a:pPr>
-            <a:r>
-              <a:rPr kumimoji="1" lang="ja-JP" altLang="en-US" dirty="0"/>
-              <a:t>検索ボックスに</a:t>
-            </a:r>
-            <a:r>
-              <a:rPr lang="en-US" altLang="ja-JP" dirty="0" err="1"/>
-              <a:t>vscode</a:t>
-            </a:r>
-            <a:r>
-              <a:rPr lang="ja-JP" altLang="en-US" dirty="0"/>
-              <a:t>と入力</a:t>
-            </a:r>
-            <a:endParaRPr lang="en-US" altLang="ja-JP" dirty="0"/>
-          </a:p>
-          <a:p>
-            <a:pPr marL="342900" indent="-342900">
-              <a:buFont typeface="+mj-lt"/>
-              <a:buAutoNum type="arabicPeriod"/>
-            </a:pPr>
-            <a:r>
-              <a:rPr kumimoji="1" lang="ja-JP" altLang="en-US" dirty="0"/>
-              <a:t>表示された「</a:t>
-            </a:r>
-            <a:r>
-              <a:rPr lang="en-US" altLang="ja-JP" dirty="0"/>
-              <a:t>Visual Studio Code</a:t>
-            </a:r>
-            <a:r>
-              <a:rPr kumimoji="1" lang="ja-JP" altLang="en-US" dirty="0"/>
-              <a:t>」をクリック</a:t>
-            </a:r>
-          </a:p>
-        </p:txBody>
-      </p:sp>
       <p:cxnSp>
         <p:nvCxnSpPr>
-          <p:cNvPr id="6" name="コネクタ: カギ線 5">
-            <a:extLst>
-              <a:ext uri="{FF2B5EF4-FFF2-40B4-BE49-F238E27FC236}">
-                <a16:creationId xmlns:a16="http://schemas.microsoft.com/office/drawing/2014/main" id="{EF93BD08-CA8B-A402-28B4-E8CCA6E2C190}"/>
+          <p:cNvPr id="12" name="コネクタ: カギ線 11">
+            <a:extLst>
+              <a:ext uri="{FF2B5EF4-FFF2-40B4-BE49-F238E27FC236}">
+                <a16:creationId xmlns:a16="http://schemas.microsoft.com/office/drawing/2014/main" id="{A6A5DA05-ED9A-1709-EDFB-9BCD749091CF}"/>
               </a:ext>
             </a:extLst>
           </p:cNvPr>
           <p:cNvCxnSpPr>
             <a:cxnSpLocks/>
-            <a:stCxn id="5" idx="1"/>
-            <a:endCxn id="3" idx="1"/>
+            <a:stCxn id="7" idx="0"/>
+            <a:endCxn id="11" idx="2"/>
           </p:cNvCxnSpPr>
           <p:nvPr/>
         </p:nvCxnSpPr>
         <p:spPr>
-          <a:xfrm rot="10800000" flipH="1" flipV="1">
-            <a:off x="395535" y="1159878"/>
-            <a:ext cx="998449" cy="5008920"/>
+          <a:xfrm rot="5400000" flipH="1" flipV="1">
+            <a:off x="4767218" y="3768234"/>
+            <a:ext cx="1080120" cy="2129844"/>
           </a:xfrm>
           <a:prstGeom prst="bentConnector3">
             <a:avLst>
-              <a:gd name="adj1" fmla="val -22896"/>
+              <a:gd name="adj1" fmla="val 50000"/>
             </a:avLst>
           </a:prstGeom>
-          <a:ln>
+          <a:ln w="19050">
             <a:solidFill>
-              <a:schemeClr val="tx1"/>
-            </a:solidFill>
-            <a:headEnd type="none" w="med" len="med"/>
-            <a:tailEnd type="triangle"/>
-          </a:ln>
-        </p:spPr>
-        <p:style>
-          <a:lnRef idx="1">
-            <a:schemeClr val="accent1"/>
-          </a:lnRef>
-          <a:fillRef idx="0">
-            <a:schemeClr val="accent1"/>
-          </a:fillRef>
-          <a:effectRef idx="0">
-            <a:schemeClr val="accent1"/>
-          </a:effectRef>
-          <a:fontRef idx="minor">
-            <a:schemeClr val="tx1"/>
-          </a:fontRef>
-        </p:style>
-      </p:cxnSp>
-      <p:cxnSp>
-        <p:nvCxnSpPr>
-          <p:cNvPr id="7" name="コネクタ: カギ線 6">
-            <a:extLst>
-              <a:ext uri="{FF2B5EF4-FFF2-40B4-BE49-F238E27FC236}">
-                <a16:creationId xmlns:a16="http://schemas.microsoft.com/office/drawing/2014/main" id="{4E5CD875-9AFD-92F0-FFDE-8A4D693C5DED}"/>
-              </a:ext>
-            </a:extLst>
-          </p:cNvPr>
-          <p:cNvCxnSpPr>
-            <a:cxnSpLocks/>
-            <a:endCxn id="4" idx="1"/>
-          </p:cNvCxnSpPr>
-          <p:nvPr/>
-        </p:nvCxnSpPr>
-        <p:spPr>
-          <a:xfrm rot="16200000" flipH="1">
-            <a:off x="871419" y="1391540"/>
-            <a:ext cx="1044116" cy="792088"/>
-          </a:xfrm>
-          <a:prstGeom prst="bentConnector2">
-            <a:avLst/>
-          </a:prstGeom>
-          <a:ln>
-            <a:solidFill>
-              <a:schemeClr val="tx1"/>
+              <a:srgbClr val="FF0000"/>
             </a:solidFill>
             <a:headEnd type="none" w="med" len="med"/>
             <a:tailEnd type="triangle"/>
@@ -1711,7 +1826,7 @@
     </p:spTree>
     <p:extLst>
       <p:ext uri="{BB962C8B-B14F-4D97-AF65-F5344CB8AC3E}">
-        <p14:creationId xmlns:p14="http://schemas.microsoft.com/office/powerpoint/2010/main" val="4234306241"/>
+        <p14:creationId xmlns:p14="http://schemas.microsoft.com/office/powerpoint/2010/main" val="3244075173"/>
       </p:ext>
     </p:extLst>
   </p:cSld>
@@ -1738,141 +1853,12 @@
           <a:chExt cx="0" cy="0"/>
         </a:xfrm>
       </p:grpSpPr>
-      <p:sp>
-        <p:nvSpPr>
-          <p:cNvPr id="2" name="テキスト プレースホルダー 1">
-            <a:extLst>
-              <a:ext uri="{FF2B5EF4-FFF2-40B4-BE49-F238E27FC236}">
-                <a16:creationId xmlns:a16="http://schemas.microsoft.com/office/drawing/2014/main" id="{DA85605C-E8FA-2C28-1312-54E33C5FF838}"/>
-              </a:ext>
-            </a:extLst>
-          </p:cNvPr>
-          <p:cNvSpPr>
-            <a:spLocks noGrp="1"/>
-          </p:cNvSpPr>
-          <p:nvPr>
-            <p:ph type="body" sz="quarter" idx="10"/>
-          </p:nvPr>
-        </p:nvSpPr>
-        <p:spPr/>
-        <p:txBody>
-          <a:bodyPr/>
-          <a:lstStyle/>
-          <a:p>
-            <a:r>
-              <a:rPr kumimoji="1" lang="en-US" altLang="ja-JP" dirty="0"/>
-              <a:t>VS Code</a:t>
-            </a:r>
-            <a:r>
-              <a:rPr kumimoji="1" lang="ja-JP" altLang="en-US"/>
-              <a:t>の日本語化</a:t>
-            </a:r>
-          </a:p>
-        </p:txBody>
-      </p:sp>
-      <p:sp>
-        <p:nvSpPr>
-          <p:cNvPr id="4" name="テキスト ボックス 3">
-            <a:extLst>
-              <a:ext uri="{FF2B5EF4-FFF2-40B4-BE49-F238E27FC236}">
-                <a16:creationId xmlns:a16="http://schemas.microsoft.com/office/drawing/2014/main" id="{D77BE1E4-19DB-5F1F-4FCC-7D8590909D67}"/>
-              </a:ext>
-            </a:extLst>
-          </p:cNvPr>
-          <p:cNvSpPr txBox="1"/>
-          <p:nvPr/>
-        </p:nvSpPr>
-        <p:spPr>
-          <a:xfrm>
-            <a:off x="251520" y="5229200"/>
-            <a:ext cx="7632848" cy="1477328"/>
-          </a:xfrm>
-          <a:prstGeom prst="rect">
-            <a:avLst/>
-          </a:prstGeom>
-          <a:noFill/>
-        </p:spPr>
-        <p:txBody>
-          <a:bodyPr wrap="square" rtlCol="0">
-            <a:spAutoFit/>
-          </a:bodyPr>
-          <a:lstStyle/>
-          <a:p>
-            <a:pPr marL="342900" indent="-342900">
-              <a:buAutoNum type="arabicPeriod"/>
-            </a:pPr>
-            <a:r>
-              <a:rPr kumimoji="1" lang="ja-JP" altLang="en-US" dirty="0"/>
-              <a:t>左の「拡張機能</a:t>
-            </a:r>
-            <a:r>
-              <a:rPr lang="ja-JP" altLang="en-US" dirty="0"/>
-              <a:t>」アイコンをクリック</a:t>
-            </a:r>
-            <a:endParaRPr lang="en-US" altLang="ja-JP" dirty="0"/>
-          </a:p>
-          <a:p>
-            <a:pPr marL="342900" indent="-342900">
-              <a:buAutoNum type="arabicPeriod"/>
-            </a:pPr>
-            <a:r>
-              <a:rPr lang="ja-JP" altLang="en-US" dirty="0"/>
-              <a:t>現れた検索窓に「</a:t>
-            </a:r>
-            <a:r>
-              <a:rPr lang="en-US" altLang="ja-JP" dirty="0" err="1"/>
-              <a:t>japanese</a:t>
-            </a:r>
-            <a:r>
-              <a:rPr lang="ja-JP" altLang="en-US" dirty="0"/>
-              <a:t>」と入力</a:t>
-            </a:r>
-            <a:endParaRPr lang="en-US" altLang="ja-JP" dirty="0"/>
-          </a:p>
-          <a:p>
-            <a:pPr marL="342900" indent="-342900">
-              <a:buAutoNum type="arabicPeriod"/>
-            </a:pPr>
-            <a:r>
-              <a:rPr lang="ja-JP" altLang="en-US" dirty="0"/>
-              <a:t>「</a:t>
-            </a:r>
-            <a:r>
-              <a:rPr lang="en-US" altLang="ja-JP" dirty="0"/>
-              <a:t>Japanese Language Pack for Visual Studio Code</a:t>
-            </a:r>
-            <a:r>
-              <a:rPr lang="ja-JP" altLang="en-US" dirty="0"/>
-              <a:t>」をインストール</a:t>
-            </a:r>
-            <a:endParaRPr lang="en-US" altLang="ja-JP" dirty="0"/>
-          </a:p>
-          <a:p>
-            <a:pPr marL="342900" indent="-342900">
-              <a:buAutoNum type="arabicPeriod"/>
-            </a:pPr>
-            <a:r>
-              <a:rPr lang="ja-JP" altLang="en-US" dirty="0"/>
-              <a:t>インストール後、再起動ダイアログがでるので「</a:t>
-            </a:r>
-            <a:r>
-              <a:rPr lang="en-US" altLang="ja-JP" dirty="0"/>
-              <a:t>Change Language and Restart</a:t>
-            </a:r>
-            <a:r>
-              <a:rPr lang="ja-JP" altLang="en-US" dirty="0"/>
-              <a:t>」をクリック</a:t>
-            </a:r>
-            <a:endParaRPr lang="en-US" altLang="ja-JP" dirty="0"/>
-          </a:p>
-        </p:txBody>
-      </p:sp>
       <p:pic>
         <p:nvPicPr>
-          <p:cNvPr id="6" name="図 5">
-            <a:extLst>
-              <a:ext uri="{FF2B5EF4-FFF2-40B4-BE49-F238E27FC236}">
-                <a16:creationId xmlns:a16="http://schemas.microsoft.com/office/drawing/2014/main" id="{814592AC-EE33-80C6-5B7F-ECB678AB4079}"/>
+          <p:cNvPr id="9" name="図 8">
+            <a:extLst>
+              <a:ext uri="{FF2B5EF4-FFF2-40B4-BE49-F238E27FC236}">
+                <a16:creationId xmlns:a16="http://schemas.microsoft.com/office/drawing/2014/main" id="{8E459097-6039-898B-A41F-345483BCF7FC}"/>
               </a:ext>
             </a:extLst>
           </p:cNvPr>
@@ -1889,8 +1875,8 @@
         </p:blipFill>
         <p:spPr>
           <a:xfrm>
-            <a:off x="683568" y="916761"/>
-            <a:ext cx="4419600" cy="3886200"/>
+            <a:off x="1403648" y="1483043"/>
+            <a:ext cx="4690619" cy="4826277"/>
           </a:xfrm>
           <a:prstGeom prst="rect">
             <a:avLst/>
@@ -1899,10 +1885,42 @@
       </p:pic>
       <p:sp>
         <p:nvSpPr>
-          <p:cNvPr id="7" name="四角形: 角を丸くする 3">
-            <a:extLst>
-              <a:ext uri="{FF2B5EF4-FFF2-40B4-BE49-F238E27FC236}">
-                <a16:creationId xmlns:a16="http://schemas.microsoft.com/office/drawing/2014/main" id="{9461783C-2547-629A-889A-01927F1E633F}"/>
+          <p:cNvPr id="2" name="テキスト プレースホルダー 1">
+            <a:extLst>
+              <a:ext uri="{FF2B5EF4-FFF2-40B4-BE49-F238E27FC236}">
+                <a16:creationId xmlns:a16="http://schemas.microsoft.com/office/drawing/2014/main" id="{3012622C-AF18-0A16-A8B4-58B412C1CD93}"/>
+              </a:ext>
+            </a:extLst>
+          </p:cNvPr>
+          <p:cNvSpPr>
+            <a:spLocks noGrp="1"/>
+          </p:cNvSpPr>
+          <p:nvPr>
+            <p:ph type="body" sz="quarter" idx="10"/>
+          </p:nvPr>
+        </p:nvSpPr>
+        <p:spPr/>
+        <p:txBody>
+          <a:bodyPr/>
+          <a:lstStyle/>
+          <a:p>
+            <a:r>
+              <a:rPr kumimoji="1" lang="en-US" altLang="ja-JP" dirty="0"/>
+              <a:t>VS Code</a:t>
+            </a:r>
+            <a:r>
+              <a:rPr kumimoji="1" lang="ja-JP" altLang="en-US" dirty="0"/>
+              <a:t>の起動</a:t>
+            </a:r>
+          </a:p>
+        </p:txBody>
+      </p:sp>
+      <p:sp>
+        <p:nvSpPr>
+          <p:cNvPr id="3" name="四角形: 角を丸くする 2">
+            <a:extLst>
+              <a:ext uri="{FF2B5EF4-FFF2-40B4-BE49-F238E27FC236}">
+                <a16:creationId xmlns:a16="http://schemas.microsoft.com/office/drawing/2014/main" id="{82A18DF6-AB1C-D82B-7313-6A794BC4F169}"/>
               </a:ext>
             </a:extLst>
           </p:cNvPr>
@@ -1911,14 +1929,14 @@
         </p:nvSpPr>
         <p:spPr>
           <a:xfrm>
-            <a:off x="1475656" y="1460133"/>
-            <a:ext cx="3384376" cy="391616"/>
+            <a:off x="1393985" y="6028275"/>
+            <a:ext cx="1521831" cy="281045"/>
           </a:xfrm>
           <a:prstGeom prst="roundRect">
             <a:avLst/>
           </a:prstGeom>
           <a:noFill/>
-          <a:ln w="38100">
+          <a:ln w="19050">
             <a:solidFill>
               <a:srgbClr val="FF0000"/>
             </a:solidFill>
@@ -1951,10 +1969,10 @@
       </p:sp>
       <p:sp>
         <p:nvSpPr>
-          <p:cNvPr id="9" name="四角形: 角を丸くする 3">
-            <a:extLst>
-              <a:ext uri="{FF2B5EF4-FFF2-40B4-BE49-F238E27FC236}">
-                <a16:creationId xmlns:a16="http://schemas.microsoft.com/office/drawing/2014/main" id="{C03A8938-A686-AED0-7A41-E2BC06EE8156}"/>
+          <p:cNvPr id="4" name="四角形: 角を丸くする 3">
+            <a:extLst>
+              <a:ext uri="{FF2B5EF4-FFF2-40B4-BE49-F238E27FC236}">
+                <a16:creationId xmlns:a16="http://schemas.microsoft.com/office/drawing/2014/main" id="{8FBE4B02-5423-8BD1-7803-2E7A1354E955}"/>
               </a:ext>
             </a:extLst>
           </p:cNvPr>
@@ -1963,14 +1981,14 @@
         </p:nvSpPr>
         <p:spPr>
           <a:xfrm>
-            <a:off x="4211960" y="2468245"/>
-            <a:ext cx="891208" cy="391616"/>
+            <a:off x="1789521" y="2129622"/>
+            <a:ext cx="1521831" cy="360040"/>
           </a:xfrm>
           <a:prstGeom prst="roundRect">
             <a:avLst/>
           </a:prstGeom>
           <a:noFill/>
-          <a:ln w="38100">
+          <a:ln w="19050">
             <a:solidFill>
               <a:srgbClr val="FF0000"/>
             </a:solidFill>
@@ -2003,373 +2021,169 @@
       </p:sp>
       <p:sp>
         <p:nvSpPr>
-          <p:cNvPr id="11" name="四角形: 角を丸くする 3">
-            <a:extLst>
-              <a:ext uri="{FF2B5EF4-FFF2-40B4-BE49-F238E27FC236}">
-                <a16:creationId xmlns:a16="http://schemas.microsoft.com/office/drawing/2014/main" id="{8F408FCD-B8C9-2170-E5D3-7C7573D53677}"/>
-              </a:ext>
-            </a:extLst>
-          </p:cNvPr>
-          <p:cNvSpPr/>
-          <p:nvPr/>
-        </p:nvSpPr>
-        <p:spPr>
-          <a:xfrm>
-            <a:off x="678528" y="3460008"/>
-            <a:ext cx="558800" cy="504056"/>
-          </a:xfrm>
-          <a:prstGeom prst="roundRect">
-            <a:avLst/>
-          </a:prstGeom>
-          <a:noFill/>
-          <a:ln w="38100">
-            <a:solidFill>
-              <a:srgbClr val="FF0000"/>
-            </a:solidFill>
-          </a:ln>
-        </p:spPr>
-        <p:style>
-          <a:lnRef idx="2">
-            <a:schemeClr val="accent1">
-              <a:shade val="50000"/>
-            </a:schemeClr>
-          </a:lnRef>
-          <a:fillRef idx="1">
-            <a:schemeClr val="accent1"/>
-          </a:fillRef>
-          <a:effectRef idx="0">
-            <a:schemeClr val="accent1"/>
-          </a:effectRef>
-          <a:fontRef idx="minor">
-            <a:schemeClr val="lt1"/>
-          </a:fontRef>
-        </p:style>
-        <p:txBody>
-          <a:bodyPr rtlCol="0" anchor="ctr"/>
-          <a:lstStyle/>
-          <a:p>
-            <a:pPr algn="ctr"/>
-            <a:endParaRPr kumimoji="1" lang="ja-JP" altLang="en-US"/>
-          </a:p>
-        </p:txBody>
-      </p:sp>
-      <p:sp>
-        <p:nvSpPr>
-          <p:cNvPr id="12" name="楕円 5">
-            <a:extLst>
-              <a:ext uri="{FF2B5EF4-FFF2-40B4-BE49-F238E27FC236}">
-                <a16:creationId xmlns:a16="http://schemas.microsoft.com/office/drawing/2014/main" id="{1C2D5466-0AC8-DD15-607C-AA59B997FC87}"/>
-              </a:ext>
-            </a:extLst>
-          </p:cNvPr>
-          <p:cNvSpPr/>
-          <p:nvPr/>
-        </p:nvSpPr>
-        <p:spPr>
-          <a:xfrm>
-            <a:off x="179512" y="3585832"/>
-            <a:ext cx="360040" cy="360040"/>
-          </a:xfrm>
-          <a:prstGeom prst="ellipse">
-            <a:avLst/>
-          </a:prstGeom>
-          <a:solidFill>
-            <a:srgbClr val="FF0000"/>
-          </a:solidFill>
+          <p:cNvPr id="5" name="テキスト ボックス 4">
+            <a:extLst>
+              <a:ext uri="{FF2B5EF4-FFF2-40B4-BE49-F238E27FC236}">
+                <a16:creationId xmlns:a16="http://schemas.microsoft.com/office/drawing/2014/main" id="{C159D715-C6FD-B111-BD16-EF5CC6BA287D}"/>
+              </a:ext>
+            </a:extLst>
+          </p:cNvPr>
+          <p:cNvSpPr txBox="1"/>
+          <p:nvPr/>
+        </p:nvSpPr>
+        <p:spPr>
+          <a:xfrm>
+            <a:off x="395536" y="836712"/>
+            <a:ext cx="5258812" cy="646331"/>
+          </a:xfrm>
+          <a:prstGeom prst="rect">
+            <a:avLst/>
+          </a:prstGeom>
+          <a:noFill/>
+        </p:spPr>
+        <p:txBody>
+          <a:bodyPr wrap="none" rtlCol="0">
+            <a:spAutoFit/>
+          </a:bodyPr>
+          <a:lstStyle/>
+          <a:p>
+            <a:pPr marL="342900" indent="-342900">
+              <a:buFont typeface="+mj-lt"/>
+              <a:buAutoNum type="arabicPeriod"/>
+            </a:pPr>
+            <a:r>
+              <a:rPr kumimoji="1" lang="ja-JP" altLang="en-US" dirty="0"/>
+              <a:t>検索ボックスに</a:t>
+            </a:r>
+            <a:r>
+              <a:rPr lang="en-US" altLang="ja-JP" dirty="0" err="1"/>
+              <a:t>vscode</a:t>
+            </a:r>
+            <a:r>
+              <a:rPr lang="ja-JP" altLang="en-US" dirty="0"/>
+              <a:t>と入力</a:t>
+            </a:r>
+            <a:endParaRPr lang="en-US" altLang="ja-JP" dirty="0"/>
+          </a:p>
+          <a:p>
+            <a:pPr marL="342900" indent="-342900">
+              <a:buFont typeface="+mj-lt"/>
+              <a:buAutoNum type="arabicPeriod"/>
+            </a:pPr>
+            <a:r>
+              <a:rPr kumimoji="1" lang="ja-JP" altLang="en-US" dirty="0"/>
+              <a:t>表示された「</a:t>
+            </a:r>
+            <a:r>
+              <a:rPr lang="en-US" altLang="ja-JP" dirty="0"/>
+              <a:t>Visual Studio Code</a:t>
+            </a:r>
+            <a:r>
+              <a:rPr kumimoji="1" lang="ja-JP" altLang="en-US" dirty="0"/>
+              <a:t>」をクリック</a:t>
+            </a:r>
+          </a:p>
+        </p:txBody>
+      </p:sp>
+      <p:cxnSp>
+        <p:nvCxnSpPr>
+          <p:cNvPr id="6" name="コネクタ: カギ線 5">
+            <a:extLst>
+              <a:ext uri="{FF2B5EF4-FFF2-40B4-BE49-F238E27FC236}">
+                <a16:creationId xmlns:a16="http://schemas.microsoft.com/office/drawing/2014/main" id="{EF93BD08-CA8B-A402-28B4-E8CCA6E2C190}"/>
+              </a:ext>
+            </a:extLst>
+          </p:cNvPr>
+          <p:cNvCxnSpPr>
+            <a:cxnSpLocks/>
+            <a:stCxn id="5" idx="1"/>
+            <a:endCxn id="3" idx="1"/>
+          </p:cNvCxnSpPr>
+          <p:nvPr/>
+        </p:nvCxnSpPr>
+        <p:spPr>
+          <a:xfrm rot="10800000" flipH="1" flipV="1">
+            <a:off x="395535" y="1159878"/>
+            <a:ext cx="998449" cy="5008920"/>
+          </a:xfrm>
+          <a:prstGeom prst="bentConnector3">
+            <a:avLst>
+              <a:gd name="adj1" fmla="val -22896"/>
+            </a:avLst>
+          </a:prstGeom>
           <a:ln>
             <a:solidFill>
               <a:schemeClr val="tx1"/>
             </a:solidFill>
+            <a:headEnd type="none" w="med" len="med"/>
+            <a:tailEnd type="triangle"/>
           </a:ln>
         </p:spPr>
         <p:style>
-          <a:lnRef idx="2">
-            <a:schemeClr val="accent1">
-              <a:shade val="50000"/>
-            </a:schemeClr>
+          <a:lnRef idx="1">
+            <a:schemeClr val="accent1"/>
           </a:lnRef>
-          <a:fillRef idx="1">
+          <a:fillRef idx="0">
             <a:schemeClr val="accent1"/>
           </a:fillRef>
           <a:effectRef idx="0">
             <a:schemeClr val="accent1"/>
           </a:effectRef>
           <a:fontRef idx="minor">
-            <a:schemeClr val="lt1"/>
+            <a:schemeClr val="tx1"/>
           </a:fontRef>
         </p:style>
-        <p:txBody>
-          <a:bodyPr rtlCol="0" anchor="ctr"/>
-          <a:lstStyle/>
-          <a:p>
-            <a:pPr algn="ctr"/>
-            <a:r>
-              <a:rPr kumimoji="1" lang="ja-JP" altLang="en-US" dirty="0"/>
-              <a:t>１</a:t>
-            </a:r>
-          </a:p>
-        </p:txBody>
-      </p:sp>
-      <p:sp>
-        <p:nvSpPr>
-          <p:cNvPr id="13" name="楕円 5">
-            <a:extLst>
-              <a:ext uri="{FF2B5EF4-FFF2-40B4-BE49-F238E27FC236}">
-                <a16:creationId xmlns:a16="http://schemas.microsoft.com/office/drawing/2014/main" id="{BB3A0F1E-4FFE-75E9-606C-7433FC7AF5DB}"/>
-              </a:ext>
-            </a:extLst>
-          </p:cNvPr>
-          <p:cNvSpPr/>
-          <p:nvPr/>
-        </p:nvSpPr>
-        <p:spPr>
-          <a:xfrm>
-            <a:off x="1062440" y="1475661"/>
-            <a:ext cx="360040" cy="360040"/>
-          </a:xfrm>
-          <a:prstGeom prst="ellipse">
-            <a:avLst/>
-          </a:prstGeom>
-          <a:solidFill>
-            <a:srgbClr val="FF0000"/>
-          </a:solidFill>
+      </p:cxnSp>
+      <p:cxnSp>
+        <p:nvCxnSpPr>
+          <p:cNvPr id="7" name="コネクタ: カギ線 6">
+            <a:extLst>
+              <a:ext uri="{FF2B5EF4-FFF2-40B4-BE49-F238E27FC236}">
+                <a16:creationId xmlns:a16="http://schemas.microsoft.com/office/drawing/2014/main" id="{4E5CD875-9AFD-92F0-FFDE-8A4D693C5DED}"/>
+              </a:ext>
+            </a:extLst>
+          </p:cNvPr>
+          <p:cNvCxnSpPr>
+            <a:cxnSpLocks/>
+            <a:endCxn id="4" idx="1"/>
+          </p:cNvCxnSpPr>
+          <p:nvPr/>
+        </p:nvCxnSpPr>
+        <p:spPr>
+          <a:xfrm rot="16200000" flipH="1">
+            <a:off x="871419" y="1391540"/>
+            <a:ext cx="1044116" cy="792088"/>
+          </a:xfrm>
+          <a:prstGeom prst="bentConnector2">
+            <a:avLst/>
+          </a:prstGeom>
           <a:ln>
             <a:solidFill>
               <a:schemeClr val="tx1"/>
             </a:solidFill>
+            <a:headEnd type="none" w="med" len="med"/>
+            <a:tailEnd type="triangle"/>
           </a:ln>
         </p:spPr>
         <p:style>
-          <a:lnRef idx="2">
-            <a:schemeClr val="accent1">
-              <a:shade val="50000"/>
-            </a:schemeClr>
+          <a:lnRef idx="1">
+            <a:schemeClr val="accent1"/>
           </a:lnRef>
-          <a:fillRef idx="1">
+          <a:fillRef idx="0">
             <a:schemeClr val="accent1"/>
           </a:fillRef>
           <a:effectRef idx="0">
             <a:schemeClr val="accent1"/>
           </a:effectRef>
           <a:fontRef idx="minor">
-            <a:schemeClr val="lt1"/>
+            <a:schemeClr val="tx1"/>
           </a:fontRef>
         </p:style>
-        <p:txBody>
-          <a:bodyPr rtlCol="0" anchor="ctr"/>
-          <a:lstStyle/>
-          <a:p>
-            <a:pPr algn="ctr"/>
-            <a:r>
-              <a:rPr kumimoji="1" lang="en-US" altLang="ja-JP" dirty="0"/>
-              <a:t>2</a:t>
-            </a:r>
-            <a:endParaRPr kumimoji="1" lang="ja-JP" altLang="en-US" dirty="0"/>
-          </a:p>
-        </p:txBody>
-      </p:sp>
-      <p:sp>
-        <p:nvSpPr>
-          <p:cNvPr id="14" name="楕円 5">
-            <a:extLst>
-              <a:ext uri="{FF2B5EF4-FFF2-40B4-BE49-F238E27FC236}">
-                <a16:creationId xmlns:a16="http://schemas.microsoft.com/office/drawing/2014/main" id="{C623411E-D92E-CC81-3B55-9384E8F11906}"/>
-              </a:ext>
-            </a:extLst>
-          </p:cNvPr>
-          <p:cNvSpPr/>
-          <p:nvPr/>
-        </p:nvSpPr>
-        <p:spPr>
-          <a:xfrm>
-            <a:off x="3798744" y="2490693"/>
-            <a:ext cx="360040" cy="360040"/>
-          </a:xfrm>
-          <a:prstGeom prst="ellipse">
-            <a:avLst/>
-          </a:prstGeom>
-          <a:solidFill>
-            <a:srgbClr val="FF0000"/>
-          </a:solidFill>
-          <a:ln>
-            <a:solidFill>
-              <a:schemeClr val="tx1"/>
-            </a:solidFill>
-          </a:ln>
-        </p:spPr>
-        <p:style>
-          <a:lnRef idx="2">
-            <a:schemeClr val="accent1">
-              <a:shade val="50000"/>
-            </a:schemeClr>
-          </a:lnRef>
-          <a:fillRef idx="1">
-            <a:schemeClr val="accent1"/>
-          </a:fillRef>
-          <a:effectRef idx="0">
-            <a:schemeClr val="accent1"/>
-          </a:effectRef>
-          <a:fontRef idx="minor">
-            <a:schemeClr val="lt1"/>
-          </a:fontRef>
-        </p:style>
-        <p:txBody>
-          <a:bodyPr rtlCol="0" anchor="ctr"/>
-          <a:lstStyle/>
-          <a:p>
-            <a:pPr algn="ctr"/>
-            <a:r>
-              <a:rPr kumimoji="1" lang="en-US" altLang="ja-JP" dirty="0"/>
-              <a:t>3</a:t>
-            </a:r>
-            <a:endParaRPr kumimoji="1" lang="ja-JP" altLang="en-US" dirty="0"/>
-          </a:p>
-        </p:txBody>
-      </p:sp>
-      <p:pic>
-        <p:nvPicPr>
-          <p:cNvPr id="5" name="図 4">
-            <a:extLst>
-              <a:ext uri="{FF2B5EF4-FFF2-40B4-BE49-F238E27FC236}">
-                <a16:creationId xmlns:a16="http://schemas.microsoft.com/office/drawing/2014/main" id="{2A762CAD-DF92-857B-F837-68F39FAE3954}"/>
-              </a:ext>
-            </a:extLst>
-          </p:cNvPr>
-          <p:cNvPicPr>
-            <a:picLocks noChangeAspect="1"/>
-          </p:cNvPicPr>
-          <p:nvPr/>
-        </p:nvPicPr>
-        <p:blipFill>
-          <a:blip r:embed="rId3"/>
-          <a:stretch>
-            <a:fillRect/>
-          </a:stretch>
-        </p:blipFill>
-        <p:spPr>
-          <a:xfrm>
-            <a:off x="5436096" y="3281222"/>
-            <a:ext cx="3681611" cy="765973"/>
-          </a:xfrm>
-          <a:prstGeom prst="rect">
-            <a:avLst/>
-          </a:prstGeom>
-        </p:spPr>
-      </p:pic>
-      <p:sp>
-        <p:nvSpPr>
-          <p:cNvPr id="10" name="四角形: 角を丸くする 3">
-            <a:extLst>
-              <a:ext uri="{FF2B5EF4-FFF2-40B4-BE49-F238E27FC236}">
-                <a16:creationId xmlns:a16="http://schemas.microsoft.com/office/drawing/2014/main" id="{D0934CC4-B6CA-33A1-A5FA-BCA1650D4CBC}"/>
-              </a:ext>
-            </a:extLst>
-          </p:cNvPr>
-          <p:cNvSpPr/>
-          <p:nvPr/>
-        </p:nvSpPr>
-        <p:spPr>
-          <a:xfrm>
-            <a:off x="7524327" y="3734423"/>
-            <a:ext cx="1593379" cy="312772"/>
-          </a:xfrm>
-          <a:prstGeom prst="roundRect">
-            <a:avLst/>
-          </a:prstGeom>
-          <a:noFill/>
-          <a:ln w="38100">
-            <a:solidFill>
-              <a:srgbClr val="FF0000"/>
-            </a:solidFill>
-          </a:ln>
-        </p:spPr>
-        <p:style>
-          <a:lnRef idx="2">
-            <a:schemeClr val="accent1">
-              <a:shade val="50000"/>
-            </a:schemeClr>
-          </a:lnRef>
-          <a:fillRef idx="1">
-            <a:schemeClr val="accent1"/>
-          </a:fillRef>
-          <a:effectRef idx="0">
-            <a:schemeClr val="accent1"/>
-          </a:effectRef>
-          <a:fontRef idx="minor">
-            <a:schemeClr val="lt1"/>
-          </a:fontRef>
-        </p:style>
-        <p:txBody>
-          <a:bodyPr rtlCol="0" anchor="ctr"/>
-          <a:lstStyle/>
-          <a:p>
-            <a:pPr algn="ctr"/>
-            <a:endParaRPr kumimoji="1" lang="ja-JP" altLang="en-US"/>
-          </a:p>
-        </p:txBody>
-      </p:sp>
-      <p:sp>
-        <p:nvSpPr>
-          <p:cNvPr id="16" name="楕円 5">
-            <a:extLst>
-              <a:ext uri="{FF2B5EF4-FFF2-40B4-BE49-F238E27FC236}">
-                <a16:creationId xmlns:a16="http://schemas.microsoft.com/office/drawing/2014/main" id="{CAB2987E-51B9-C9B1-79DA-F83D698BE242}"/>
-              </a:ext>
-            </a:extLst>
-          </p:cNvPr>
-          <p:cNvSpPr/>
-          <p:nvPr/>
-        </p:nvSpPr>
-        <p:spPr>
-          <a:xfrm>
-            <a:off x="7096881" y="3734423"/>
-            <a:ext cx="360040" cy="360040"/>
-          </a:xfrm>
-          <a:prstGeom prst="ellipse">
-            <a:avLst/>
-          </a:prstGeom>
-          <a:solidFill>
-            <a:srgbClr val="FF0000"/>
-          </a:solidFill>
-          <a:ln>
-            <a:solidFill>
-              <a:schemeClr val="tx1"/>
-            </a:solidFill>
-          </a:ln>
-        </p:spPr>
-        <p:style>
-          <a:lnRef idx="2">
-            <a:schemeClr val="accent1">
-              <a:shade val="50000"/>
-            </a:schemeClr>
-          </a:lnRef>
-          <a:fillRef idx="1">
-            <a:schemeClr val="accent1"/>
-          </a:fillRef>
-          <a:effectRef idx="0">
-            <a:schemeClr val="accent1"/>
-          </a:effectRef>
-          <a:fontRef idx="minor">
-            <a:schemeClr val="lt1"/>
-          </a:fontRef>
-        </p:style>
-        <p:txBody>
-          <a:bodyPr rtlCol="0" anchor="ctr"/>
-          <a:lstStyle/>
-          <a:p>
-            <a:pPr algn="ctr"/>
-            <a:r>
-              <a:rPr kumimoji="1" lang="en-US" altLang="ja-JP" dirty="0"/>
-              <a:t>4</a:t>
-            </a:r>
-            <a:endParaRPr kumimoji="1" lang="ja-JP" altLang="en-US" dirty="0"/>
-          </a:p>
-        </p:txBody>
-      </p:sp>
+      </p:cxnSp>
     </p:spTree>
     <p:extLst>
       <p:ext uri="{BB962C8B-B14F-4D97-AF65-F5344CB8AC3E}">
-        <p14:creationId xmlns:p14="http://schemas.microsoft.com/office/powerpoint/2010/main" val="1544531091"/>
+        <p14:creationId xmlns:p14="http://schemas.microsoft.com/office/powerpoint/2010/main" val="4234306241"/>
       </p:ext>
     </p:extLst>
   </p:cSld>
@@ -2396,41 +2210,12 @@
           <a:chExt cx="0" cy="0"/>
         </a:xfrm>
       </p:grpSpPr>
-      <p:sp>
-        <p:nvSpPr>
-          <p:cNvPr id="2" name="テキスト プレースホルダー 1">
-            <a:extLst>
-              <a:ext uri="{FF2B5EF4-FFF2-40B4-BE49-F238E27FC236}">
-                <a16:creationId xmlns:a16="http://schemas.microsoft.com/office/drawing/2014/main" id="{902927F3-F9A2-6B62-95C8-AA1BBBCBF061}"/>
-              </a:ext>
-            </a:extLst>
-          </p:cNvPr>
-          <p:cNvSpPr>
-            <a:spLocks noGrp="1"/>
-          </p:cNvSpPr>
-          <p:nvPr>
-            <p:ph type="body" sz="quarter" idx="10"/>
-          </p:nvPr>
-        </p:nvSpPr>
-        <p:spPr/>
-        <p:txBody>
-          <a:bodyPr/>
-          <a:lstStyle/>
-          <a:p>
-            <a:r>
-              <a:rPr kumimoji="1" lang="en-US" altLang="ja-JP" dirty="0"/>
-              <a:t>VS Code</a:t>
-            </a:r>
-            <a:endParaRPr kumimoji="1" lang="ja-JP" altLang="en-US" dirty="0"/>
-          </a:p>
-        </p:txBody>
-      </p:sp>
       <p:pic>
         <p:nvPicPr>
-          <p:cNvPr id="6" name="図 5">
-            <a:extLst>
-              <a:ext uri="{FF2B5EF4-FFF2-40B4-BE49-F238E27FC236}">
-                <a16:creationId xmlns:a16="http://schemas.microsoft.com/office/drawing/2014/main" id="{D67F5896-6D2B-CFF9-0F3F-F788DC594565}"/>
+          <p:cNvPr id="13" name="図 12">
+            <a:extLst>
+              <a:ext uri="{FF2B5EF4-FFF2-40B4-BE49-F238E27FC236}">
+                <a16:creationId xmlns:a16="http://schemas.microsoft.com/office/drawing/2014/main" id="{6954B868-8E01-8554-B4C6-1B6849D5175C}"/>
               </a:ext>
             </a:extLst>
           </p:cNvPr>
@@ -2447,14 +2232,73 @@
         </p:blipFill>
         <p:spPr>
           <a:xfrm>
-            <a:off x="251520" y="1556792"/>
-            <a:ext cx="3779848" cy="3398815"/>
+            <a:off x="4044516" y="1491864"/>
+            <a:ext cx="4972050" cy="3629025"/>
           </a:xfrm>
           <a:prstGeom prst="rect">
             <a:avLst/>
           </a:prstGeom>
         </p:spPr>
       </p:pic>
+      <p:pic>
+        <p:nvPicPr>
+          <p:cNvPr id="4" name="図 3">
+            <a:extLst>
+              <a:ext uri="{FF2B5EF4-FFF2-40B4-BE49-F238E27FC236}">
+                <a16:creationId xmlns:a16="http://schemas.microsoft.com/office/drawing/2014/main" id="{25DE7A25-38B3-26D2-38B1-9AA893FC6E4F}"/>
+              </a:ext>
+            </a:extLst>
+          </p:cNvPr>
+          <p:cNvPicPr>
+            <a:picLocks noChangeAspect="1"/>
+          </p:cNvPicPr>
+          <p:nvPr/>
+        </p:nvPicPr>
+        <p:blipFill>
+          <a:blip r:embed="rId3"/>
+          <a:stretch>
+            <a:fillRect/>
+          </a:stretch>
+        </p:blipFill>
+        <p:spPr>
+          <a:xfrm>
+            <a:off x="324100" y="1485990"/>
+            <a:ext cx="3707840" cy="3901194"/>
+          </a:xfrm>
+          <a:prstGeom prst="rect">
+            <a:avLst/>
+          </a:prstGeom>
+        </p:spPr>
+      </p:pic>
+      <p:sp>
+        <p:nvSpPr>
+          <p:cNvPr id="2" name="テキスト プレースホルダー 1">
+            <a:extLst>
+              <a:ext uri="{FF2B5EF4-FFF2-40B4-BE49-F238E27FC236}">
+                <a16:creationId xmlns:a16="http://schemas.microsoft.com/office/drawing/2014/main" id="{902927F3-F9A2-6B62-95C8-AA1BBBCBF061}"/>
+              </a:ext>
+            </a:extLst>
+          </p:cNvPr>
+          <p:cNvSpPr>
+            <a:spLocks noGrp="1"/>
+          </p:cNvSpPr>
+          <p:nvPr>
+            <p:ph type="body" sz="quarter" idx="10"/>
+          </p:nvPr>
+        </p:nvSpPr>
+        <p:spPr/>
+        <p:txBody>
+          <a:bodyPr/>
+          <a:lstStyle/>
+          <a:p>
+            <a:r>
+              <a:rPr kumimoji="1" lang="en-US" altLang="ja-JP" dirty="0"/>
+              <a:t>VS Code</a:t>
+            </a:r>
+            <a:endParaRPr kumimoji="1" lang="ja-JP" altLang="en-US" dirty="0"/>
+          </a:p>
+        </p:txBody>
+      </p:sp>
       <p:sp>
         <p:nvSpPr>
           <p:cNvPr id="7" name="四角形: 角を丸くする 6">
@@ -2521,7 +2365,7 @@
         </p:nvSpPr>
         <p:spPr>
           <a:xfrm>
-            <a:off x="755576" y="3140968"/>
+            <a:off x="755576" y="3457383"/>
             <a:ext cx="3096344" cy="288032"/>
           </a:xfrm>
           <a:prstGeom prst="roundRect">
@@ -2574,7 +2418,7 @@
         <p:spPr>
           <a:xfrm>
             <a:off x="107504" y="1010368"/>
-            <a:ext cx="5570756" cy="400110"/>
+            <a:ext cx="4589718" cy="400110"/>
           </a:xfrm>
           <a:prstGeom prst="rect">
             <a:avLst/>
@@ -2589,7 +2433,23 @@
           <a:p>
             <a:r>
               <a:rPr kumimoji="1" lang="ja-JP" altLang="en-US" sz="2000" dirty="0"/>
-              <a:t>「ファイル」から「フォルダーを開く」を選択</a:t>
+              <a:t>「</a:t>
+            </a:r>
+            <a:r>
+              <a:rPr kumimoji="1" lang="en-US" altLang="ja-JP" sz="2000" dirty="0"/>
+              <a:t>File</a:t>
+            </a:r>
+            <a:r>
+              <a:rPr kumimoji="1" lang="ja-JP" altLang="en-US" sz="2000" dirty="0"/>
+              <a:t>」から「</a:t>
+            </a:r>
+            <a:r>
+              <a:rPr kumimoji="1" lang="en-US" altLang="ja-JP" sz="2000" dirty="0"/>
+              <a:t>Open Folder…</a:t>
+            </a:r>
+            <a:r>
+              <a:rPr kumimoji="1" lang="ja-JP" altLang="en-US" sz="2000" dirty="0"/>
+              <a:t>」を選択</a:t>
             </a:r>
           </a:p>
         </p:txBody>
@@ -2608,7 +2468,7 @@
         </p:nvSpPr>
         <p:spPr>
           <a:xfrm>
-            <a:off x="251520" y="5385967"/>
+            <a:off x="338096" y="5507418"/>
             <a:ext cx="7560840" cy="923330"/>
           </a:xfrm>
           <a:prstGeom prst="rect">
@@ -2654,36 +2514,6 @@
           </a:p>
         </p:txBody>
       </p:sp>
-      <p:pic>
-        <p:nvPicPr>
-          <p:cNvPr id="5" name="図 4">
-            <a:extLst>
-              <a:ext uri="{FF2B5EF4-FFF2-40B4-BE49-F238E27FC236}">
-                <a16:creationId xmlns:a16="http://schemas.microsoft.com/office/drawing/2014/main" id="{936DF84B-4490-980A-6ECC-44BFF8B48005}"/>
-              </a:ext>
-            </a:extLst>
-          </p:cNvPr>
-          <p:cNvPicPr>
-            <a:picLocks noChangeAspect="1"/>
-          </p:cNvPicPr>
-          <p:nvPr/>
-        </p:nvPicPr>
-        <p:blipFill>
-          <a:blip r:embed="rId3"/>
-          <a:stretch>
-            <a:fillRect/>
-          </a:stretch>
-        </p:blipFill>
-        <p:spPr>
-          <a:xfrm>
-            <a:off x="4319400" y="1700808"/>
-            <a:ext cx="4564487" cy="3285753"/>
-          </a:xfrm>
-          <a:prstGeom prst="rect">
-            <a:avLst/>
-          </a:prstGeom>
-        </p:spPr>
-      </p:pic>
       <p:sp>
         <p:nvSpPr>
           <p:cNvPr id="12" name="四角形: 角を丸くする 11">
@@ -2698,8 +2528,60 @@
         </p:nvSpPr>
         <p:spPr>
           <a:xfrm>
-            <a:off x="5076056" y="4293096"/>
-            <a:ext cx="2088232" cy="288032"/>
+            <a:off x="4878034" y="4341322"/>
+            <a:ext cx="2070230" cy="383822"/>
+          </a:xfrm>
+          <a:prstGeom prst="roundRect">
+            <a:avLst/>
+          </a:prstGeom>
+          <a:noFill/>
+          <a:ln w="28575">
+            <a:solidFill>
+              <a:srgbClr val="FF0000"/>
+            </a:solidFill>
+          </a:ln>
+        </p:spPr>
+        <p:style>
+          <a:lnRef idx="2">
+            <a:schemeClr val="accent1">
+              <a:shade val="50000"/>
+            </a:schemeClr>
+          </a:lnRef>
+          <a:fillRef idx="1">
+            <a:schemeClr val="accent1"/>
+          </a:fillRef>
+          <a:effectRef idx="0">
+            <a:schemeClr val="accent1"/>
+          </a:effectRef>
+          <a:fontRef idx="minor">
+            <a:schemeClr val="lt1"/>
+          </a:fontRef>
+        </p:style>
+        <p:txBody>
+          <a:bodyPr rtlCol="0" anchor="ctr"/>
+          <a:lstStyle/>
+          <a:p>
+            <a:pPr algn="ctr"/>
+            <a:endParaRPr kumimoji="1" lang="ja-JP" altLang="en-US" dirty="0"/>
+          </a:p>
+        </p:txBody>
+      </p:sp>
+      <p:sp>
+        <p:nvSpPr>
+          <p:cNvPr id="15" name="四角形: 角を丸くする 14">
+            <a:extLst>
+              <a:ext uri="{FF2B5EF4-FFF2-40B4-BE49-F238E27FC236}">
+                <a16:creationId xmlns:a16="http://schemas.microsoft.com/office/drawing/2014/main" id="{66D6B181-0B41-9216-537E-256787FF1460}"/>
+              </a:ext>
+            </a:extLst>
+          </p:cNvPr>
+          <p:cNvSpPr/>
+          <p:nvPr/>
+        </p:nvSpPr>
+        <p:spPr>
+          <a:xfrm>
+            <a:off x="4878034" y="3916807"/>
+            <a:ext cx="270030" cy="304281"/>
           </a:xfrm>
           <a:prstGeom prst="roundRect">
             <a:avLst/>
@@ -3011,6 +2893,36 @@
           <a:chExt cx="0" cy="0"/>
         </a:xfrm>
       </p:grpSpPr>
+      <p:pic>
+        <p:nvPicPr>
+          <p:cNvPr id="7" name="図 6">
+            <a:extLst>
+              <a:ext uri="{FF2B5EF4-FFF2-40B4-BE49-F238E27FC236}">
+                <a16:creationId xmlns:a16="http://schemas.microsoft.com/office/drawing/2014/main" id="{D1316DF1-762A-CA1D-D79D-BD42F20D3936}"/>
+              </a:ext>
+            </a:extLst>
+          </p:cNvPr>
+          <p:cNvPicPr>
+            <a:picLocks noChangeAspect="1"/>
+          </p:cNvPicPr>
+          <p:nvPr/>
+        </p:nvPicPr>
+        <p:blipFill>
+          <a:blip r:embed="rId2"/>
+          <a:stretch>
+            <a:fillRect/>
+          </a:stretch>
+        </p:blipFill>
+        <p:spPr>
+          <a:xfrm>
+            <a:off x="899592" y="1794341"/>
+            <a:ext cx="6550109" cy="4065826"/>
+          </a:xfrm>
+          <a:prstGeom prst="rect">
+            <a:avLst/>
+          </a:prstGeom>
+        </p:spPr>
+      </p:pic>
       <p:sp>
         <p:nvSpPr>
           <p:cNvPr id="2" name="テキスト プレースホルダー 1">
@@ -3039,53 +2951,6 @@
           </a:p>
         </p:txBody>
       </p:sp>
-      <p:pic>
-        <p:nvPicPr>
-          <p:cNvPr id="4098" name="Picture 2">
-            <a:extLst>
-              <a:ext uri="{FF2B5EF4-FFF2-40B4-BE49-F238E27FC236}">
-                <a16:creationId xmlns:a16="http://schemas.microsoft.com/office/drawing/2014/main" id="{95B3F303-735B-702C-1236-AF91A6E7387E}"/>
-              </a:ext>
-            </a:extLst>
-          </p:cNvPr>
-          <p:cNvPicPr>
-            <a:picLocks noChangeAspect="1" noChangeArrowheads="1"/>
-          </p:cNvPicPr>
-          <p:nvPr/>
-        </p:nvPicPr>
-        <p:blipFill>
-          <a:blip r:embed="rId2">
-            <a:extLst>
-              <a:ext uri="{28A0092B-C50C-407E-A947-70E740481C1C}">
-                <a14:useLocalDpi xmlns:a14="http://schemas.microsoft.com/office/drawing/2010/main" val="0"/>
-              </a:ext>
-            </a:extLst>
-          </a:blip>
-          <a:srcRect/>
-          <a:stretch>
-            <a:fillRect/>
-          </a:stretch>
-        </p:blipFill>
-        <p:spPr bwMode="auto">
-          <a:xfrm>
-            <a:off x="1691680" y="1844824"/>
-            <a:ext cx="5734050" cy="4381500"/>
-          </a:xfrm>
-          <a:prstGeom prst="rect">
-            <a:avLst/>
-          </a:prstGeom>
-          <a:noFill/>
-          <a:extLst>
-            <a:ext uri="{909E8E84-426E-40DD-AFC4-6F175D3DCCD1}">
-              <a14:hiddenFill xmlns:a14="http://schemas.microsoft.com/office/drawing/2010/main">
-                <a:solidFill>
-                  <a:srgbClr val="FFFFFF"/>
-                </a:solidFill>
-              </a14:hiddenFill>
-            </a:ext>
-          </a:extLst>
-        </p:spPr>
-      </p:pic>
       <p:sp>
         <p:nvSpPr>
           <p:cNvPr id="3" name="テキスト ボックス 2">
@@ -3101,7 +2966,7 @@
         <p:spPr>
           <a:xfrm>
             <a:off x="755576" y="1124744"/>
-            <a:ext cx="4971233" cy="461665"/>
+            <a:ext cx="3536546" cy="461665"/>
           </a:xfrm>
           <a:prstGeom prst="rect">
             <a:avLst/>
@@ -3115,12 +2980,8 @@
           <a:lstStyle/>
           <a:p>
             <a:r>
-              <a:rPr lang="ja-JP" altLang="en-US" sz="2400" dirty="0"/>
-              <a:t>ネットワークの場所</a:t>
-            </a:r>
-            <a:r>
               <a:rPr lang="en-US" altLang="ja-JP" sz="2400" dirty="0"/>
-              <a:t>(Z</a:t>
+              <a:t>Windows (Z</a:t>
             </a:r>
             <a:r>
               <a:rPr lang="en-US" altLang="ja-JP" sz="2400" dirty="0">
@@ -3152,8 +3013,8 @@
         </p:nvSpPr>
         <p:spPr>
           <a:xfrm>
-            <a:off x="2949950" y="5181558"/>
-            <a:ext cx="1838074" cy="479690"/>
+            <a:off x="1043608" y="4581128"/>
+            <a:ext cx="792088" cy="263666"/>
           </a:xfrm>
           <a:prstGeom prst="roundRect">
             <a:avLst/>
@@ -3209,11 +3070,11 @@
         <p:spPr>
           <a:xfrm rot="10800000" flipH="1" flipV="1">
             <a:off x="755576" y="1355577"/>
-            <a:ext cx="2194374" cy="4065826"/>
+            <a:ext cx="288032" cy="3357384"/>
           </a:xfrm>
           <a:prstGeom prst="bentConnector3">
             <a:avLst>
-              <a:gd name="adj1" fmla="val -10418"/>
+              <a:gd name="adj1" fmla="val -79366"/>
             </a:avLst>
           </a:prstGeom>
           <a:ln>
@@ -3239,6 +3100,98 @@
           </a:fontRef>
         </p:style>
       </p:cxnSp>
+      <p:sp>
+        <p:nvSpPr>
+          <p:cNvPr id="11" name="四角形: 角を丸くする 10">
+            <a:extLst>
+              <a:ext uri="{FF2B5EF4-FFF2-40B4-BE49-F238E27FC236}">
+                <a16:creationId xmlns:a16="http://schemas.microsoft.com/office/drawing/2014/main" id="{3ACE8E44-712D-EFF5-66E9-2E6CCD65C476}"/>
+              </a:ext>
+            </a:extLst>
+          </p:cNvPr>
+          <p:cNvSpPr/>
+          <p:nvPr/>
+        </p:nvSpPr>
+        <p:spPr>
+          <a:xfrm>
+            <a:off x="5652120" y="2773240"/>
+            <a:ext cx="1728192" cy="439736"/>
+          </a:xfrm>
+          <a:prstGeom prst="roundRect">
+            <a:avLst/>
+          </a:prstGeom>
+          <a:noFill/>
+          <a:ln w="19050">
+            <a:solidFill>
+              <a:srgbClr val="FF0000"/>
+            </a:solidFill>
+          </a:ln>
+        </p:spPr>
+        <p:style>
+          <a:lnRef idx="2">
+            <a:schemeClr val="accent1">
+              <a:shade val="50000"/>
+            </a:schemeClr>
+          </a:lnRef>
+          <a:fillRef idx="1">
+            <a:schemeClr val="accent1"/>
+          </a:fillRef>
+          <a:effectRef idx="0">
+            <a:schemeClr val="accent1"/>
+          </a:effectRef>
+          <a:fontRef idx="minor">
+            <a:schemeClr val="lt1"/>
+          </a:fontRef>
+        </p:style>
+        <p:txBody>
+          <a:bodyPr rtlCol="0" anchor="ctr"/>
+          <a:lstStyle/>
+          <a:p>
+            <a:pPr algn="ctr"/>
+            <a:endParaRPr kumimoji="1" lang="ja-JP" altLang="en-US"/>
+          </a:p>
+        </p:txBody>
+      </p:sp>
+      <p:sp>
+        <p:nvSpPr>
+          <p:cNvPr id="12" name="テキスト ボックス 11">
+            <a:extLst>
+              <a:ext uri="{FF2B5EF4-FFF2-40B4-BE49-F238E27FC236}">
+                <a16:creationId xmlns:a16="http://schemas.microsoft.com/office/drawing/2014/main" id="{650EEAB5-E3D8-F35F-3216-21168BD19894}"/>
+              </a:ext>
+            </a:extLst>
+          </p:cNvPr>
+          <p:cNvSpPr txBox="1"/>
+          <p:nvPr/>
+        </p:nvSpPr>
+        <p:spPr>
+          <a:xfrm>
+            <a:off x="5680089" y="3267174"/>
+            <a:ext cx="1672253" cy="369332"/>
+          </a:xfrm>
+          <a:prstGeom prst="rect">
+            <a:avLst/>
+          </a:prstGeom>
+          <a:noFill/>
+        </p:spPr>
+        <p:txBody>
+          <a:bodyPr wrap="none" rtlCol="0">
+            <a:spAutoFit/>
+          </a:bodyPr>
+          <a:lstStyle/>
+          <a:p>
+            <a:r>
+              <a:rPr kumimoji="1" lang="ja-JP" altLang="en-US" dirty="0"/>
+              <a:t>こっちでも</a:t>
+            </a:r>
+            <a:r>
+              <a:rPr kumimoji="1" lang="en-US" altLang="ja-JP" dirty="0"/>
+              <a:t>OK</a:t>
+            </a:r>
+            <a:endParaRPr kumimoji="1" lang="ja-JP" altLang="en-US" dirty="0"/>
+          </a:p>
+        </p:txBody>
+      </p:sp>
     </p:spTree>
     <p:extLst>
       <p:ext uri="{BB962C8B-B14F-4D97-AF65-F5344CB8AC3E}">
@@ -3269,6 +3222,36 @@
           <a:chExt cx="0" cy="0"/>
         </a:xfrm>
       </p:grpSpPr>
+      <p:pic>
+        <p:nvPicPr>
+          <p:cNvPr id="7" name="図 6">
+            <a:extLst>
+              <a:ext uri="{FF2B5EF4-FFF2-40B4-BE49-F238E27FC236}">
+                <a16:creationId xmlns:a16="http://schemas.microsoft.com/office/drawing/2014/main" id="{13004C40-EBA2-DCE4-4579-6D0B03194837}"/>
+              </a:ext>
+            </a:extLst>
+          </p:cNvPr>
+          <p:cNvPicPr>
+            <a:picLocks noChangeAspect="1"/>
+          </p:cNvPicPr>
+          <p:nvPr/>
+        </p:nvPicPr>
+        <p:blipFill>
+          <a:blip r:embed="rId2"/>
+          <a:stretch>
+            <a:fillRect/>
+          </a:stretch>
+        </p:blipFill>
+        <p:spPr>
+          <a:xfrm>
+            <a:off x="1187624" y="1997791"/>
+            <a:ext cx="7097821" cy="4402640"/>
+          </a:xfrm>
+          <a:prstGeom prst="rect">
+            <a:avLst/>
+          </a:prstGeom>
+        </p:spPr>
+      </p:pic>
       <p:sp>
         <p:nvSpPr>
           <p:cNvPr id="2" name="テキスト プレースホルダー 1">
@@ -3297,53 +3280,6 @@
           </a:p>
         </p:txBody>
       </p:sp>
-      <p:pic>
-        <p:nvPicPr>
-          <p:cNvPr id="5122" name="Picture 2">
-            <a:extLst>
-              <a:ext uri="{FF2B5EF4-FFF2-40B4-BE49-F238E27FC236}">
-                <a16:creationId xmlns:a16="http://schemas.microsoft.com/office/drawing/2014/main" id="{2E5E4D73-F7DE-AD34-3553-FF6068C8280D}"/>
-              </a:ext>
-            </a:extLst>
-          </p:cNvPr>
-          <p:cNvPicPr>
-            <a:picLocks noChangeAspect="1" noChangeArrowheads="1"/>
-          </p:cNvPicPr>
-          <p:nvPr/>
-        </p:nvPicPr>
-        <p:blipFill>
-          <a:blip r:embed="rId2">
-            <a:extLst>
-              <a:ext uri="{28A0092B-C50C-407E-A947-70E740481C1C}">
-                <a14:useLocalDpi xmlns:a14="http://schemas.microsoft.com/office/drawing/2010/main" val="0"/>
-              </a:ext>
-            </a:extLst>
-          </a:blip>
-          <a:srcRect/>
-          <a:stretch>
-            <a:fillRect/>
-          </a:stretch>
-        </p:blipFill>
-        <p:spPr bwMode="auto">
-          <a:xfrm>
-            <a:off x="1187624" y="1772816"/>
-            <a:ext cx="6048672" cy="4591766"/>
-          </a:xfrm>
-          <a:prstGeom prst="rect">
-            <a:avLst/>
-          </a:prstGeom>
-          <a:noFill/>
-          <a:extLst>
-            <a:ext uri="{909E8E84-426E-40DD-AFC4-6F175D3DCCD1}">
-              <a14:hiddenFill xmlns:a14="http://schemas.microsoft.com/office/drawing/2010/main">
-                <a:solidFill>
-                  <a:srgbClr val="FFFFFF"/>
-                </a:solidFill>
-              </a14:hiddenFill>
-            </a:ext>
-          </a:extLst>
-        </p:spPr>
-      </p:pic>
       <p:sp>
         <p:nvSpPr>
           <p:cNvPr id="3" name="テキスト ボックス 2">
@@ -3518,6 +3454,36 @@
           <a:chExt cx="0" cy="0"/>
         </a:xfrm>
       </p:grpSpPr>
+      <p:pic>
+        <p:nvPicPr>
+          <p:cNvPr id="9" name="図 8">
+            <a:extLst>
+              <a:ext uri="{FF2B5EF4-FFF2-40B4-BE49-F238E27FC236}">
+                <a16:creationId xmlns:a16="http://schemas.microsoft.com/office/drawing/2014/main" id="{F037BB4E-AB05-FB41-3352-7E44AC0212DF}"/>
+              </a:ext>
+            </a:extLst>
+          </p:cNvPr>
+          <p:cNvPicPr>
+            <a:picLocks noChangeAspect="1"/>
+          </p:cNvPicPr>
+          <p:nvPr/>
+        </p:nvPicPr>
+        <p:blipFill>
+          <a:blip r:embed="rId2"/>
+          <a:stretch>
+            <a:fillRect/>
+          </a:stretch>
+        </p:blipFill>
+        <p:spPr>
+          <a:xfrm>
+            <a:off x="1262998" y="1609938"/>
+            <a:ext cx="6618004" cy="4163739"/>
+          </a:xfrm>
+          <a:prstGeom prst="rect">
+            <a:avLst/>
+          </a:prstGeom>
+        </p:spPr>
+      </p:pic>
       <p:sp>
         <p:nvSpPr>
           <p:cNvPr id="2" name="テキスト プレースホルダー 1">
@@ -3546,53 +3512,6 @@
           </a:p>
         </p:txBody>
       </p:sp>
-      <p:pic>
-        <p:nvPicPr>
-          <p:cNvPr id="6146" name="Picture 2">
-            <a:extLst>
-              <a:ext uri="{FF2B5EF4-FFF2-40B4-BE49-F238E27FC236}">
-                <a16:creationId xmlns:a16="http://schemas.microsoft.com/office/drawing/2014/main" id="{863E0AEA-FB8D-7CDD-50BB-A915352EE277}"/>
-              </a:ext>
-            </a:extLst>
-          </p:cNvPr>
-          <p:cNvPicPr>
-            <a:picLocks noChangeAspect="1" noChangeArrowheads="1"/>
-          </p:cNvPicPr>
-          <p:nvPr/>
-        </p:nvPicPr>
-        <p:blipFill>
-          <a:blip r:embed="rId2">
-            <a:extLst>
-              <a:ext uri="{28A0092B-C50C-407E-A947-70E740481C1C}">
-                <a14:useLocalDpi xmlns:a14="http://schemas.microsoft.com/office/drawing/2010/main" val="0"/>
-              </a:ext>
-            </a:extLst>
-          </a:blip>
-          <a:srcRect/>
-          <a:stretch>
-            <a:fillRect/>
-          </a:stretch>
-        </p:blipFill>
-        <p:spPr bwMode="auto">
-          <a:xfrm>
-            <a:off x="2051720" y="1556792"/>
-            <a:ext cx="5171281" cy="3908526"/>
-          </a:xfrm>
-          <a:prstGeom prst="rect">
-            <a:avLst/>
-          </a:prstGeom>
-          <a:noFill/>
-          <a:extLst>
-            <a:ext uri="{909E8E84-426E-40DD-AFC4-6F175D3DCCD1}">
-              <a14:hiddenFill xmlns:a14="http://schemas.microsoft.com/office/drawing/2010/main">
-                <a:solidFill>
-                  <a:srgbClr val="FFFFFF"/>
-                </a:solidFill>
-              </a14:hiddenFill>
-            </a:ext>
-          </a:extLst>
-        </p:spPr>
-      </p:pic>
       <p:sp>
         <p:nvSpPr>
           <p:cNvPr id="3" name="テキスト ボックス 2">
@@ -3658,7 +3577,7 @@
         </p:nvSpPr>
         <p:spPr>
           <a:xfrm>
-            <a:off x="3059832" y="2348880"/>
+            <a:off x="2391215" y="2636912"/>
             <a:ext cx="794257" cy="204522"/>
           </a:xfrm>
           <a:prstGeom prst="roundRect">
@@ -3714,12 +3633,12 @@
         </p:nvCxnSpPr>
         <p:spPr>
           <a:xfrm rot="10800000" flipH="1" flipV="1">
-            <a:off x="755576" y="1355577"/>
-            <a:ext cx="2304256" cy="1095564"/>
+            <a:off x="755575" y="1355577"/>
+            <a:ext cx="1635639" cy="1383596"/>
           </a:xfrm>
           <a:prstGeom prst="bentConnector3">
             <a:avLst>
-              <a:gd name="adj1" fmla="val -9921"/>
+              <a:gd name="adj1" fmla="val -13976"/>
             </a:avLst>
           </a:prstGeom>
           <a:ln>
@@ -3759,7 +3678,7 @@
         </p:nvSpPr>
         <p:spPr>
           <a:xfrm>
-            <a:off x="5724128" y="5229200"/>
+            <a:off x="6300192" y="5445224"/>
             <a:ext cx="794257" cy="204522"/>
           </a:xfrm>
           <a:prstGeom prst="roundRect">
@@ -3857,8 +3776,8 @@
         </p:nvCxnSpPr>
         <p:spPr>
           <a:xfrm rot="5400000" flipH="1" flipV="1">
-            <a:off x="4750514" y="5047675"/>
-            <a:ext cx="689827" cy="1257401"/>
+            <a:off x="5146558" y="4867655"/>
+            <a:ext cx="473803" cy="1833465"/>
           </a:xfrm>
           <a:prstGeom prst="bentConnector2">
             <a:avLst/>
@@ -19672,7 +19591,7 @@
           <p:cNvPr id="2" name="テキスト プレースホルダー 1">
             <a:extLst>
               <a:ext uri="{FF2B5EF4-FFF2-40B4-BE49-F238E27FC236}">
-                <a16:creationId xmlns:a16="http://schemas.microsoft.com/office/drawing/2014/main" id="{6B0B2E08-2322-4621-96D8-09F280581721}"/>
+                <a16:creationId xmlns:a16="http://schemas.microsoft.com/office/drawing/2014/main" id="{CC712D3E-8CD3-7AD0-FCBD-E4771C8ACF91}"/>
               </a:ext>
             </a:extLst>
           </p:cNvPr>
@@ -19689,14 +19608,14 @@
           <a:lstStyle/>
           <a:p>
             <a:r>
-              <a:rPr kumimoji="1" lang="ja-JP" altLang="en-US" dirty="0"/>
+              <a:rPr lang="ja-JP" altLang="en-US" dirty="0"/>
               <a:t>課題</a:t>
             </a:r>
             <a:r>
-              <a:rPr kumimoji="1" lang="en-US" altLang="ja-JP" dirty="0"/>
-              <a:t> – Step 1</a:t>
-            </a:r>
-            <a:endParaRPr kumimoji="1" lang="ja-JP" altLang="en-US" dirty="0"/>
+              <a:rPr lang="en-US" altLang="ja-JP" dirty="0"/>
+              <a:t> – Step 0</a:t>
+            </a:r>
+            <a:endParaRPr lang="ja-JP" altLang="en-US" dirty="0"/>
           </a:p>
         </p:txBody>
       </p:sp>
@@ -19705,7 +19624,7 @@
           <p:cNvPr id="4" name="テキスト ボックス 3">
             <a:extLst>
               <a:ext uri="{FF2B5EF4-FFF2-40B4-BE49-F238E27FC236}">
-                <a16:creationId xmlns:a16="http://schemas.microsoft.com/office/drawing/2014/main" id="{FC2471D5-BCE5-475E-80D0-D586469A6592}"/>
+                <a16:creationId xmlns:a16="http://schemas.microsoft.com/office/drawing/2014/main" id="{6B961DBE-6CA8-90CB-5795-71A7BD085019}"/>
               </a:ext>
             </a:extLst>
           </p:cNvPr>
@@ -19715,7 +19634,7 @@
         <p:spPr>
           <a:xfrm>
             <a:off x="323528" y="1124744"/>
-            <a:ext cx="1415772" cy="461665"/>
+            <a:ext cx="2031325" cy="461665"/>
           </a:xfrm>
           <a:prstGeom prst="rect">
             <a:avLst/>
@@ -19730,17 +19649,17 @@
           <a:p>
             <a:r>
               <a:rPr kumimoji="1" lang="ja-JP" altLang="en-US" sz="2400" dirty="0"/>
-              <a:t>初期設定</a:t>
-            </a:r>
-          </a:p>
-        </p:txBody>
-      </p:sp>
-      <p:sp>
-        <p:nvSpPr>
-          <p:cNvPr id="11" name="テキスト ボックス 10">
-            <a:extLst>
-              <a:ext uri="{FF2B5EF4-FFF2-40B4-BE49-F238E27FC236}">
-                <a16:creationId xmlns:a16="http://schemas.microsoft.com/office/drawing/2014/main" id="{78B41CAA-0100-4EA9-A1D1-4CFEBFC3849C}"/>
+              <a:t>環境変数設定</a:t>
+            </a:r>
+          </a:p>
+        </p:txBody>
+      </p:sp>
+      <p:sp>
+        <p:nvSpPr>
+          <p:cNvPr id="6" name="テキスト ボックス 5">
+            <a:extLst>
+              <a:ext uri="{FF2B5EF4-FFF2-40B4-BE49-F238E27FC236}">
+                <a16:creationId xmlns:a16="http://schemas.microsoft.com/office/drawing/2014/main" id="{C76108D1-9D7C-F6C6-8218-E1D2209C329B}"/>
               </a:ext>
             </a:extLst>
           </p:cNvPr>
@@ -19749,8 +19668,8 @@
         </p:nvSpPr>
         <p:spPr>
           <a:xfrm>
-            <a:off x="539552" y="2204864"/>
-            <a:ext cx="5979522" cy="1754326"/>
+            <a:off x="1979712" y="2768650"/>
+            <a:ext cx="4538422" cy="1446550"/>
           </a:xfrm>
           <a:prstGeom prst="rect">
             <a:avLst/>
@@ -19769,319 +19688,37 @@
           <a:lstStyle/>
           <a:p>
             <a:r>
-              <a:rPr kumimoji="1" lang="en-US" altLang="ja-JP" dirty="0">
+              <a:rPr lang="en-US" altLang="ja-JP" sz="4400" dirty="0">
                 <a:latin typeface="Consolas" panose="020B0609020204030204" pitchFamily="49" charset="0"/>
               </a:rPr>
-              <a:t>git config --global user.name "</a:t>
-            </a:r>
-            <a:r>
-              <a:rPr kumimoji="1" lang="ja-JP" altLang="en-US" dirty="0">
+              <a:t>e</a:t>
+            </a:r>
+            <a:r>
+              <a:rPr kumimoji="1" lang="en-US" altLang="ja-JP" sz="4400" dirty="0">
                 <a:latin typeface="Consolas" panose="020B0609020204030204" pitchFamily="49" charset="0"/>
               </a:rPr>
-              <a:t>ユーザー名</a:t>
-            </a:r>
-            <a:r>
-              <a:rPr kumimoji="1" lang="en-US" altLang="ja-JP" dirty="0">
+              <a:t>xport HOME=/z</a:t>
+            </a:r>
+          </a:p>
+          <a:p>
+            <a:r>
+              <a:rPr lang="en-US" altLang="ja-JP" sz="4400" dirty="0">
                 <a:latin typeface="Consolas" panose="020B0609020204030204" pitchFamily="49" charset="0"/>
               </a:rPr>
-              <a:t>"</a:t>
-            </a:r>
-          </a:p>
-          <a:p>
-            <a:r>
-              <a:rPr kumimoji="1" lang="en-US" altLang="ja-JP" dirty="0">
-                <a:latin typeface="Consolas" panose="020B0609020204030204" pitchFamily="49" charset="0"/>
-              </a:rPr>
-              <a:t>git config --global </a:t>
-            </a:r>
-            <a:r>
-              <a:rPr kumimoji="1" lang="en-US" altLang="ja-JP" dirty="0" err="1">
-                <a:latin typeface="Consolas" panose="020B0609020204030204" pitchFamily="49" charset="0"/>
-              </a:rPr>
-              <a:t>user.email</a:t>
-            </a:r>
-            <a:r>
-              <a:rPr kumimoji="1" lang="en-US" altLang="ja-JP" dirty="0">
-                <a:latin typeface="Consolas" panose="020B0609020204030204" pitchFamily="49" charset="0"/>
-              </a:rPr>
-              <a:t> "</a:t>
-            </a:r>
-            <a:r>
-              <a:rPr kumimoji="1" lang="ja-JP" altLang="en-US" dirty="0">
-                <a:latin typeface="Consolas" panose="020B0609020204030204" pitchFamily="49" charset="0"/>
-              </a:rPr>
-              <a:t>メールアドレス</a:t>
-            </a:r>
-            <a:r>
-              <a:rPr kumimoji="1" lang="en-US" altLang="ja-JP" dirty="0">
-                <a:latin typeface="Consolas" panose="020B0609020204030204" pitchFamily="49" charset="0"/>
-              </a:rPr>
-              <a:t>“</a:t>
-            </a:r>
-          </a:p>
-          <a:p>
-            <a:r>
-              <a:rPr kumimoji="1" lang="en-US" altLang="ja-JP" dirty="0">
-                <a:latin typeface="Consolas" panose="020B0609020204030204" pitchFamily="49" charset="0"/>
-              </a:rPr>
-              <a:t>git config --global </a:t>
-            </a:r>
-            <a:r>
-              <a:rPr kumimoji="1" lang="en-US" altLang="ja-JP" dirty="0" err="1">
-                <a:latin typeface="Consolas" panose="020B0609020204030204" pitchFamily="49" charset="0"/>
-              </a:rPr>
-              <a:t>core.editor</a:t>
-            </a:r>
-            <a:r>
-              <a:rPr kumimoji="1" lang="en-US" altLang="ja-JP" dirty="0">
-                <a:latin typeface="Consolas" panose="020B0609020204030204" pitchFamily="49" charset="0"/>
-              </a:rPr>
-              <a:t> vim</a:t>
-            </a:r>
-          </a:p>
-          <a:p>
-            <a:r>
-              <a:rPr kumimoji="1" lang="en-US" altLang="ja-JP" dirty="0">
-                <a:latin typeface="Consolas" panose="020B0609020204030204" pitchFamily="49" charset="0"/>
-              </a:rPr>
-              <a:t>git config --global </a:t>
-            </a:r>
-            <a:r>
-              <a:rPr kumimoji="1" lang="en-US" altLang="ja-JP" dirty="0" err="1">
-                <a:latin typeface="Consolas" panose="020B0609020204030204" pitchFamily="49" charset="0"/>
-              </a:rPr>
-              <a:t>core.autocrlf</a:t>
-            </a:r>
-            <a:r>
-              <a:rPr kumimoji="1" lang="en-US" altLang="ja-JP" dirty="0">
-                <a:latin typeface="Consolas" panose="020B0609020204030204" pitchFamily="49" charset="0"/>
-              </a:rPr>
-              <a:t> false</a:t>
-            </a:r>
-          </a:p>
-          <a:p>
-            <a:r>
-              <a:rPr kumimoji="1" lang="en-US" altLang="ja-JP" dirty="0">
-                <a:latin typeface="Consolas" panose="020B0609020204030204" pitchFamily="49" charset="0"/>
-              </a:rPr>
-              <a:t>git config --global </a:t>
-            </a:r>
-            <a:r>
-              <a:rPr kumimoji="1" lang="en-US" altLang="ja-JP" dirty="0" err="1">
-                <a:latin typeface="Consolas" panose="020B0609020204030204" pitchFamily="49" charset="0"/>
-              </a:rPr>
-              <a:t>init.defaultBranch</a:t>
-            </a:r>
-            <a:r>
-              <a:rPr kumimoji="1" lang="en-US" altLang="ja-JP" dirty="0">
-                <a:latin typeface="Consolas" panose="020B0609020204030204" pitchFamily="49" charset="0"/>
-              </a:rPr>
-              <a:t> main</a:t>
-            </a:r>
-          </a:p>
-          <a:p>
-            <a:r>
-              <a:rPr kumimoji="1" lang="en-US" altLang="ja-JP" dirty="0">
-                <a:latin typeface="Consolas" panose="020B0609020204030204" pitchFamily="49" charset="0"/>
-              </a:rPr>
-              <a:t>git config --global alias.st "status -s"</a:t>
-            </a:r>
-          </a:p>
-        </p:txBody>
-      </p:sp>
-      <p:pic>
-        <p:nvPicPr>
-          <p:cNvPr id="23" name="Picture 2" descr="フォルダのイラスト">
-            <a:extLst>
-              <a:ext uri="{FF2B5EF4-FFF2-40B4-BE49-F238E27FC236}">
-                <a16:creationId xmlns:a16="http://schemas.microsoft.com/office/drawing/2014/main" id="{C30570D5-D05E-4140-BE97-0E32241B6E0F}"/>
-              </a:ext>
-            </a:extLst>
-          </p:cNvPr>
-          <p:cNvPicPr>
-            <a:picLocks noChangeAspect="1" noChangeArrowheads="1"/>
-          </p:cNvPicPr>
-          <p:nvPr/>
-        </p:nvPicPr>
-        <p:blipFill>
-          <a:blip r:embed="rId2" cstate="print">
-            <a:extLst>
-              <a:ext uri="{28A0092B-C50C-407E-A947-70E740481C1C}">
-                <a14:useLocalDpi xmlns:a14="http://schemas.microsoft.com/office/drawing/2010/main" val="0"/>
-              </a:ext>
-            </a:extLst>
-          </a:blip>
-          <a:srcRect/>
-          <a:stretch>
-            <a:fillRect/>
-          </a:stretch>
-        </p:blipFill>
-        <p:spPr bwMode="auto">
-          <a:xfrm>
-            <a:off x="5724128" y="4077072"/>
-            <a:ext cx="702078" cy="587990"/>
-          </a:xfrm>
-          <a:prstGeom prst="rect">
-            <a:avLst/>
-          </a:prstGeom>
-          <a:noFill/>
-          <a:extLst>
-            <a:ext uri="{909E8E84-426E-40DD-AFC4-6F175D3DCCD1}">
-              <a14:hiddenFill xmlns:a14="http://schemas.microsoft.com/office/drawing/2010/main">
-                <a:solidFill>
-                  <a:srgbClr val="FFFFFF"/>
-                </a:solidFill>
-              </a14:hiddenFill>
-            </a:ext>
-          </a:extLst>
-        </p:spPr>
-      </p:pic>
-      <p:pic>
-        <p:nvPicPr>
-          <p:cNvPr id="26" name="Picture 2" descr="家のイラスト7">
-            <a:extLst>
-              <a:ext uri="{FF2B5EF4-FFF2-40B4-BE49-F238E27FC236}">
-                <a16:creationId xmlns:a16="http://schemas.microsoft.com/office/drawing/2014/main" id="{0E850664-FB0A-43DE-AF7C-94922EADF928}"/>
-              </a:ext>
-            </a:extLst>
-          </p:cNvPr>
-          <p:cNvPicPr>
-            <a:picLocks noChangeAspect="1" noChangeArrowheads="1"/>
-          </p:cNvPicPr>
-          <p:nvPr/>
-        </p:nvPicPr>
-        <p:blipFill>
-          <a:blip r:embed="rId3" cstate="print">
-            <a:extLst>
-              <a:ext uri="{28A0092B-C50C-407E-A947-70E740481C1C}">
-                <a14:useLocalDpi xmlns:a14="http://schemas.microsoft.com/office/drawing/2010/main" val="0"/>
-              </a:ext>
-            </a:extLst>
-          </a:blip>
-          <a:srcRect/>
-          <a:stretch>
-            <a:fillRect/>
-          </a:stretch>
-        </p:blipFill>
-        <p:spPr bwMode="auto">
-          <a:xfrm>
-            <a:off x="5868144" y="4221088"/>
-            <a:ext cx="360040" cy="336637"/>
-          </a:xfrm>
-          <a:prstGeom prst="rect">
-            <a:avLst/>
-          </a:prstGeom>
-          <a:noFill/>
-          <a:extLst>
-            <a:ext uri="{909E8E84-426E-40DD-AFC4-6F175D3DCCD1}">
-              <a14:hiddenFill xmlns:a14="http://schemas.microsoft.com/office/drawing/2010/main">
-                <a:solidFill>
-                  <a:srgbClr val="FFFFFF"/>
-                </a:solidFill>
-              </a14:hiddenFill>
-            </a:ext>
-          </a:extLst>
-        </p:spPr>
-      </p:pic>
-      <p:pic>
-        <p:nvPicPr>
-          <p:cNvPr id="36" name="Picture 2" descr="ファイルアイコン（テキスト）">
-            <a:extLst>
-              <a:ext uri="{FF2B5EF4-FFF2-40B4-BE49-F238E27FC236}">
-                <a16:creationId xmlns:a16="http://schemas.microsoft.com/office/drawing/2014/main" id="{F5F57010-B496-49C7-8EBE-2053136A0595}"/>
-              </a:ext>
-            </a:extLst>
-          </p:cNvPr>
-          <p:cNvPicPr>
-            <a:picLocks noChangeAspect="1" noChangeArrowheads="1"/>
-          </p:cNvPicPr>
-          <p:nvPr/>
-        </p:nvPicPr>
-        <p:blipFill>
-          <a:blip r:embed="rId4" cstate="print">
-            <a:extLst>
-              <a:ext uri="{28A0092B-C50C-407E-A947-70E740481C1C}">
-                <a14:useLocalDpi xmlns:a14="http://schemas.microsoft.com/office/drawing/2010/main" val="0"/>
-              </a:ext>
-            </a:extLst>
-          </a:blip>
-          <a:srcRect/>
-          <a:stretch>
-            <a:fillRect/>
-          </a:stretch>
-        </p:blipFill>
-        <p:spPr bwMode="auto">
-          <a:xfrm>
-            <a:off x="5832232" y="4941168"/>
-            <a:ext cx="484265" cy="562372"/>
-          </a:xfrm>
-          <a:prstGeom prst="rect">
-            <a:avLst/>
-          </a:prstGeom>
-          <a:noFill/>
-          <a:extLst>
-            <a:ext uri="{909E8E84-426E-40DD-AFC4-6F175D3DCCD1}">
-              <a14:hiddenFill xmlns:a14="http://schemas.microsoft.com/office/drawing/2010/main">
-                <a:solidFill>
-                  <a:srgbClr val="FFFFFF"/>
-                </a:solidFill>
-              </a14:hiddenFill>
-            </a:ext>
-          </a:extLst>
-        </p:spPr>
-      </p:pic>
-      <p:cxnSp>
-        <p:nvCxnSpPr>
-          <p:cNvPr id="8" name="直線コネクタ 7">
-            <a:extLst>
-              <a:ext uri="{FF2B5EF4-FFF2-40B4-BE49-F238E27FC236}">
-                <a16:creationId xmlns:a16="http://schemas.microsoft.com/office/drawing/2014/main" id="{BD61EB45-6C88-45FD-AE22-5DD6ED78AC10}"/>
-              </a:ext>
-            </a:extLst>
-          </p:cNvPr>
-          <p:cNvCxnSpPr>
-            <a:stCxn id="23" idx="2"/>
-            <a:endCxn id="36" idx="0"/>
-          </p:cNvCxnSpPr>
-          <p:nvPr/>
-        </p:nvCxnSpPr>
-        <p:spPr>
-          <a:xfrm flipH="1">
-            <a:off x="6074365" y="4665062"/>
-            <a:ext cx="802" cy="276106"/>
-          </a:xfrm>
-          <a:prstGeom prst="line">
-            <a:avLst/>
-          </a:prstGeom>
-          <a:ln>
-            <a:solidFill>
-              <a:schemeClr val="tx1"/>
-            </a:solidFill>
-            <a:headEnd type="none" w="med" len="med"/>
-            <a:tailEnd type="none" w="med" len="med"/>
-          </a:ln>
-        </p:spPr>
-        <p:style>
-          <a:lnRef idx="1">
-            <a:schemeClr val="accent1"/>
-          </a:lnRef>
-          <a:fillRef idx="0">
-            <a:schemeClr val="accent1"/>
-          </a:fillRef>
-          <a:effectRef idx="0">
-            <a:schemeClr val="accent1"/>
-          </a:effectRef>
-          <a:fontRef idx="minor">
-            <a:schemeClr val="tx1"/>
-          </a:fontRef>
-        </p:style>
-      </p:cxnSp>
-      <p:sp>
-        <p:nvSpPr>
-          <p:cNvPr id="37" name="テキスト ボックス 36">
-            <a:extLst>
-              <a:ext uri="{FF2B5EF4-FFF2-40B4-BE49-F238E27FC236}">
-                <a16:creationId xmlns:a16="http://schemas.microsoft.com/office/drawing/2014/main" id="{09F5D442-2F5E-4DB0-A5E2-09FC366A0208}"/>
+              <a:t>cd</a:t>
+            </a:r>
+            <a:endParaRPr kumimoji="1" lang="en-US" altLang="ja-JP" sz="4400" dirty="0">
+              <a:latin typeface="Consolas" panose="020B0609020204030204" pitchFamily="49" charset="0"/>
+            </a:endParaRPr>
+          </a:p>
+        </p:txBody>
+      </p:sp>
+      <p:sp>
+        <p:nvSpPr>
+          <p:cNvPr id="7" name="テキスト ボックス 6">
+            <a:extLst>
+              <a:ext uri="{FF2B5EF4-FFF2-40B4-BE49-F238E27FC236}">
+                <a16:creationId xmlns:a16="http://schemas.microsoft.com/office/drawing/2014/main" id="{3594EF92-B97B-AA3A-3537-34F195F9315E}"/>
               </a:ext>
             </a:extLst>
           </p:cNvPr>
@@ -20090,8 +19727,8 @@
         </p:nvSpPr>
         <p:spPr>
           <a:xfrm>
-            <a:off x="6516216" y="4149080"/>
-            <a:ext cx="2262158" cy="369332"/>
+            <a:off x="755018" y="1929509"/>
+            <a:ext cx="6987810" cy="523220"/>
           </a:xfrm>
           <a:prstGeom prst="rect">
             <a:avLst/>
@@ -20105,19 +19742,42 @@
           <a:lstStyle/>
           <a:p>
             <a:r>
-              <a:rPr lang="ja-JP" altLang="en-US" dirty="0"/>
-              <a:t>ホームディレクトリ</a:t>
-            </a:r>
-            <a:endParaRPr kumimoji="1" lang="ja-JP" altLang="en-US" dirty="0"/>
-          </a:p>
-        </p:txBody>
-      </p:sp>
-      <p:sp>
-        <p:nvSpPr>
-          <p:cNvPr id="38" name="テキスト ボックス 37">
-            <a:extLst>
-              <a:ext uri="{FF2B5EF4-FFF2-40B4-BE49-F238E27FC236}">
-                <a16:creationId xmlns:a16="http://schemas.microsoft.com/office/drawing/2014/main" id="{867AEE9D-E23C-4C86-8B7B-448B638FA499}"/>
+              <a:rPr kumimoji="1" lang="ja-JP" altLang="en-US" sz="2800" dirty="0"/>
+              <a:t>演習室の</a:t>
+            </a:r>
+            <a:r>
+              <a:rPr kumimoji="1" lang="en-US" altLang="ja-JP" sz="2800" dirty="0"/>
+              <a:t>PC</a:t>
+            </a:r>
+            <a:r>
+              <a:rPr kumimoji="1" lang="ja-JP" altLang="en-US" sz="2800" dirty="0"/>
+              <a:t>を使う場合は</a:t>
+            </a:r>
+            <a:r>
+              <a:rPr lang="ja-JP" altLang="en-US" sz="2800" dirty="0"/>
+              <a:t>下記</a:t>
+            </a:r>
+            <a:r>
+              <a:rPr kumimoji="1" lang="ja-JP" altLang="en-US" sz="2800" dirty="0"/>
+              <a:t>の</a:t>
+            </a:r>
+            <a:r>
+              <a:rPr kumimoji="1" lang="en-US" altLang="ja-JP" sz="2800" dirty="0"/>
+              <a:t>2</a:t>
+            </a:r>
+            <a:r>
+              <a:rPr kumimoji="1" lang="ja-JP" altLang="en-US" sz="2800" dirty="0"/>
+              <a:t>行を実行</a:t>
+            </a:r>
+          </a:p>
+        </p:txBody>
+      </p:sp>
+      <p:sp>
+        <p:nvSpPr>
+          <p:cNvPr id="9" name="テキスト ボックス 8">
+            <a:extLst>
+              <a:ext uri="{FF2B5EF4-FFF2-40B4-BE49-F238E27FC236}">
+                <a16:creationId xmlns:a16="http://schemas.microsoft.com/office/drawing/2014/main" id="{6913B9CD-3D35-ABBE-6245-9F22E2F67954}"/>
               </a:ext>
             </a:extLst>
           </p:cNvPr>
@@ -20126,8 +19786,8 @@
         </p:nvSpPr>
         <p:spPr>
           <a:xfrm>
-            <a:off x="5292080" y="5517232"/>
-            <a:ext cx="1451038" cy="369332"/>
+            <a:off x="611560" y="4869160"/>
+            <a:ext cx="7146508" cy="523220"/>
           </a:xfrm>
           <a:prstGeom prst="rect">
             <a:avLst/>
@@ -20141,117 +19801,25 @@
           <a:lstStyle/>
           <a:p>
             <a:r>
-              <a:rPr kumimoji="1" lang="en-US" altLang="ja-JP" dirty="0">
-                <a:latin typeface="Consolas" panose="020B0609020204030204" pitchFamily="49" charset="0"/>
-              </a:rPr>
-              <a:t>.</a:t>
-            </a:r>
-            <a:r>
-              <a:rPr kumimoji="1" lang="en-US" altLang="ja-JP" dirty="0" err="1">
-                <a:latin typeface="Consolas" panose="020B0609020204030204" pitchFamily="49" charset="0"/>
-              </a:rPr>
-              <a:t>gitconfig</a:t>
-            </a:r>
-            <a:endParaRPr kumimoji="1" lang="ja-JP" altLang="en-US" dirty="0">
-              <a:latin typeface="Consolas" panose="020B0609020204030204" pitchFamily="49" charset="0"/>
-            </a:endParaRPr>
-          </a:p>
-        </p:txBody>
-      </p:sp>
-      <p:sp>
-        <p:nvSpPr>
-          <p:cNvPr id="13" name="テキスト ボックス 12">
-            <a:extLst>
-              <a:ext uri="{FF2B5EF4-FFF2-40B4-BE49-F238E27FC236}">
-                <a16:creationId xmlns:a16="http://schemas.microsoft.com/office/drawing/2014/main" id="{226897EA-FF1E-47E9-A4A9-1E1CBE6F05BD}"/>
-              </a:ext>
-            </a:extLst>
-          </p:cNvPr>
-          <p:cNvSpPr txBox="1"/>
-          <p:nvPr/>
-        </p:nvSpPr>
-        <p:spPr>
-          <a:xfrm>
-            <a:off x="611560" y="4581128"/>
-            <a:ext cx="4339650" cy="646331"/>
-          </a:xfrm>
-          <a:prstGeom prst="rect">
-            <a:avLst/>
-          </a:prstGeom>
-          <a:noFill/>
-        </p:spPr>
-        <p:txBody>
-          <a:bodyPr wrap="none" rtlCol="0">
-            <a:spAutoFit/>
-          </a:bodyPr>
-          <a:lstStyle/>
-          <a:p>
-            <a:r>
-              <a:rPr lang="ja-JP" altLang="en-US" dirty="0"/>
-              <a:t>上記設定は、ホームディレクトリ直下の</a:t>
-            </a:r>
-            <a:endParaRPr lang="en-US" altLang="ja-JP" dirty="0"/>
-          </a:p>
-          <a:p>
-            <a:r>
-              <a:rPr kumimoji="1" lang="en-US" altLang="ja-JP" dirty="0"/>
-              <a:t>.</a:t>
-            </a:r>
-            <a:r>
-              <a:rPr kumimoji="1" lang="en-US" altLang="ja-JP" dirty="0" err="1"/>
-              <a:t>gitconfig</a:t>
-            </a:r>
-            <a:r>
-              <a:rPr kumimoji="1" lang="ja-JP" altLang="en-US" dirty="0"/>
-              <a:t>に書き込まれる</a:t>
-            </a:r>
-          </a:p>
-        </p:txBody>
-      </p:sp>
-      <p:sp>
-        <p:nvSpPr>
-          <p:cNvPr id="15" name="テキスト ボックス 14">
-            <a:extLst>
-              <a:ext uri="{FF2B5EF4-FFF2-40B4-BE49-F238E27FC236}">
-                <a16:creationId xmlns:a16="http://schemas.microsoft.com/office/drawing/2014/main" id="{45785257-2350-496E-BE8D-B45E915417F1}"/>
-              </a:ext>
-            </a:extLst>
-          </p:cNvPr>
-          <p:cNvSpPr txBox="1"/>
-          <p:nvPr/>
-        </p:nvSpPr>
-        <p:spPr>
-          <a:xfrm>
-            <a:off x="683568" y="1763524"/>
-            <a:ext cx="4634602" cy="369332"/>
-          </a:xfrm>
-          <a:prstGeom prst="rect">
-            <a:avLst/>
-          </a:prstGeom>
-          <a:noFill/>
-        </p:spPr>
-        <p:txBody>
-          <a:bodyPr wrap="none" rtlCol="0">
-            <a:spAutoFit/>
-          </a:bodyPr>
-          <a:lstStyle/>
-          <a:p>
-            <a:r>
-              <a:rPr kumimoji="1" lang="en-US" altLang="ja-JP" dirty="0"/>
-              <a:t>Git</a:t>
-            </a:r>
-            <a:r>
-              <a:rPr lang="ja-JP" altLang="en-US" dirty="0"/>
-              <a:t>に名前やアドレス、その他設定を伝える</a:t>
-            </a:r>
-            <a:endParaRPr kumimoji="1" lang="ja-JP" altLang="en-US" dirty="0"/>
+              <a:rPr lang="ja-JP" altLang="en-US" sz="2800" dirty="0"/>
+              <a:t>持ち込み</a:t>
+            </a:r>
+            <a:r>
+              <a:rPr lang="en-US" altLang="ja-JP" sz="2800" dirty="0"/>
+              <a:t>PC</a:t>
+            </a:r>
+            <a:r>
+              <a:rPr lang="ja-JP" altLang="en-US" sz="2800" dirty="0"/>
+              <a:t>を使う場合は実行しなくてよい</a:t>
+            </a:r>
+            <a:endParaRPr kumimoji="1" lang="ja-JP" altLang="en-US" sz="2800" dirty="0"/>
           </a:p>
         </p:txBody>
       </p:sp>
     </p:spTree>
     <p:extLst>
       <p:ext uri="{BB962C8B-B14F-4D97-AF65-F5344CB8AC3E}">
-        <p14:creationId xmlns:p14="http://schemas.microsoft.com/office/powerpoint/2010/main" val="2758065531"/>
+        <p14:creationId xmlns:p14="http://schemas.microsoft.com/office/powerpoint/2010/main" val="3550240450"/>
       </p:ext>
     </p:extLst>
   </p:cSld>
@@ -20283,7 +19851,7 @@
           <p:cNvPr id="2" name="テキスト プレースホルダー 1">
             <a:extLst>
               <a:ext uri="{FF2B5EF4-FFF2-40B4-BE49-F238E27FC236}">
-                <a16:creationId xmlns:a16="http://schemas.microsoft.com/office/drawing/2014/main" id="{0C9FC35D-439B-4D2A-B2EE-13619F77BB1E}"/>
+                <a16:creationId xmlns:a16="http://schemas.microsoft.com/office/drawing/2014/main" id="{6B0B2E08-2322-4621-96D8-09F280581721}"/>
               </a:ext>
             </a:extLst>
           </p:cNvPr>
@@ -20305,11 +19873,7 @@
             </a:r>
             <a:r>
               <a:rPr kumimoji="1" lang="en-US" altLang="ja-JP" dirty="0"/>
-              <a:t> – Step </a:t>
-            </a:r>
-            <a:r>
-              <a:rPr lang="en-US" altLang="ja-JP" dirty="0"/>
-              <a:t>2</a:t>
+              <a:t> – Step 1</a:t>
             </a:r>
             <a:endParaRPr kumimoji="1" lang="ja-JP" altLang="en-US" dirty="0"/>
           </a:p>
@@ -20317,10 +19881,10 @@
       </p:sp>
       <p:sp>
         <p:nvSpPr>
-          <p:cNvPr id="3" name="テキスト ボックス 2">
-            <a:extLst>
-              <a:ext uri="{FF2B5EF4-FFF2-40B4-BE49-F238E27FC236}">
-                <a16:creationId xmlns:a16="http://schemas.microsoft.com/office/drawing/2014/main" id="{A0A020DB-1700-43A1-8863-48DD090945C5}"/>
+          <p:cNvPr id="4" name="テキスト ボックス 3">
+            <a:extLst>
+              <a:ext uri="{FF2B5EF4-FFF2-40B4-BE49-F238E27FC236}">
+                <a16:creationId xmlns:a16="http://schemas.microsoft.com/office/drawing/2014/main" id="{FC2471D5-BCE5-475E-80D0-D586469A6592}"/>
               </a:ext>
             </a:extLst>
           </p:cNvPr>
@@ -20329,8 +19893,43 @@
         </p:nvSpPr>
         <p:spPr>
           <a:xfrm>
-            <a:off x="539552" y="2060848"/>
-            <a:ext cx="1877437" cy="1015663"/>
+            <a:off x="323528" y="1124744"/>
+            <a:ext cx="1415772" cy="461665"/>
+          </a:xfrm>
+          <a:prstGeom prst="rect">
+            <a:avLst/>
+          </a:prstGeom>
+          <a:noFill/>
+        </p:spPr>
+        <p:txBody>
+          <a:bodyPr wrap="none" rtlCol="0">
+            <a:spAutoFit/>
+          </a:bodyPr>
+          <a:lstStyle/>
+          <a:p>
+            <a:r>
+              <a:rPr kumimoji="1" lang="ja-JP" altLang="en-US" sz="2400" dirty="0"/>
+              <a:t>初期設定</a:t>
+            </a:r>
+          </a:p>
+        </p:txBody>
+      </p:sp>
+      <p:sp>
+        <p:nvSpPr>
+          <p:cNvPr id="11" name="テキスト ボックス 10">
+            <a:extLst>
+              <a:ext uri="{FF2B5EF4-FFF2-40B4-BE49-F238E27FC236}">
+                <a16:creationId xmlns:a16="http://schemas.microsoft.com/office/drawing/2014/main" id="{78B41CAA-0100-4EA9-A1D1-4CFEBFC3849C}"/>
+              </a:ext>
+            </a:extLst>
+          </p:cNvPr>
+          <p:cNvSpPr txBox="1"/>
+          <p:nvPr/>
+        </p:nvSpPr>
+        <p:spPr>
+          <a:xfrm>
+            <a:off x="539552" y="2204864"/>
+            <a:ext cx="5979522" cy="1754326"/>
           </a:xfrm>
           <a:prstGeom prst="rect">
             <a:avLst/>
@@ -20349,95 +19948,132 @@
           <a:lstStyle/>
           <a:p>
             <a:r>
-              <a:rPr kumimoji="1" lang="en-US" altLang="ja-JP" sz="2000" dirty="0">
+              <a:rPr kumimoji="1" lang="en-US" altLang="ja-JP" dirty="0">
                 <a:latin typeface="Consolas" panose="020B0609020204030204" pitchFamily="49" charset="0"/>
               </a:rPr>
-              <a:t>cd</a:t>
-            </a:r>
-          </a:p>
-          <a:p>
-            <a:r>
-              <a:rPr kumimoji="1" lang="en-US" altLang="ja-JP" sz="2000" dirty="0" err="1">
+              <a:t>git config --global user.name "</a:t>
+            </a:r>
+            <a:r>
+              <a:rPr kumimoji="1" lang="ja-JP" altLang="en-US" dirty="0">
                 <a:latin typeface="Consolas" panose="020B0609020204030204" pitchFamily="49" charset="0"/>
               </a:rPr>
-              <a:t>mkdir</a:t>
-            </a:r>
-            <a:r>
-              <a:rPr kumimoji="1" lang="en-US" altLang="ja-JP" sz="2000" dirty="0">
+              <a:t>ユーザー名</a:t>
+            </a:r>
+            <a:r>
+              <a:rPr kumimoji="1" lang="en-US" altLang="ja-JP" dirty="0">
                 <a:latin typeface="Consolas" panose="020B0609020204030204" pitchFamily="49" charset="0"/>
               </a:rPr>
-              <a:t> </a:t>
-            </a:r>
-            <a:r>
-              <a:rPr kumimoji="1" lang="en-US" altLang="ja-JP" sz="2000" dirty="0" err="1">
+              <a:t>"</a:t>
+            </a:r>
+          </a:p>
+          <a:p>
+            <a:r>
+              <a:rPr kumimoji="1" lang="en-US" altLang="ja-JP" dirty="0">
                 <a:latin typeface="Consolas" panose="020B0609020204030204" pitchFamily="49" charset="0"/>
               </a:rPr>
-              <a:t>github</a:t>
-            </a:r>
-            <a:endParaRPr lang="en-US" altLang="ja-JP" sz="2000" dirty="0">
-              <a:latin typeface="Consolas" panose="020B0609020204030204" pitchFamily="49" charset="0"/>
-            </a:endParaRPr>
-          </a:p>
-          <a:p>
-            <a:r>
-              <a:rPr kumimoji="1" lang="en-US" altLang="ja-JP" sz="2000" dirty="0">
+              <a:t>git config --global </a:t>
+            </a:r>
+            <a:r>
+              <a:rPr kumimoji="1" lang="en-US" altLang="ja-JP" dirty="0" err="1">
                 <a:latin typeface="Consolas" panose="020B0609020204030204" pitchFamily="49" charset="0"/>
               </a:rPr>
-              <a:t>cd </a:t>
-            </a:r>
-            <a:r>
-              <a:rPr kumimoji="1" lang="en-US" altLang="ja-JP" sz="2000" dirty="0" err="1">
+              <a:t>user.email</a:t>
+            </a:r>
+            <a:r>
+              <a:rPr kumimoji="1" lang="en-US" altLang="ja-JP" dirty="0">
                 <a:latin typeface="Consolas" panose="020B0609020204030204" pitchFamily="49" charset="0"/>
               </a:rPr>
-              <a:t>github</a:t>
-            </a:r>
-            <a:endParaRPr kumimoji="1" lang="en-US" altLang="ja-JP" sz="2000" dirty="0">
-              <a:latin typeface="Consolas" panose="020B0609020204030204" pitchFamily="49" charset="0"/>
-            </a:endParaRPr>
-          </a:p>
-        </p:txBody>
-      </p:sp>
-      <p:sp>
-        <p:nvSpPr>
-          <p:cNvPr id="28" name="テキスト ボックス 27">
-            <a:extLst>
-              <a:ext uri="{FF2B5EF4-FFF2-40B4-BE49-F238E27FC236}">
-                <a16:creationId xmlns:a16="http://schemas.microsoft.com/office/drawing/2014/main" id="{C84F612B-D17C-4823-82D6-614DAD7219EE}"/>
-              </a:ext>
-            </a:extLst>
-          </p:cNvPr>
-          <p:cNvSpPr txBox="1"/>
-          <p:nvPr/>
-        </p:nvSpPr>
-        <p:spPr>
-          <a:xfrm>
-            <a:off x="251520" y="1268760"/>
-            <a:ext cx="2954655" cy="461665"/>
-          </a:xfrm>
-          <a:prstGeom prst="rect">
-            <a:avLst/>
-          </a:prstGeom>
-          <a:noFill/>
-        </p:spPr>
-        <p:txBody>
-          <a:bodyPr wrap="none" rtlCol="0">
-            <a:spAutoFit/>
-          </a:bodyPr>
-          <a:lstStyle/>
-          <a:p>
-            <a:r>
-              <a:rPr kumimoji="1" lang="ja-JP" altLang="en-US" sz="2400" dirty="0"/>
-              <a:t>ディレクトリの作成</a:t>
+              <a:t> "</a:t>
+            </a:r>
+            <a:r>
+              <a:rPr kumimoji="1" lang="ja-JP" altLang="en-US" dirty="0">
+                <a:latin typeface="Consolas" panose="020B0609020204030204" pitchFamily="49" charset="0"/>
+              </a:rPr>
+              <a:t>メールアドレス</a:t>
+            </a:r>
+            <a:r>
+              <a:rPr kumimoji="1" lang="en-US" altLang="ja-JP" dirty="0">
+                <a:latin typeface="Consolas" panose="020B0609020204030204" pitchFamily="49" charset="0"/>
+              </a:rPr>
+              <a:t>“</a:t>
+            </a:r>
+          </a:p>
+          <a:p>
+            <a:r>
+              <a:rPr kumimoji="1" lang="en-US" altLang="ja-JP" dirty="0">
+                <a:latin typeface="Consolas" panose="020B0609020204030204" pitchFamily="49" charset="0"/>
+              </a:rPr>
+              <a:t>git config --global </a:t>
+            </a:r>
+            <a:r>
+              <a:rPr kumimoji="1" lang="en-US" altLang="ja-JP" dirty="0" err="1">
+                <a:latin typeface="Consolas" panose="020B0609020204030204" pitchFamily="49" charset="0"/>
+              </a:rPr>
+              <a:t>core.editor</a:t>
+            </a:r>
+            <a:r>
+              <a:rPr kumimoji="1" lang="en-US" altLang="ja-JP" dirty="0">
+                <a:latin typeface="Consolas" panose="020B0609020204030204" pitchFamily="49" charset="0"/>
+              </a:rPr>
+              <a:t> vim</a:t>
+            </a:r>
+          </a:p>
+          <a:p>
+            <a:r>
+              <a:rPr kumimoji="1" lang="en-US" altLang="ja-JP" dirty="0">
+                <a:latin typeface="Consolas" panose="020B0609020204030204" pitchFamily="49" charset="0"/>
+              </a:rPr>
+              <a:t>git config --global </a:t>
+            </a:r>
+            <a:r>
+              <a:rPr kumimoji="1" lang="en-US" altLang="ja-JP" dirty="0" err="1">
+                <a:latin typeface="Consolas" panose="020B0609020204030204" pitchFamily="49" charset="0"/>
+              </a:rPr>
+              <a:t>core.autocrlf</a:t>
+            </a:r>
+            <a:r>
+              <a:rPr kumimoji="1" lang="en-US" altLang="ja-JP" dirty="0">
+                <a:latin typeface="Consolas" panose="020B0609020204030204" pitchFamily="49" charset="0"/>
+              </a:rPr>
+              <a:t> false</a:t>
+            </a:r>
+          </a:p>
+          <a:p>
+            <a:r>
+              <a:rPr kumimoji="1" lang="en-US" altLang="ja-JP" dirty="0">
+                <a:latin typeface="Consolas" panose="020B0609020204030204" pitchFamily="49" charset="0"/>
+              </a:rPr>
+              <a:t>git config --global </a:t>
+            </a:r>
+            <a:r>
+              <a:rPr kumimoji="1" lang="en-US" altLang="ja-JP" dirty="0" err="1">
+                <a:latin typeface="Consolas" panose="020B0609020204030204" pitchFamily="49" charset="0"/>
+              </a:rPr>
+              <a:t>init.defaultBranch</a:t>
+            </a:r>
+            <a:r>
+              <a:rPr kumimoji="1" lang="en-US" altLang="ja-JP" dirty="0">
+                <a:latin typeface="Consolas" panose="020B0609020204030204" pitchFamily="49" charset="0"/>
+              </a:rPr>
+              <a:t> main</a:t>
+            </a:r>
+          </a:p>
+          <a:p>
+            <a:r>
+              <a:rPr kumimoji="1" lang="en-US" altLang="ja-JP" dirty="0">
+                <a:latin typeface="Consolas" panose="020B0609020204030204" pitchFamily="49" charset="0"/>
+              </a:rPr>
+              <a:t>git config --global alias.st "status -s"</a:t>
             </a:r>
           </a:p>
         </p:txBody>
       </p:sp>
       <p:pic>
         <p:nvPicPr>
-          <p:cNvPr id="21" name="Picture 2" descr="フォルダのイラスト">
-            <a:extLst>
-              <a:ext uri="{FF2B5EF4-FFF2-40B4-BE49-F238E27FC236}">
-                <a16:creationId xmlns:a16="http://schemas.microsoft.com/office/drawing/2014/main" id="{D5FB3222-65A1-4AA0-92CE-1B2E62674565}"/>
+          <p:cNvPr id="23" name="Picture 2" descr="フォルダのイラスト">
+            <a:extLst>
+              <a:ext uri="{FF2B5EF4-FFF2-40B4-BE49-F238E27FC236}">
+                <a16:creationId xmlns:a16="http://schemas.microsoft.com/office/drawing/2014/main" id="{C30570D5-D05E-4140-BE97-0E32241B6E0F}"/>
               </a:ext>
             </a:extLst>
           </p:cNvPr>
@@ -20461,7 +20097,7 @@
         </p:blipFill>
         <p:spPr bwMode="auto">
           <a:xfrm>
-            <a:off x="4860032" y="2132856"/>
+            <a:off x="5724128" y="4077072"/>
             <a:ext cx="702078" cy="587990"/>
           </a:xfrm>
           <a:prstGeom prst="rect">
@@ -20481,10 +20117,10 @@
       </p:pic>
       <p:pic>
         <p:nvPicPr>
-          <p:cNvPr id="22" name="Picture 2" descr="フォルダのイラスト">
-            <a:extLst>
-              <a:ext uri="{FF2B5EF4-FFF2-40B4-BE49-F238E27FC236}">
-                <a16:creationId xmlns:a16="http://schemas.microsoft.com/office/drawing/2014/main" id="{4CED145E-4633-4BC9-95C9-3724E4BE8C9A}"/>
+          <p:cNvPr id="26" name="Picture 2" descr="家のイラスト7">
+            <a:extLst>
+              <a:ext uri="{FF2B5EF4-FFF2-40B4-BE49-F238E27FC236}">
+                <a16:creationId xmlns:a16="http://schemas.microsoft.com/office/drawing/2014/main" id="{0E850664-FB0A-43DE-AF7C-94922EADF928}"/>
               </a:ext>
             </a:extLst>
           </p:cNvPr>
@@ -20494,7 +20130,7 @@
           <p:nvPr/>
         </p:nvPicPr>
         <p:blipFill>
-          <a:blip r:embed="rId2" cstate="print">
+          <a:blip r:embed="rId3" cstate="print">
             <a:extLst>
               <a:ext uri="{28A0092B-C50C-407E-A947-70E740481C1C}">
                 <a14:useLocalDpi xmlns:a14="http://schemas.microsoft.com/office/drawing/2010/main" val="0"/>
@@ -20508,8 +20144,8 @@
         </p:blipFill>
         <p:spPr bwMode="auto">
           <a:xfrm>
-            <a:off x="6084168" y="2132856"/>
-            <a:ext cx="702078" cy="587990"/>
+            <a:off x="5868144" y="4221088"/>
+            <a:ext cx="360040" cy="336637"/>
           </a:xfrm>
           <a:prstGeom prst="rect">
             <a:avLst/>
@@ -20526,48 +20162,12 @@
           </a:extLst>
         </p:spPr>
       </p:pic>
-      <p:sp>
-        <p:nvSpPr>
-          <p:cNvPr id="25" name="テキスト ボックス 24">
-            <a:extLst>
-              <a:ext uri="{FF2B5EF4-FFF2-40B4-BE49-F238E27FC236}">
-                <a16:creationId xmlns:a16="http://schemas.microsoft.com/office/drawing/2014/main" id="{AE57AF4C-CBE6-45D0-A78B-1479F523196D}"/>
-              </a:ext>
-            </a:extLst>
-          </p:cNvPr>
-          <p:cNvSpPr txBox="1"/>
-          <p:nvPr/>
-        </p:nvSpPr>
-        <p:spPr>
-          <a:xfrm>
-            <a:off x="6012160" y="2564904"/>
-            <a:ext cx="813043" cy="369332"/>
-          </a:xfrm>
-          <a:prstGeom prst="rect">
-            <a:avLst/>
-          </a:prstGeom>
-          <a:noFill/>
-        </p:spPr>
-        <p:txBody>
-          <a:bodyPr wrap="none" rtlCol="0">
-            <a:spAutoFit/>
-          </a:bodyPr>
-          <a:lstStyle/>
-          <a:p>
-            <a:r>
-              <a:rPr kumimoji="1" lang="en-US" altLang="ja-JP" dirty="0" err="1"/>
-              <a:t>github</a:t>
-            </a:r>
-            <a:endParaRPr kumimoji="1" lang="ja-JP" altLang="en-US" dirty="0"/>
-          </a:p>
-        </p:txBody>
-      </p:sp>
       <p:pic>
         <p:nvPicPr>
-          <p:cNvPr id="27" name="Picture 2" descr="家のイラスト7">
-            <a:extLst>
-              <a:ext uri="{FF2B5EF4-FFF2-40B4-BE49-F238E27FC236}">
-                <a16:creationId xmlns:a16="http://schemas.microsoft.com/office/drawing/2014/main" id="{8EFC7E64-0F23-4A38-8F9E-D9C772BBEFBD}"/>
+          <p:cNvPr id="36" name="Picture 2" descr="ファイルアイコン（テキスト）">
+            <a:extLst>
+              <a:ext uri="{FF2B5EF4-FFF2-40B4-BE49-F238E27FC236}">
+                <a16:creationId xmlns:a16="http://schemas.microsoft.com/office/drawing/2014/main" id="{F5F57010-B496-49C7-8EBE-2053136A0595}"/>
               </a:ext>
             </a:extLst>
           </p:cNvPr>
@@ -20577,7 +20177,7 @@
           <p:nvPr/>
         </p:nvPicPr>
         <p:blipFill>
-          <a:blip r:embed="rId3" cstate="print">
+          <a:blip r:embed="rId4" cstate="print">
             <a:extLst>
               <a:ext uri="{28A0092B-C50C-407E-A947-70E740481C1C}">
                 <a14:useLocalDpi xmlns:a14="http://schemas.microsoft.com/office/drawing/2010/main" val="0"/>
@@ -20591,8 +20191,8 @@
         </p:blipFill>
         <p:spPr bwMode="auto">
           <a:xfrm>
-            <a:off x="5004048" y="2276872"/>
-            <a:ext cx="360040" cy="336637"/>
+            <a:off x="5832232" y="4941168"/>
+            <a:ext cx="484265" cy="562372"/>
           </a:xfrm>
           <a:prstGeom prst="rect">
             <a:avLst/>
@@ -20611,25 +20211,25 @@
       </p:pic>
       <p:cxnSp>
         <p:nvCxnSpPr>
-          <p:cNvPr id="29" name="直線矢印コネクタ 28">
-            <a:extLst>
-              <a:ext uri="{FF2B5EF4-FFF2-40B4-BE49-F238E27FC236}">
-                <a16:creationId xmlns:a16="http://schemas.microsoft.com/office/drawing/2014/main" id="{66AA4814-C6FC-4E61-B1A5-67434C00CB5C}"/>
+          <p:cNvPr id="8" name="直線コネクタ 7">
+            <a:extLst>
+              <a:ext uri="{FF2B5EF4-FFF2-40B4-BE49-F238E27FC236}">
+                <a16:creationId xmlns:a16="http://schemas.microsoft.com/office/drawing/2014/main" id="{BD61EB45-6C88-45FD-AE22-5DD6ED78AC10}"/>
               </a:ext>
             </a:extLst>
           </p:cNvPr>
           <p:cNvCxnSpPr>
-            <a:stCxn id="21" idx="3"/>
-            <a:endCxn id="22" idx="1"/>
+            <a:stCxn id="23" idx="2"/>
+            <a:endCxn id="36" idx="0"/>
           </p:cNvCxnSpPr>
           <p:nvPr/>
         </p:nvCxnSpPr>
         <p:spPr>
-          <a:xfrm>
-            <a:off x="5562110" y="2426851"/>
-            <a:ext cx="522058" cy="0"/>
-          </a:xfrm>
-          <a:prstGeom prst="straightConnector1">
+          <a:xfrm flipH="1">
+            <a:off x="6074365" y="4665062"/>
+            <a:ext cx="802" cy="276106"/>
+          </a:xfrm>
+          <a:prstGeom prst="line">
             <a:avLst/>
           </a:prstGeom>
           <a:ln>
@@ -20657,10 +20257,10 @@
       </p:cxnSp>
       <p:sp>
         <p:nvSpPr>
-          <p:cNvPr id="30" name="テキスト ボックス 29">
-            <a:extLst>
-              <a:ext uri="{FF2B5EF4-FFF2-40B4-BE49-F238E27FC236}">
-                <a16:creationId xmlns:a16="http://schemas.microsoft.com/office/drawing/2014/main" id="{3251D9D3-D373-49CD-B56F-E1FD520CBD51}"/>
+          <p:cNvPr id="37" name="テキスト ボックス 36">
+            <a:extLst>
+              <a:ext uri="{FF2B5EF4-FFF2-40B4-BE49-F238E27FC236}">
+                <a16:creationId xmlns:a16="http://schemas.microsoft.com/office/drawing/2014/main" id="{09F5D442-2F5E-4DB0-A5E2-09FC366A0208}"/>
               </a:ext>
             </a:extLst>
           </p:cNvPr>
@@ -20669,8 +20269,8 @@
         </p:nvSpPr>
         <p:spPr>
           <a:xfrm>
-            <a:off x="755576" y="3284984"/>
-            <a:ext cx="4121641" cy="646331"/>
+            <a:off x="6516216" y="4149080"/>
+            <a:ext cx="2262158" cy="369332"/>
           </a:xfrm>
           <a:prstGeom prst="rect">
             <a:avLst/>
@@ -20685,84 +20285,18 @@
           <a:p>
             <a:r>
               <a:rPr lang="ja-JP" altLang="en-US" dirty="0"/>
-              <a:t>ホームディレクトリに移動してから</a:t>
-            </a:r>
-            <a:endParaRPr lang="en-US" altLang="ja-JP" dirty="0"/>
-          </a:p>
-          <a:p>
-            <a:r>
-              <a:rPr kumimoji="1" lang="en-US" altLang="ja-JP" dirty="0"/>
-              <a:t>git</a:t>
-            </a:r>
-            <a:r>
-              <a:rPr kumimoji="1" lang="ja-JP" altLang="en-US" dirty="0"/>
-              <a:t>ディレクトリ</a:t>
-            </a:r>
-            <a:r>
-              <a:rPr kumimoji="1" lang="ja-JP" altLang="en-US"/>
-              <a:t>を作成</a:t>
-            </a:r>
-            <a:r>
-              <a:rPr lang="ja-JP" altLang="en-US"/>
-              <a:t>し、そこへ移動</a:t>
+              <a:t>ホームディレクトリ</a:t>
             </a:r>
             <a:endParaRPr kumimoji="1" lang="ja-JP" altLang="en-US" dirty="0"/>
           </a:p>
         </p:txBody>
       </p:sp>
-      <p:pic>
-        <p:nvPicPr>
-          <p:cNvPr id="31" name="Picture 2" descr="手を上げている男の子のイラスト">
-            <a:extLst>
-              <a:ext uri="{FF2B5EF4-FFF2-40B4-BE49-F238E27FC236}">
-                <a16:creationId xmlns:a16="http://schemas.microsoft.com/office/drawing/2014/main" id="{1A3E7FD9-5330-4433-B2DC-09F1621EABF7}"/>
-              </a:ext>
-            </a:extLst>
-          </p:cNvPr>
-          <p:cNvPicPr>
-            <a:picLocks noChangeAspect="1" noChangeArrowheads="1"/>
-          </p:cNvPicPr>
-          <p:nvPr/>
-        </p:nvPicPr>
-        <p:blipFill>
-          <a:blip r:embed="rId4" cstate="print">
-            <a:extLst>
-              <a:ext uri="{28A0092B-C50C-407E-A947-70E740481C1C}">
-                <a14:useLocalDpi xmlns:a14="http://schemas.microsoft.com/office/drawing/2010/main" val="0"/>
-              </a:ext>
-            </a:extLst>
-          </a:blip>
-          <a:srcRect/>
-          <a:stretch>
-            <a:fillRect/>
-          </a:stretch>
-        </p:blipFill>
-        <p:spPr bwMode="auto">
-          <a:xfrm>
-            <a:off x="6237012" y="1484784"/>
-            <a:ext cx="385188" cy="536848"/>
-          </a:xfrm>
-          <a:prstGeom prst="rect">
-            <a:avLst/>
-          </a:prstGeom>
-          <a:noFill/>
-          <a:extLst>
-            <a:ext uri="{909E8E84-426E-40DD-AFC4-6F175D3DCCD1}">
-              <a14:hiddenFill xmlns:a14="http://schemas.microsoft.com/office/drawing/2010/main">
-                <a:solidFill>
-                  <a:srgbClr val="FFFFFF"/>
-                </a:solidFill>
-              </a14:hiddenFill>
-            </a:ext>
-          </a:extLst>
-        </p:spPr>
-      </p:pic>
-      <p:sp>
-        <p:nvSpPr>
-          <p:cNvPr id="32" name="テキスト ボックス 31">
-            <a:extLst>
-              <a:ext uri="{FF2B5EF4-FFF2-40B4-BE49-F238E27FC236}">
-                <a16:creationId xmlns:a16="http://schemas.microsoft.com/office/drawing/2014/main" id="{362DFEEA-286C-496A-9AF0-12927DFD9C26}"/>
+      <p:sp>
+        <p:nvSpPr>
+          <p:cNvPr id="38" name="テキスト ボックス 37">
+            <a:extLst>
+              <a:ext uri="{FF2B5EF4-FFF2-40B4-BE49-F238E27FC236}">
+                <a16:creationId xmlns:a16="http://schemas.microsoft.com/office/drawing/2014/main" id="{867AEE9D-E23C-4C86-8B7B-448B638FA499}"/>
               </a:ext>
             </a:extLst>
           </p:cNvPr>
@@ -20771,8 +20305,8 @@
         </p:nvSpPr>
         <p:spPr>
           <a:xfrm>
-            <a:off x="6732240" y="1556792"/>
-            <a:ext cx="1569660" cy="646331"/>
+            <a:off x="5292080" y="5517232"/>
+            <a:ext cx="1451038" cy="369332"/>
           </a:xfrm>
           <a:prstGeom prst="rect">
             <a:avLst/>
@@ -20786,26 +20320,29 @@
           <a:lstStyle/>
           <a:p>
             <a:r>
-              <a:rPr lang="ja-JP" altLang="en-US" dirty="0"/>
-              <a:t>カレント</a:t>
-            </a:r>
-            <a:endParaRPr lang="en-US" altLang="ja-JP" dirty="0"/>
-          </a:p>
-          <a:p>
-            <a:r>
-              <a:rPr lang="ja-JP" altLang="en-US" dirty="0"/>
-              <a:t>ディレクトリ</a:t>
-            </a:r>
-            <a:endParaRPr kumimoji="1" lang="ja-JP" altLang="en-US" dirty="0"/>
-          </a:p>
-        </p:txBody>
-      </p:sp>
-      <p:sp>
-        <p:nvSpPr>
-          <p:cNvPr id="33" name="テキスト ボックス 32">
-            <a:extLst>
-              <a:ext uri="{FF2B5EF4-FFF2-40B4-BE49-F238E27FC236}">
-                <a16:creationId xmlns:a16="http://schemas.microsoft.com/office/drawing/2014/main" id="{301D5A89-DD8F-4621-9496-D65A0CAE355D}"/>
+              <a:rPr kumimoji="1" lang="en-US" altLang="ja-JP" dirty="0">
+                <a:latin typeface="Consolas" panose="020B0609020204030204" pitchFamily="49" charset="0"/>
+              </a:rPr>
+              <a:t>.</a:t>
+            </a:r>
+            <a:r>
+              <a:rPr kumimoji="1" lang="en-US" altLang="ja-JP" dirty="0" err="1">
+                <a:latin typeface="Consolas" panose="020B0609020204030204" pitchFamily="49" charset="0"/>
+              </a:rPr>
+              <a:t>gitconfig</a:t>
+            </a:r>
+            <a:endParaRPr kumimoji="1" lang="ja-JP" altLang="en-US" dirty="0">
+              <a:latin typeface="Consolas" panose="020B0609020204030204" pitchFamily="49" charset="0"/>
+            </a:endParaRPr>
+          </a:p>
+        </p:txBody>
+      </p:sp>
+      <p:sp>
+        <p:nvSpPr>
+          <p:cNvPr id="13" name="テキスト ボックス 12">
+            <a:extLst>
+              <a:ext uri="{FF2B5EF4-FFF2-40B4-BE49-F238E27FC236}">
+                <a16:creationId xmlns:a16="http://schemas.microsoft.com/office/drawing/2014/main" id="{226897EA-FF1E-47E9-A4A9-1E1CBE6F05BD}"/>
               </a:ext>
             </a:extLst>
           </p:cNvPr>
@@ -20814,18 +20351,13 @@
         </p:nvSpPr>
         <p:spPr>
           <a:xfrm>
-            <a:off x="539552" y="4509120"/>
-            <a:ext cx="1595309" cy="707886"/>
+            <a:off x="611560" y="4581128"/>
+            <a:ext cx="4339650" cy="646331"/>
           </a:xfrm>
           <a:prstGeom prst="rect">
             <a:avLst/>
           </a:prstGeom>
           <a:noFill/>
-          <a:ln>
-            <a:solidFill>
-              <a:schemeClr val="tx1"/>
-            </a:solidFill>
-          </a:ln>
         </p:spPr>
         <p:txBody>
           <a:bodyPr wrap="none" rtlCol="0">
@@ -20834,37 +20366,33 @@
           <a:lstStyle/>
           <a:p>
             <a:r>
-              <a:rPr kumimoji="1" lang="en-US" altLang="ja-JP" sz="2000" dirty="0" err="1">
-                <a:latin typeface="Consolas" panose="020B0609020204030204" pitchFamily="49" charset="0"/>
-              </a:rPr>
-              <a:t>mkdir</a:t>
-            </a:r>
-            <a:r>
-              <a:rPr kumimoji="1" lang="en-US" altLang="ja-JP" sz="2000" dirty="0">
-                <a:latin typeface="Consolas" panose="020B0609020204030204" pitchFamily="49" charset="0"/>
-              </a:rPr>
-              <a:t> test</a:t>
-            </a:r>
-          </a:p>
-          <a:p>
-            <a:r>
-              <a:rPr kumimoji="1" lang="en-US" altLang="ja-JP" sz="2000" dirty="0">
-                <a:latin typeface="Consolas" panose="020B0609020204030204" pitchFamily="49" charset="0"/>
-              </a:rPr>
-              <a:t>cd test</a:t>
-            </a:r>
-            <a:endParaRPr kumimoji="1" lang="ja-JP" altLang="en-US" sz="2000" dirty="0">
-              <a:latin typeface="Consolas" panose="020B0609020204030204" pitchFamily="49" charset="0"/>
-            </a:endParaRPr>
-          </a:p>
-        </p:txBody>
-      </p:sp>
-      <p:sp>
-        <p:nvSpPr>
-          <p:cNvPr id="34" name="テキスト ボックス 33">
-            <a:extLst>
-              <a:ext uri="{FF2B5EF4-FFF2-40B4-BE49-F238E27FC236}">
-                <a16:creationId xmlns:a16="http://schemas.microsoft.com/office/drawing/2014/main" id="{6C57A7F4-9FAB-477B-B2AC-3399556274E9}"/>
+              <a:rPr lang="ja-JP" altLang="en-US" dirty="0"/>
+              <a:t>上記設定は、ホームディレクトリ直下の</a:t>
+            </a:r>
+            <a:endParaRPr lang="en-US" altLang="ja-JP" dirty="0"/>
+          </a:p>
+          <a:p>
+            <a:r>
+              <a:rPr kumimoji="1" lang="en-US" altLang="ja-JP" dirty="0"/>
+              <a:t>.</a:t>
+            </a:r>
+            <a:r>
+              <a:rPr kumimoji="1" lang="en-US" altLang="ja-JP" dirty="0" err="1"/>
+              <a:t>gitconfig</a:t>
+            </a:r>
+            <a:r>
+              <a:rPr kumimoji="1" lang="ja-JP" altLang="en-US" dirty="0"/>
+              <a:t>に書き込まれる</a:t>
+            </a:r>
+          </a:p>
+        </p:txBody>
+      </p:sp>
+      <p:sp>
+        <p:nvSpPr>
+          <p:cNvPr id="15" name="テキスト ボックス 14">
+            <a:extLst>
+              <a:ext uri="{FF2B5EF4-FFF2-40B4-BE49-F238E27FC236}">
+                <a16:creationId xmlns:a16="http://schemas.microsoft.com/office/drawing/2014/main" id="{45785257-2350-496E-BE8D-B45E915417F1}"/>
               </a:ext>
             </a:extLst>
           </p:cNvPr>
@@ -20873,8 +20401,8 @@
         </p:nvSpPr>
         <p:spPr>
           <a:xfrm>
-            <a:off x="755576" y="5373216"/>
-            <a:ext cx="3788217" cy="646331"/>
+            <a:off x="683568" y="1763524"/>
+            <a:ext cx="4634602" cy="369332"/>
           </a:xfrm>
           <a:prstGeom prst="rect">
             <a:avLst/>
@@ -20888,432 +20416,21 @@
           <a:lstStyle/>
           <a:p>
             <a:r>
-              <a:rPr kumimoji="1" lang="ja-JP" altLang="en-US" dirty="0"/>
-              <a:t>さらに</a:t>
-            </a:r>
-            <a:r>
               <a:rPr kumimoji="1" lang="en-US" altLang="ja-JP" dirty="0"/>
-              <a:t>test</a:t>
-            </a:r>
-            <a:r>
-              <a:rPr kumimoji="1" lang="ja-JP" altLang="en-US" dirty="0"/>
-              <a:t>ディレクトリを作成して</a:t>
-            </a:r>
-            <a:endParaRPr kumimoji="1" lang="en-US" altLang="ja-JP" dirty="0"/>
-          </a:p>
-          <a:p>
+              <a:t>Git</a:t>
+            </a:r>
             <a:r>
               <a:rPr lang="ja-JP" altLang="en-US" dirty="0"/>
-              <a:t>そこへ移動</a:t>
+              <a:t>に名前やアドレス、その他設定を伝える</a:t>
             </a:r>
             <a:endParaRPr kumimoji="1" lang="ja-JP" altLang="en-US" dirty="0"/>
           </a:p>
         </p:txBody>
       </p:sp>
-      <p:pic>
-        <p:nvPicPr>
-          <p:cNvPr id="35" name="Picture 2" descr="フォルダのイラスト">
-            <a:extLst>
-              <a:ext uri="{FF2B5EF4-FFF2-40B4-BE49-F238E27FC236}">
-                <a16:creationId xmlns:a16="http://schemas.microsoft.com/office/drawing/2014/main" id="{BF168D21-995B-4069-A814-84BD3BF10379}"/>
-              </a:ext>
-            </a:extLst>
-          </p:cNvPr>
-          <p:cNvPicPr>
-            <a:picLocks noChangeAspect="1" noChangeArrowheads="1"/>
-          </p:cNvPicPr>
-          <p:nvPr/>
-        </p:nvPicPr>
-        <p:blipFill>
-          <a:blip r:embed="rId2" cstate="print">
-            <a:extLst>
-              <a:ext uri="{28A0092B-C50C-407E-A947-70E740481C1C}">
-                <a14:useLocalDpi xmlns:a14="http://schemas.microsoft.com/office/drawing/2010/main" val="0"/>
-              </a:ext>
-            </a:extLst>
-          </a:blip>
-          <a:srcRect/>
-          <a:stretch>
-            <a:fillRect/>
-          </a:stretch>
-        </p:blipFill>
-        <p:spPr bwMode="auto">
-          <a:xfrm>
-            <a:off x="4860032" y="5157192"/>
-            <a:ext cx="702078" cy="587990"/>
-          </a:xfrm>
-          <a:prstGeom prst="rect">
-            <a:avLst/>
-          </a:prstGeom>
-          <a:noFill/>
-          <a:extLst>
-            <a:ext uri="{909E8E84-426E-40DD-AFC4-6F175D3DCCD1}">
-              <a14:hiddenFill xmlns:a14="http://schemas.microsoft.com/office/drawing/2010/main">
-                <a:solidFill>
-                  <a:srgbClr val="FFFFFF"/>
-                </a:solidFill>
-              </a14:hiddenFill>
-            </a:ext>
-          </a:extLst>
-        </p:spPr>
-      </p:pic>
-      <p:pic>
-        <p:nvPicPr>
-          <p:cNvPr id="36" name="Picture 2" descr="フォルダのイラスト">
-            <a:extLst>
-              <a:ext uri="{FF2B5EF4-FFF2-40B4-BE49-F238E27FC236}">
-                <a16:creationId xmlns:a16="http://schemas.microsoft.com/office/drawing/2014/main" id="{F5D3659D-A854-45A2-BA9D-4F4D2CE423DA}"/>
-              </a:ext>
-            </a:extLst>
-          </p:cNvPr>
-          <p:cNvPicPr>
-            <a:picLocks noChangeAspect="1" noChangeArrowheads="1"/>
-          </p:cNvPicPr>
-          <p:nvPr/>
-        </p:nvPicPr>
-        <p:blipFill>
-          <a:blip r:embed="rId2" cstate="print">
-            <a:extLst>
-              <a:ext uri="{28A0092B-C50C-407E-A947-70E740481C1C}">
-                <a14:useLocalDpi xmlns:a14="http://schemas.microsoft.com/office/drawing/2010/main" val="0"/>
-              </a:ext>
-            </a:extLst>
-          </a:blip>
-          <a:srcRect/>
-          <a:stretch>
-            <a:fillRect/>
-          </a:stretch>
-        </p:blipFill>
-        <p:spPr bwMode="auto">
-          <a:xfrm>
-            <a:off x="6084168" y="5157192"/>
-            <a:ext cx="702078" cy="587990"/>
-          </a:xfrm>
-          <a:prstGeom prst="rect">
-            <a:avLst/>
-          </a:prstGeom>
-          <a:noFill/>
-          <a:extLst>
-            <a:ext uri="{909E8E84-426E-40DD-AFC4-6F175D3DCCD1}">
-              <a14:hiddenFill xmlns:a14="http://schemas.microsoft.com/office/drawing/2010/main">
-                <a:solidFill>
-                  <a:srgbClr val="FFFFFF"/>
-                </a:solidFill>
-              </a14:hiddenFill>
-            </a:ext>
-          </a:extLst>
-        </p:spPr>
-      </p:pic>
-      <p:sp>
-        <p:nvSpPr>
-          <p:cNvPr id="37" name="テキスト ボックス 36">
-            <a:extLst>
-              <a:ext uri="{FF2B5EF4-FFF2-40B4-BE49-F238E27FC236}">
-                <a16:creationId xmlns:a16="http://schemas.microsoft.com/office/drawing/2014/main" id="{5EF9FCCA-6BFA-4E02-A703-8517A7458E3A}"/>
-              </a:ext>
-            </a:extLst>
-          </p:cNvPr>
-          <p:cNvSpPr txBox="1"/>
-          <p:nvPr/>
-        </p:nvSpPr>
-        <p:spPr>
-          <a:xfrm>
-            <a:off x="6012160" y="5589240"/>
-            <a:ext cx="813043" cy="369332"/>
-          </a:xfrm>
-          <a:prstGeom prst="rect">
-            <a:avLst/>
-          </a:prstGeom>
-          <a:noFill/>
-        </p:spPr>
-        <p:txBody>
-          <a:bodyPr wrap="none" rtlCol="0">
-            <a:spAutoFit/>
-          </a:bodyPr>
-          <a:lstStyle/>
-          <a:p>
-            <a:r>
-              <a:rPr kumimoji="1" lang="en-US" altLang="ja-JP" dirty="0" err="1"/>
-              <a:t>github</a:t>
-            </a:r>
-            <a:endParaRPr kumimoji="1" lang="ja-JP" altLang="en-US" dirty="0"/>
-          </a:p>
-        </p:txBody>
-      </p:sp>
-      <p:pic>
-        <p:nvPicPr>
-          <p:cNvPr id="38" name="Picture 2" descr="家のイラスト7">
-            <a:extLst>
-              <a:ext uri="{FF2B5EF4-FFF2-40B4-BE49-F238E27FC236}">
-                <a16:creationId xmlns:a16="http://schemas.microsoft.com/office/drawing/2014/main" id="{A7DD775C-2EF4-49AD-8BBA-CB42A18B49E7}"/>
-              </a:ext>
-            </a:extLst>
-          </p:cNvPr>
-          <p:cNvPicPr>
-            <a:picLocks noChangeAspect="1" noChangeArrowheads="1"/>
-          </p:cNvPicPr>
-          <p:nvPr/>
-        </p:nvPicPr>
-        <p:blipFill>
-          <a:blip r:embed="rId3" cstate="print">
-            <a:extLst>
-              <a:ext uri="{28A0092B-C50C-407E-A947-70E740481C1C}">
-                <a14:useLocalDpi xmlns:a14="http://schemas.microsoft.com/office/drawing/2010/main" val="0"/>
-              </a:ext>
-            </a:extLst>
-          </a:blip>
-          <a:srcRect/>
-          <a:stretch>
-            <a:fillRect/>
-          </a:stretch>
-        </p:blipFill>
-        <p:spPr bwMode="auto">
-          <a:xfrm>
-            <a:off x="5004048" y="5301208"/>
-            <a:ext cx="360040" cy="336637"/>
-          </a:xfrm>
-          <a:prstGeom prst="rect">
-            <a:avLst/>
-          </a:prstGeom>
-          <a:noFill/>
-          <a:extLst>
-            <a:ext uri="{909E8E84-426E-40DD-AFC4-6F175D3DCCD1}">
-              <a14:hiddenFill xmlns:a14="http://schemas.microsoft.com/office/drawing/2010/main">
-                <a:solidFill>
-                  <a:srgbClr val="FFFFFF"/>
-                </a:solidFill>
-              </a14:hiddenFill>
-            </a:ext>
-          </a:extLst>
-        </p:spPr>
-      </p:pic>
-      <p:cxnSp>
-        <p:nvCxnSpPr>
-          <p:cNvPr id="39" name="直線矢印コネクタ 38">
-            <a:extLst>
-              <a:ext uri="{FF2B5EF4-FFF2-40B4-BE49-F238E27FC236}">
-                <a16:creationId xmlns:a16="http://schemas.microsoft.com/office/drawing/2014/main" id="{4CE213D7-D7E2-47D6-A11C-5501D1473BE3}"/>
-              </a:ext>
-            </a:extLst>
-          </p:cNvPr>
-          <p:cNvCxnSpPr>
-            <a:stCxn id="35" idx="3"/>
-            <a:endCxn id="36" idx="1"/>
-          </p:cNvCxnSpPr>
-          <p:nvPr/>
-        </p:nvCxnSpPr>
-        <p:spPr>
-          <a:xfrm>
-            <a:off x="5562110" y="5451187"/>
-            <a:ext cx="522058" cy="0"/>
-          </a:xfrm>
-          <a:prstGeom prst="straightConnector1">
-            <a:avLst/>
-          </a:prstGeom>
-          <a:ln>
-            <a:solidFill>
-              <a:schemeClr val="tx1"/>
-            </a:solidFill>
-            <a:headEnd type="none" w="med" len="med"/>
-            <a:tailEnd type="none" w="med" len="med"/>
-          </a:ln>
-        </p:spPr>
-        <p:style>
-          <a:lnRef idx="1">
-            <a:schemeClr val="accent1"/>
-          </a:lnRef>
-          <a:fillRef idx="0">
-            <a:schemeClr val="accent1"/>
-          </a:fillRef>
-          <a:effectRef idx="0">
-            <a:schemeClr val="accent1"/>
-          </a:effectRef>
-          <a:fontRef idx="minor">
-            <a:schemeClr val="tx1"/>
-          </a:fontRef>
-        </p:style>
-      </p:cxnSp>
-      <p:pic>
-        <p:nvPicPr>
-          <p:cNvPr id="40" name="Picture 2" descr="フォルダのイラスト">
-            <a:extLst>
-              <a:ext uri="{FF2B5EF4-FFF2-40B4-BE49-F238E27FC236}">
-                <a16:creationId xmlns:a16="http://schemas.microsoft.com/office/drawing/2014/main" id="{0D4DCE5E-265F-4131-8C70-145C957F5973}"/>
-              </a:ext>
-            </a:extLst>
-          </p:cNvPr>
-          <p:cNvPicPr>
-            <a:picLocks noChangeAspect="1" noChangeArrowheads="1"/>
-          </p:cNvPicPr>
-          <p:nvPr/>
-        </p:nvPicPr>
-        <p:blipFill>
-          <a:blip r:embed="rId2" cstate="print">
-            <a:extLst>
-              <a:ext uri="{28A0092B-C50C-407E-A947-70E740481C1C}">
-                <a14:useLocalDpi xmlns:a14="http://schemas.microsoft.com/office/drawing/2010/main" val="0"/>
-              </a:ext>
-            </a:extLst>
-          </a:blip>
-          <a:srcRect/>
-          <a:stretch>
-            <a:fillRect/>
-          </a:stretch>
-        </p:blipFill>
-        <p:spPr bwMode="auto">
-          <a:xfrm>
-            <a:off x="7380312" y="5157192"/>
-            <a:ext cx="702078" cy="587990"/>
-          </a:xfrm>
-          <a:prstGeom prst="rect">
-            <a:avLst/>
-          </a:prstGeom>
-          <a:noFill/>
-          <a:extLst>
-            <a:ext uri="{909E8E84-426E-40DD-AFC4-6F175D3DCCD1}">
-              <a14:hiddenFill xmlns:a14="http://schemas.microsoft.com/office/drawing/2010/main">
-                <a:solidFill>
-                  <a:srgbClr val="FFFFFF"/>
-                </a:solidFill>
-              </a14:hiddenFill>
-            </a:ext>
-          </a:extLst>
-        </p:spPr>
-      </p:pic>
-      <p:sp>
-        <p:nvSpPr>
-          <p:cNvPr id="41" name="テキスト ボックス 40">
-            <a:extLst>
-              <a:ext uri="{FF2B5EF4-FFF2-40B4-BE49-F238E27FC236}">
-                <a16:creationId xmlns:a16="http://schemas.microsoft.com/office/drawing/2014/main" id="{5021F8FC-BB61-4643-B355-E94A1806EEAB}"/>
-              </a:ext>
-            </a:extLst>
-          </p:cNvPr>
-          <p:cNvSpPr txBox="1"/>
-          <p:nvPr/>
-        </p:nvSpPr>
-        <p:spPr>
-          <a:xfrm>
-            <a:off x="7452320" y="5661248"/>
-            <a:ext cx="556563" cy="369332"/>
-          </a:xfrm>
-          <a:prstGeom prst="rect">
-            <a:avLst/>
-          </a:prstGeom>
-          <a:noFill/>
-        </p:spPr>
-        <p:txBody>
-          <a:bodyPr wrap="none" rtlCol="0">
-            <a:spAutoFit/>
-          </a:bodyPr>
-          <a:lstStyle/>
-          <a:p>
-            <a:r>
-              <a:rPr kumimoji="1" lang="en-US" altLang="ja-JP" dirty="0"/>
-              <a:t>test</a:t>
-            </a:r>
-            <a:endParaRPr kumimoji="1" lang="ja-JP" altLang="en-US" dirty="0"/>
-          </a:p>
-        </p:txBody>
-      </p:sp>
-      <p:pic>
-        <p:nvPicPr>
-          <p:cNvPr id="42" name="Picture 2" descr="手を上げている男の子のイラスト">
-            <a:extLst>
-              <a:ext uri="{FF2B5EF4-FFF2-40B4-BE49-F238E27FC236}">
-                <a16:creationId xmlns:a16="http://schemas.microsoft.com/office/drawing/2014/main" id="{79E650B2-C543-4EED-B3C8-171E65868E67}"/>
-              </a:ext>
-            </a:extLst>
-          </p:cNvPr>
-          <p:cNvPicPr>
-            <a:picLocks noChangeAspect="1" noChangeArrowheads="1"/>
-          </p:cNvPicPr>
-          <p:nvPr/>
-        </p:nvPicPr>
-        <p:blipFill>
-          <a:blip r:embed="rId4" cstate="print">
-            <a:extLst>
-              <a:ext uri="{28A0092B-C50C-407E-A947-70E740481C1C}">
-                <a14:useLocalDpi xmlns:a14="http://schemas.microsoft.com/office/drawing/2010/main" val="0"/>
-              </a:ext>
-            </a:extLst>
-          </a:blip>
-          <a:srcRect/>
-          <a:stretch>
-            <a:fillRect/>
-          </a:stretch>
-        </p:blipFill>
-        <p:spPr bwMode="auto">
-          <a:xfrm>
-            <a:off x="7524328" y="4509120"/>
-            <a:ext cx="385188" cy="536848"/>
-          </a:xfrm>
-          <a:prstGeom prst="rect">
-            <a:avLst/>
-          </a:prstGeom>
-          <a:noFill/>
-          <a:extLst>
-            <a:ext uri="{909E8E84-426E-40DD-AFC4-6F175D3DCCD1}">
-              <a14:hiddenFill xmlns:a14="http://schemas.microsoft.com/office/drawing/2010/main">
-                <a:solidFill>
-                  <a:srgbClr val="FFFFFF"/>
-                </a:solidFill>
-              </a14:hiddenFill>
-            </a:ext>
-          </a:extLst>
-        </p:spPr>
-      </p:pic>
-      <p:cxnSp>
-        <p:nvCxnSpPr>
-          <p:cNvPr id="43" name="直線矢印コネクタ 42">
-            <a:extLst>
-              <a:ext uri="{FF2B5EF4-FFF2-40B4-BE49-F238E27FC236}">
-                <a16:creationId xmlns:a16="http://schemas.microsoft.com/office/drawing/2014/main" id="{4ED3C703-CDC9-4077-9CE8-80CB0BE692C1}"/>
-              </a:ext>
-            </a:extLst>
-          </p:cNvPr>
-          <p:cNvCxnSpPr>
-            <a:cxnSpLocks/>
-            <a:stCxn id="40" idx="1"/>
-            <a:endCxn id="36" idx="3"/>
-          </p:cNvCxnSpPr>
-          <p:nvPr/>
-        </p:nvCxnSpPr>
-        <p:spPr>
-          <a:xfrm flipH="1">
-            <a:off x="6786246" y="5451187"/>
-            <a:ext cx="594066" cy="0"/>
-          </a:xfrm>
-          <a:prstGeom prst="straightConnector1">
-            <a:avLst/>
-          </a:prstGeom>
-          <a:ln>
-            <a:solidFill>
-              <a:schemeClr val="tx1"/>
-            </a:solidFill>
-            <a:headEnd type="none" w="med" len="med"/>
-            <a:tailEnd type="none" w="med" len="med"/>
-          </a:ln>
-        </p:spPr>
-        <p:style>
-          <a:lnRef idx="1">
-            <a:schemeClr val="accent1"/>
-          </a:lnRef>
-          <a:fillRef idx="0">
-            <a:schemeClr val="accent1"/>
-          </a:fillRef>
-          <a:effectRef idx="0">
-            <a:schemeClr val="accent1"/>
-          </a:effectRef>
-          <a:fontRef idx="minor">
-            <a:schemeClr val="tx1"/>
-          </a:fontRef>
-        </p:style>
-      </p:cxnSp>
     </p:spTree>
     <p:extLst>
       <p:ext uri="{BB962C8B-B14F-4D97-AF65-F5344CB8AC3E}">
-        <p14:creationId xmlns:p14="http://schemas.microsoft.com/office/powerpoint/2010/main" val="555618142"/>
+        <p14:creationId xmlns:p14="http://schemas.microsoft.com/office/powerpoint/2010/main" val="2758065531"/>
       </p:ext>
     </p:extLst>
   </p:cSld>
@@ -21340,42 +20457,12 @@
           <a:chExt cx="0" cy="0"/>
         </a:xfrm>
       </p:grpSpPr>
-      <p:pic>
-        <p:nvPicPr>
-          <p:cNvPr id="4" name="図 3">
-            <a:extLst>
-              <a:ext uri="{FF2B5EF4-FFF2-40B4-BE49-F238E27FC236}">
-                <a16:creationId xmlns:a16="http://schemas.microsoft.com/office/drawing/2014/main" id="{BA80F7C2-D7F5-E5E9-4E32-C714966A19CE}"/>
-              </a:ext>
-            </a:extLst>
-          </p:cNvPr>
-          <p:cNvPicPr>
-            <a:picLocks noChangeAspect="1"/>
-          </p:cNvPicPr>
-          <p:nvPr/>
-        </p:nvPicPr>
-        <p:blipFill>
-          <a:blip r:embed="rId2"/>
-          <a:stretch>
-            <a:fillRect/>
-          </a:stretch>
-        </p:blipFill>
-        <p:spPr>
-          <a:xfrm>
-            <a:off x="683568" y="2132856"/>
-            <a:ext cx="6889077" cy="2697714"/>
-          </a:xfrm>
-          <a:prstGeom prst="rect">
-            <a:avLst/>
-          </a:prstGeom>
-        </p:spPr>
-      </p:pic>
       <p:sp>
         <p:nvSpPr>
           <p:cNvPr id="2" name="テキスト プレースホルダー 1">
             <a:extLst>
               <a:ext uri="{FF2B5EF4-FFF2-40B4-BE49-F238E27FC236}">
-                <a16:creationId xmlns:a16="http://schemas.microsoft.com/office/drawing/2014/main" id="{0BE38C31-5AF7-9060-7714-867B2AC1D853}"/>
+                <a16:creationId xmlns:a16="http://schemas.microsoft.com/office/drawing/2014/main" id="{0C9FC35D-439B-4D2A-B2EE-13619F77BB1E}"/>
               </a:ext>
             </a:extLst>
           </p:cNvPr>
@@ -21409,10 +20496,10 @@
       </p:sp>
       <p:sp>
         <p:nvSpPr>
-          <p:cNvPr id="6" name="テキスト ボックス 5">
-            <a:extLst>
-              <a:ext uri="{FF2B5EF4-FFF2-40B4-BE49-F238E27FC236}">
-                <a16:creationId xmlns:a16="http://schemas.microsoft.com/office/drawing/2014/main" id="{1F0F3026-5B00-F671-A05D-C8EDF01A17CC}"/>
+          <p:cNvPr id="3" name="テキスト ボックス 2">
+            <a:extLst>
+              <a:ext uri="{FF2B5EF4-FFF2-40B4-BE49-F238E27FC236}">
+                <a16:creationId xmlns:a16="http://schemas.microsoft.com/office/drawing/2014/main" id="{A0A020DB-1700-43A1-8863-48DD090945C5}"/>
               </a:ext>
             </a:extLst>
           </p:cNvPr>
@@ -21421,13 +20508,18 @@
         </p:nvSpPr>
         <p:spPr>
           <a:xfrm>
-            <a:off x="179512" y="980728"/>
-            <a:ext cx="7994496" cy="646331"/>
+            <a:off x="539552" y="2060848"/>
+            <a:ext cx="1877437" cy="1015663"/>
           </a:xfrm>
           <a:prstGeom prst="rect">
             <a:avLst/>
           </a:prstGeom>
           <a:noFill/>
+          <a:ln>
+            <a:solidFill>
+              <a:schemeClr val="tx1"/>
+            </a:solidFill>
+          </a:ln>
         </p:spPr>
         <p:txBody>
           <a:bodyPr wrap="none" rtlCol="0">
@@ -21436,80 +20528,295 @@
           <a:lstStyle/>
           <a:p>
             <a:r>
-              <a:rPr lang="en-US" altLang="ja-JP" dirty="0"/>
-              <a:t>Git</a:t>
-            </a:r>
-            <a:r>
-              <a:rPr lang="ja-JP" altLang="en-US" dirty="0"/>
+              <a:rPr kumimoji="1" lang="en-US" altLang="ja-JP" sz="2000" dirty="0">
+                <a:latin typeface="Consolas" panose="020B0609020204030204" pitchFamily="49" charset="0"/>
+              </a:rPr>
+              <a:t>cd</a:t>
+            </a:r>
+          </a:p>
+          <a:p>
+            <a:r>
+              <a:rPr kumimoji="1" lang="en-US" altLang="ja-JP" sz="2000" dirty="0" err="1">
+                <a:latin typeface="Consolas" panose="020B0609020204030204" pitchFamily="49" charset="0"/>
+              </a:rPr>
+              <a:t>mkdir</a:t>
+            </a:r>
+            <a:r>
+              <a:rPr kumimoji="1" lang="en-US" altLang="ja-JP" sz="2000" dirty="0">
+                <a:latin typeface="Consolas" panose="020B0609020204030204" pitchFamily="49" charset="0"/>
+              </a:rPr>
               <a:t> </a:t>
             </a:r>
             <a:r>
-              <a:rPr lang="en-US" altLang="ja-JP" dirty="0"/>
-              <a:t>Bash</a:t>
-            </a:r>
-            <a:r>
-              <a:rPr lang="ja-JP" altLang="en-US" dirty="0"/>
-              <a:t>を開いた直後は「ホームディレクトリ」がカレントディレクトリに</a:t>
-            </a:r>
-            <a:endParaRPr lang="en-US" altLang="ja-JP" dirty="0"/>
-          </a:p>
-          <a:p>
-            <a:r>
-              <a:rPr kumimoji="1" lang="ja-JP" altLang="en-US" dirty="0"/>
-              <a:t>なっている </a:t>
-            </a:r>
-            <a:r>
-              <a:rPr kumimoji="1" lang="en-US" altLang="ja-JP" dirty="0"/>
-              <a:t>(PC</a:t>
-            </a:r>
-            <a:r>
-              <a:rPr kumimoji="1" lang="ja-JP" altLang="en-US" dirty="0"/>
-              <a:t>室の環境では</a:t>
-            </a:r>
-            <a:r>
-              <a:rPr kumimoji="1" lang="en-US" altLang="ja-JP" dirty="0"/>
-              <a:t>/z/</a:t>
-            </a:r>
-            <a:r>
-              <a:rPr kumimoji="1" lang="ja-JP" altLang="en-US" dirty="0"/>
-              <a:t>になっているはず</a:t>
-            </a:r>
-            <a:r>
-              <a:rPr kumimoji="1" lang="en-US" altLang="ja-JP" dirty="0"/>
-              <a:t>)</a:t>
+              <a:rPr kumimoji="1" lang="en-US" altLang="ja-JP" sz="2000" dirty="0" err="1">
+                <a:latin typeface="Consolas" panose="020B0609020204030204" pitchFamily="49" charset="0"/>
+              </a:rPr>
+              <a:t>github</a:t>
+            </a:r>
+            <a:endParaRPr lang="en-US" altLang="ja-JP" sz="2000" dirty="0">
+              <a:latin typeface="Consolas" panose="020B0609020204030204" pitchFamily="49" charset="0"/>
+            </a:endParaRPr>
+          </a:p>
+          <a:p>
+            <a:r>
+              <a:rPr kumimoji="1" lang="en-US" altLang="ja-JP" sz="2000" dirty="0">
+                <a:latin typeface="Consolas" panose="020B0609020204030204" pitchFamily="49" charset="0"/>
+              </a:rPr>
+              <a:t>cd </a:t>
+            </a:r>
+            <a:r>
+              <a:rPr kumimoji="1" lang="en-US" altLang="ja-JP" sz="2000" dirty="0" err="1">
+                <a:latin typeface="Consolas" panose="020B0609020204030204" pitchFamily="49" charset="0"/>
+              </a:rPr>
+              <a:t>github</a:t>
+            </a:r>
+            <a:endParaRPr kumimoji="1" lang="en-US" altLang="ja-JP" sz="2000" dirty="0">
+              <a:latin typeface="Consolas" panose="020B0609020204030204" pitchFamily="49" charset="0"/>
+            </a:endParaRPr>
+          </a:p>
+        </p:txBody>
+      </p:sp>
+      <p:sp>
+        <p:nvSpPr>
+          <p:cNvPr id="28" name="テキスト ボックス 27">
+            <a:extLst>
+              <a:ext uri="{FF2B5EF4-FFF2-40B4-BE49-F238E27FC236}">
+                <a16:creationId xmlns:a16="http://schemas.microsoft.com/office/drawing/2014/main" id="{C84F612B-D17C-4823-82D6-614DAD7219EE}"/>
+              </a:ext>
+            </a:extLst>
+          </p:cNvPr>
+          <p:cNvSpPr txBox="1"/>
+          <p:nvPr/>
+        </p:nvSpPr>
+        <p:spPr>
+          <a:xfrm>
+            <a:off x="251520" y="1268760"/>
+            <a:ext cx="2954655" cy="461665"/>
+          </a:xfrm>
+          <a:prstGeom prst="rect">
+            <a:avLst/>
+          </a:prstGeom>
+          <a:noFill/>
+        </p:spPr>
+        <p:txBody>
+          <a:bodyPr wrap="none" rtlCol="0">
+            <a:spAutoFit/>
+          </a:bodyPr>
+          <a:lstStyle/>
+          <a:p>
+            <a:r>
+              <a:rPr kumimoji="1" lang="ja-JP" altLang="en-US" sz="2400" dirty="0"/>
+              <a:t>ディレクトリの作成</a:t>
+            </a:r>
+          </a:p>
+        </p:txBody>
+      </p:sp>
+      <p:pic>
+        <p:nvPicPr>
+          <p:cNvPr id="21" name="Picture 2" descr="フォルダのイラスト">
+            <a:extLst>
+              <a:ext uri="{FF2B5EF4-FFF2-40B4-BE49-F238E27FC236}">
+                <a16:creationId xmlns:a16="http://schemas.microsoft.com/office/drawing/2014/main" id="{D5FB3222-65A1-4AA0-92CE-1B2E62674565}"/>
+              </a:ext>
+            </a:extLst>
+          </p:cNvPr>
+          <p:cNvPicPr>
+            <a:picLocks noChangeAspect="1" noChangeArrowheads="1"/>
+          </p:cNvPicPr>
+          <p:nvPr/>
+        </p:nvPicPr>
+        <p:blipFill>
+          <a:blip r:embed="rId2" cstate="print">
+            <a:extLst>
+              <a:ext uri="{28A0092B-C50C-407E-A947-70E740481C1C}">
+                <a14:useLocalDpi xmlns:a14="http://schemas.microsoft.com/office/drawing/2010/main" val="0"/>
+              </a:ext>
+            </a:extLst>
+          </a:blip>
+          <a:srcRect/>
+          <a:stretch>
+            <a:fillRect/>
+          </a:stretch>
+        </p:blipFill>
+        <p:spPr bwMode="auto">
+          <a:xfrm>
+            <a:off x="4860032" y="2132856"/>
+            <a:ext cx="702078" cy="587990"/>
+          </a:xfrm>
+          <a:prstGeom prst="rect">
+            <a:avLst/>
+          </a:prstGeom>
+          <a:noFill/>
+          <a:extLst>
+            <a:ext uri="{909E8E84-426E-40DD-AFC4-6F175D3DCCD1}">
+              <a14:hiddenFill xmlns:a14="http://schemas.microsoft.com/office/drawing/2010/main">
+                <a:solidFill>
+                  <a:srgbClr val="FFFFFF"/>
+                </a:solidFill>
+              </a14:hiddenFill>
+            </a:ext>
+          </a:extLst>
+        </p:spPr>
+      </p:pic>
+      <p:pic>
+        <p:nvPicPr>
+          <p:cNvPr id="22" name="Picture 2" descr="フォルダのイラスト">
+            <a:extLst>
+              <a:ext uri="{FF2B5EF4-FFF2-40B4-BE49-F238E27FC236}">
+                <a16:creationId xmlns:a16="http://schemas.microsoft.com/office/drawing/2014/main" id="{4CED145E-4633-4BC9-95C9-3724E4BE8C9A}"/>
+              </a:ext>
+            </a:extLst>
+          </p:cNvPr>
+          <p:cNvPicPr>
+            <a:picLocks noChangeAspect="1" noChangeArrowheads="1"/>
+          </p:cNvPicPr>
+          <p:nvPr/>
+        </p:nvPicPr>
+        <p:blipFill>
+          <a:blip r:embed="rId2" cstate="print">
+            <a:extLst>
+              <a:ext uri="{28A0092B-C50C-407E-A947-70E740481C1C}">
+                <a14:useLocalDpi xmlns:a14="http://schemas.microsoft.com/office/drawing/2010/main" val="0"/>
+              </a:ext>
+            </a:extLst>
+          </a:blip>
+          <a:srcRect/>
+          <a:stretch>
+            <a:fillRect/>
+          </a:stretch>
+        </p:blipFill>
+        <p:spPr bwMode="auto">
+          <a:xfrm>
+            <a:off x="6084168" y="2132856"/>
+            <a:ext cx="702078" cy="587990"/>
+          </a:xfrm>
+          <a:prstGeom prst="rect">
+            <a:avLst/>
+          </a:prstGeom>
+          <a:noFill/>
+          <a:extLst>
+            <a:ext uri="{909E8E84-426E-40DD-AFC4-6F175D3DCCD1}">
+              <a14:hiddenFill xmlns:a14="http://schemas.microsoft.com/office/drawing/2010/main">
+                <a:solidFill>
+                  <a:srgbClr val="FFFFFF"/>
+                </a:solidFill>
+              </a14:hiddenFill>
+            </a:ext>
+          </a:extLst>
+        </p:spPr>
+      </p:pic>
+      <p:sp>
+        <p:nvSpPr>
+          <p:cNvPr id="25" name="テキスト ボックス 24">
+            <a:extLst>
+              <a:ext uri="{FF2B5EF4-FFF2-40B4-BE49-F238E27FC236}">
+                <a16:creationId xmlns:a16="http://schemas.microsoft.com/office/drawing/2014/main" id="{AE57AF4C-CBE6-45D0-A78B-1479F523196D}"/>
+              </a:ext>
+            </a:extLst>
+          </p:cNvPr>
+          <p:cNvSpPr txBox="1"/>
+          <p:nvPr/>
+        </p:nvSpPr>
+        <p:spPr>
+          <a:xfrm>
+            <a:off x="6012160" y="2564904"/>
+            <a:ext cx="813043" cy="369332"/>
+          </a:xfrm>
+          <a:prstGeom prst="rect">
+            <a:avLst/>
+          </a:prstGeom>
+          <a:noFill/>
+        </p:spPr>
+        <p:txBody>
+          <a:bodyPr wrap="none" rtlCol="0">
+            <a:spAutoFit/>
+          </a:bodyPr>
+          <a:lstStyle/>
+          <a:p>
+            <a:r>
+              <a:rPr kumimoji="1" lang="en-US" altLang="ja-JP" dirty="0" err="1"/>
+              <a:t>github</a:t>
             </a:r>
             <a:endParaRPr kumimoji="1" lang="ja-JP" altLang="en-US" dirty="0"/>
           </a:p>
         </p:txBody>
       </p:sp>
+      <p:pic>
+        <p:nvPicPr>
+          <p:cNvPr id="27" name="Picture 2" descr="家のイラスト7">
+            <a:extLst>
+              <a:ext uri="{FF2B5EF4-FFF2-40B4-BE49-F238E27FC236}">
+                <a16:creationId xmlns:a16="http://schemas.microsoft.com/office/drawing/2014/main" id="{8EFC7E64-0F23-4A38-8F9E-D9C772BBEFBD}"/>
+              </a:ext>
+            </a:extLst>
+          </p:cNvPr>
+          <p:cNvPicPr>
+            <a:picLocks noChangeAspect="1" noChangeArrowheads="1"/>
+          </p:cNvPicPr>
+          <p:nvPr/>
+        </p:nvPicPr>
+        <p:blipFill>
+          <a:blip r:embed="rId3" cstate="print">
+            <a:extLst>
+              <a:ext uri="{28A0092B-C50C-407E-A947-70E740481C1C}">
+                <a14:useLocalDpi xmlns:a14="http://schemas.microsoft.com/office/drawing/2010/main" val="0"/>
+              </a:ext>
+            </a:extLst>
+          </a:blip>
+          <a:srcRect/>
+          <a:stretch>
+            <a:fillRect/>
+          </a:stretch>
+        </p:blipFill>
+        <p:spPr bwMode="auto">
+          <a:xfrm>
+            <a:off x="5004048" y="2276872"/>
+            <a:ext cx="360040" cy="336637"/>
+          </a:xfrm>
+          <a:prstGeom prst="rect">
+            <a:avLst/>
+          </a:prstGeom>
+          <a:noFill/>
+          <a:extLst>
+            <a:ext uri="{909E8E84-426E-40DD-AFC4-6F175D3DCCD1}">
+              <a14:hiddenFill xmlns:a14="http://schemas.microsoft.com/office/drawing/2010/main">
+                <a:solidFill>
+                  <a:srgbClr val="FFFFFF"/>
+                </a:solidFill>
+              </a14:hiddenFill>
+            </a:ext>
+          </a:extLst>
+        </p:spPr>
+      </p:pic>
       <p:cxnSp>
         <p:nvCxnSpPr>
-          <p:cNvPr id="7" name="コネクタ: カギ線 6">
-            <a:extLst>
-              <a:ext uri="{FF2B5EF4-FFF2-40B4-BE49-F238E27FC236}">
-                <a16:creationId xmlns:a16="http://schemas.microsoft.com/office/drawing/2014/main" id="{247A3DFB-B8D4-F0C0-ECAF-EBE1A392AD7D}"/>
+          <p:cNvPr id="29" name="直線矢印コネクタ 28">
+            <a:extLst>
+              <a:ext uri="{FF2B5EF4-FFF2-40B4-BE49-F238E27FC236}">
+                <a16:creationId xmlns:a16="http://schemas.microsoft.com/office/drawing/2014/main" id="{66AA4814-C6FC-4E61-B1A5-67434C00CB5C}"/>
               </a:ext>
             </a:extLst>
           </p:cNvPr>
           <p:cNvCxnSpPr>
-            <a:stCxn id="6" idx="2"/>
+            <a:stCxn id="21" idx="3"/>
+            <a:endCxn id="22" idx="1"/>
           </p:cNvCxnSpPr>
           <p:nvPr/>
         </p:nvCxnSpPr>
         <p:spPr>
-          <a:xfrm rot="16200000" flipH="1">
-            <a:off x="4645214" y="1158605"/>
-            <a:ext cx="504056" cy="1440964"/>
-          </a:xfrm>
-          <a:prstGeom prst="bentConnector3">
-            <a:avLst/>
-          </a:prstGeom>
-          <a:ln w="19050">
+          <a:xfrm>
+            <a:off x="5562110" y="2426851"/>
+            <a:ext cx="522058" cy="0"/>
+          </a:xfrm>
+          <a:prstGeom prst="straightConnector1">
+            <a:avLst/>
+          </a:prstGeom>
+          <a:ln>
             <a:solidFill>
-              <a:srgbClr val="FF0000"/>
+              <a:schemeClr val="tx1"/>
             </a:solidFill>
             <a:headEnd type="none" w="med" len="med"/>
-            <a:tailEnd type="triangle"/>
+            <a:tailEnd type="none" w="med" len="med"/>
           </a:ln>
         </p:spPr>
         <p:style>
@@ -21529,62 +20836,10 @@
       </p:cxnSp>
       <p:sp>
         <p:nvSpPr>
-          <p:cNvPr id="8" name="四角形: 角を丸くする 7">
-            <a:extLst>
-              <a:ext uri="{FF2B5EF4-FFF2-40B4-BE49-F238E27FC236}">
-                <a16:creationId xmlns:a16="http://schemas.microsoft.com/office/drawing/2014/main" id="{DB4EC1DF-A5FC-B228-C4F9-78F6422E8053}"/>
-              </a:ext>
-            </a:extLst>
-          </p:cNvPr>
-          <p:cNvSpPr/>
-          <p:nvPr/>
-        </p:nvSpPr>
-        <p:spPr>
-          <a:xfrm>
-            <a:off x="5364088" y="2132856"/>
-            <a:ext cx="504056" cy="360040"/>
-          </a:xfrm>
-          <a:prstGeom prst="roundRect">
-            <a:avLst/>
-          </a:prstGeom>
-          <a:noFill/>
-          <a:ln w="19050">
-            <a:solidFill>
-              <a:srgbClr val="FF0000"/>
-            </a:solidFill>
-          </a:ln>
-        </p:spPr>
-        <p:style>
-          <a:lnRef idx="2">
-            <a:schemeClr val="accent1">
-              <a:shade val="50000"/>
-            </a:schemeClr>
-          </a:lnRef>
-          <a:fillRef idx="1">
-            <a:schemeClr val="accent1"/>
-          </a:fillRef>
-          <a:effectRef idx="0">
-            <a:schemeClr val="accent1"/>
-          </a:effectRef>
-          <a:fontRef idx="minor">
-            <a:schemeClr val="lt1"/>
-          </a:fontRef>
-        </p:style>
-        <p:txBody>
-          <a:bodyPr rtlCol="0" anchor="ctr"/>
-          <a:lstStyle/>
-          <a:p>
-            <a:pPr algn="ctr"/>
-            <a:endParaRPr kumimoji="1" lang="ja-JP" altLang="en-US"/>
-          </a:p>
-        </p:txBody>
-      </p:sp>
-      <p:sp>
-        <p:nvSpPr>
-          <p:cNvPr id="10" name="テキスト ボックス 9">
-            <a:extLst>
-              <a:ext uri="{FF2B5EF4-FFF2-40B4-BE49-F238E27FC236}">
-                <a16:creationId xmlns:a16="http://schemas.microsoft.com/office/drawing/2014/main" id="{4676A922-5056-6ACA-5064-1E622CD11C9C}"/>
+          <p:cNvPr id="30" name="テキスト ボックス 29">
+            <a:extLst>
+              <a:ext uri="{FF2B5EF4-FFF2-40B4-BE49-F238E27FC236}">
+                <a16:creationId xmlns:a16="http://schemas.microsoft.com/office/drawing/2014/main" id="{3251D9D3-D373-49CD-B56F-E1FD520CBD51}"/>
               </a:ext>
             </a:extLst>
           </p:cNvPr>
@@ -21593,15 +20848,13 @@
         </p:nvSpPr>
         <p:spPr>
           <a:xfrm>
-            <a:off x="3563888" y="2492896"/>
-            <a:ext cx="2262158" cy="369332"/>
+            <a:off x="755576" y="3284984"/>
+            <a:ext cx="4121641" cy="646331"/>
           </a:xfrm>
           <a:prstGeom prst="rect">
             <a:avLst/>
           </a:prstGeom>
-          <a:solidFill>
-            <a:schemeClr val="bg1"/>
-          </a:solidFill>
+          <a:noFill/>
         </p:spPr>
         <p:txBody>
           <a:bodyPr wrap="none" rtlCol="0">
@@ -21610,40 +20863,438 @@
           <a:lstStyle/>
           <a:p>
             <a:r>
+              <a:rPr lang="ja-JP" altLang="en-US" dirty="0"/>
+              <a:t>ホームディレクトリに移動してから</a:t>
+            </a:r>
+            <a:endParaRPr lang="en-US" altLang="ja-JP" dirty="0"/>
+          </a:p>
+          <a:p>
+            <a:r>
+              <a:rPr kumimoji="1" lang="en-US" altLang="ja-JP" dirty="0"/>
+              <a:t>git</a:t>
+            </a:r>
+            <a:r>
               <a:rPr kumimoji="1" lang="ja-JP" altLang="en-US" dirty="0"/>
-              <a:t>ディレクトリを作成</a:t>
-            </a:r>
-          </a:p>
-        </p:txBody>
-      </p:sp>
+              <a:t>ディレクトリ</a:t>
+            </a:r>
+            <a:r>
+              <a:rPr kumimoji="1" lang="ja-JP" altLang="en-US"/>
+              <a:t>を作成</a:t>
+            </a:r>
+            <a:r>
+              <a:rPr lang="ja-JP" altLang="en-US"/>
+              <a:t>し、そこへ移動</a:t>
+            </a:r>
+            <a:endParaRPr kumimoji="1" lang="ja-JP" altLang="en-US" dirty="0"/>
+          </a:p>
+        </p:txBody>
+      </p:sp>
+      <p:pic>
+        <p:nvPicPr>
+          <p:cNvPr id="31" name="Picture 2" descr="手を上げている男の子のイラスト">
+            <a:extLst>
+              <a:ext uri="{FF2B5EF4-FFF2-40B4-BE49-F238E27FC236}">
+                <a16:creationId xmlns:a16="http://schemas.microsoft.com/office/drawing/2014/main" id="{1A3E7FD9-5330-4433-B2DC-09F1621EABF7}"/>
+              </a:ext>
+            </a:extLst>
+          </p:cNvPr>
+          <p:cNvPicPr>
+            <a:picLocks noChangeAspect="1" noChangeArrowheads="1"/>
+          </p:cNvPicPr>
+          <p:nvPr/>
+        </p:nvPicPr>
+        <p:blipFill>
+          <a:blip r:embed="rId4" cstate="print">
+            <a:extLst>
+              <a:ext uri="{28A0092B-C50C-407E-A947-70E740481C1C}">
+                <a14:useLocalDpi xmlns:a14="http://schemas.microsoft.com/office/drawing/2010/main" val="0"/>
+              </a:ext>
+            </a:extLst>
+          </a:blip>
+          <a:srcRect/>
+          <a:stretch>
+            <a:fillRect/>
+          </a:stretch>
+        </p:blipFill>
+        <p:spPr bwMode="auto">
+          <a:xfrm>
+            <a:off x="6237012" y="1484784"/>
+            <a:ext cx="385188" cy="536848"/>
+          </a:xfrm>
+          <a:prstGeom prst="rect">
+            <a:avLst/>
+          </a:prstGeom>
+          <a:noFill/>
+          <a:extLst>
+            <a:ext uri="{909E8E84-426E-40DD-AFC4-6F175D3DCCD1}">
+              <a14:hiddenFill xmlns:a14="http://schemas.microsoft.com/office/drawing/2010/main">
+                <a:solidFill>
+                  <a:srgbClr val="FFFFFF"/>
+                </a:solidFill>
+              </a14:hiddenFill>
+            </a:ext>
+          </a:extLst>
+        </p:spPr>
+      </p:pic>
+      <p:sp>
+        <p:nvSpPr>
+          <p:cNvPr id="32" name="テキスト ボックス 31">
+            <a:extLst>
+              <a:ext uri="{FF2B5EF4-FFF2-40B4-BE49-F238E27FC236}">
+                <a16:creationId xmlns:a16="http://schemas.microsoft.com/office/drawing/2014/main" id="{362DFEEA-286C-496A-9AF0-12927DFD9C26}"/>
+              </a:ext>
+            </a:extLst>
+          </p:cNvPr>
+          <p:cNvSpPr txBox="1"/>
+          <p:nvPr/>
+        </p:nvSpPr>
+        <p:spPr>
+          <a:xfrm>
+            <a:off x="6732240" y="1556792"/>
+            <a:ext cx="1569660" cy="646331"/>
+          </a:xfrm>
+          <a:prstGeom prst="rect">
+            <a:avLst/>
+          </a:prstGeom>
+          <a:noFill/>
+        </p:spPr>
+        <p:txBody>
+          <a:bodyPr wrap="none" rtlCol="0">
+            <a:spAutoFit/>
+          </a:bodyPr>
+          <a:lstStyle/>
+          <a:p>
+            <a:r>
+              <a:rPr lang="ja-JP" altLang="en-US" dirty="0"/>
+              <a:t>カレント</a:t>
+            </a:r>
+            <a:endParaRPr lang="en-US" altLang="ja-JP" dirty="0"/>
+          </a:p>
+          <a:p>
+            <a:r>
+              <a:rPr lang="ja-JP" altLang="en-US" dirty="0"/>
+              <a:t>ディレクトリ</a:t>
+            </a:r>
+            <a:endParaRPr kumimoji="1" lang="ja-JP" altLang="en-US" dirty="0"/>
+          </a:p>
+        </p:txBody>
+      </p:sp>
+      <p:sp>
+        <p:nvSpPr>
+          <p:cNvPr id="33" name="テキスト ボックス 32">
+            <a:extLst>
+              <a:ext uri="{FF2B5EF4-FFF2-40B4-BE49-F238E27FC236}">
+                <a16:creationId xmlns:a16="http://schemas.microsoft.com/office/drawing/2014/main" id="{301D5A89-DD8F-4621-9496-D65A0CAE355D}"/>
+              </a:ext>
+            </a:extLst>
+          </p:cNvPr>
+          <p:cNvSpPr txBox="1"/>
+          <p:nvPr/>
+        </p:nvSpPr>
+        <p:spPr>
+          <a:xfrm>
+            <a:off x="539552" y="4509120"/>
+            <a:ext cx="1595309" cy="707886"/>
+          </a:xfrm>
+          <a:prstGeom prst="rect">
+            <a:avLst/>
+          </a:prstGeom>
+          <a:noFill/>
+          <a:ln>
+            <a:solidFill>
+              <a:schemeClr val="tx1"/>
+            </a:solidFill>
+          </a:ln>
+        </p:spPr>
+        <p:txBody>
+          <a:bodyPr wrap="none" rtlCol="0">
+            <a:spAutoFit/>
+          </a:bodyPr>
+          <a:lstStyle/>
+          <a:p>
+            <a:r>
+              <a:rPr kumimoji="1" lang="en-US" altLang="ja-JP" sz="2000" dirty="0" err="1">
+                <a:latin typeface="Consolas" panose="020B0609020204030204" pitchFamily="49" charset="0"/>
+              </a:rPr>
+              <a:t>mkdir</a:t>
+            </a:r>
+            <a:r>
+              <a:rPr kumimoji="1" lang="en-US" altLang="ja-JP" sz="2000" dirty="0">
+                <a:latin typeface="Consolas" panose="020B0609020204030204" pitchFamily="49" charset="0"/>
+              </a:rPr>
+              <a:t> test</a:t>
+            </a:r>
+          </a:p>
+          <a:p>
+            <a:r>
+              <a:rPr kumimoji="1" lang="en-US" altLang="ja-JP" sz="2000" dirty="0">
+                <a:latin typeface="Consolas" panose="020B0609020204030204" pitchFamily="49" charset="0"/>
+              </a:rPr>
+              <a:t>cd test</a:t>
+            </a:r>
+            <a:endParaRPr kumimoji="1" lang="ja-JP" altLang="en-US" sz="2000" dirty="0">
+              <a:latin typeface="Consolas" panose="020B0609020204030204" pitchFamily="49" charset="0"/>
+            </a:endParaRPr>
+          </a:p>
+        </p:txBody>
+      </p:sp>
+      <p:sp>
+        <p:nvSpPr>
+          <p:cNvPr id="34" name="テキスト ボックス 33">
+            <a:extLst>
+              <a:ext uri="{FF2B5EF4-FFF2-40B4-BE49-F238E27FC236}">
+                <a16:creationId xmlns:a16="http://schemas.microsoft.com/office/drawing/2014/main" id="{6C57A7F4-9FAB-477B-B2AC-3399556274E9}"/>
+              </a:ext>
+            </a:extLst>
+          </p:cNvPr>
+          <p:cNvSpPr txBox="1"/>
+          <p:nvPr/>
+        </p:nvSpPr>
+        <p:spPr>
+          <a:xfrm>
+            <a:off x="755576" y="5373216"/>
+            <a:ext cx="3788217" cy="646331"/>
+          </a:xfrm>
+          <a:prstGeom prst="rect">
+            <a:avLst/>
+          </a:prstGeom>
+          <a:noFill/>
+        </p:spPr>
+        <p:txBody>
+          <a:bodyPr wrap="none" rtlCol="0">
+            <a:spAutoFit/>
+          </a:bodyPr>
+          <a:lstStyle/>
+          <a:p>
+            <a:r>
+              <a:rPr kumimoji="1" lang="ja-JP" altLang="en-US" dirty="0"/>
+              <a:t>さらに</a:t>
+            </a:r>
+            <a:r>
+              <a:rPr kumimoji="1" lang="en-US" altLang="ja-JP" dirty="0"/>
+              <a:t>test</a:t>
+            </a:r>
+            <a:r>
+              <a:rPr kumimoji="1" lang="ja-JP" altLang="en-US" dirty="0"/>
+              <a:t>ディレクトリを作成して</a:t>
+            </a:r>
+            <a:endParaRPr kumimoji="1" lang="en-US" altLang="ja-JP" dirty="0"/>
+          </a:p>
+          <a:p>
+            <a:r>
+              <a:rPr lang="ja-JP" altLang="en-US" dirty="0"/>
+              <a:t>そこへ移動</a:t>
+            </a:r>
+            <a:endParaRPr kumimoji="1" lang="ja-JP" altLang="en-US" dirty="0"/>
+          </a:p>
+        </p:txBody>
+      </p:sp>
+      <p:pic>
+        <p:nvPicPr>
+          <p:cNvPr id="35" name="Picture 2" descr="フォルダのイラスト">
+            <a:extLst>
+              <a:ext uri="{FF2B5EF4-FFF2-40B4-BE49-F238E27FC236}">
+                <a16:creationId xmlns:a16="http://schemas.microsoft.com/office/drawing/2014/main" id="{BF168D21-995B-4069-A814-84BD3BF10379}"/>
+              </a:ext>
+            </a:extLst>
+          </p:cNvPr>
+          <p:cNvPicPr>
+            <a:picLocks noChangeAspect="1" noChangeArrowheads="1"/>
+          </p:cNvPicPr>
+          <p:nvPr/>
+        </p:nvPicPr>
+        <p:blipFill>
+          <a:blip r:embed="rId2" cstate="print">
+            <a:extLst>
+              <a:ext uri="{28A0092B-C50C-407E-A947-70E740481C1C}">
+                <a14:useLocalDpi xmlns:a14="http://schemas.microsoft.com/office/drawing/2010/main" val="0"/>
+              </a:ext>
+            </a:extLst>
+          </a:blip>
+          <a:srcRect/>
+          <a:stretch>
+            <a:fillRect/>
+          </a:stretch>
+        </p:blipFill>
+        <p:spPr bwMode="auto">
+          <a:xfrm>
+            <a:off x="4860032" y="5157192"/>
+            <a:ext cx="702078" cy="587990"/>
+          </a:xfrm>
+          <a:prstGeom prst="rect">
+            <a:avLst/>
+          </a:prstGeom>
+          <a:noFill/>
+          <a:extLst>
+            <a:ext uri="{909E8E84-426E-40DD-AFC4-6F175D3DCCD1}">
+              <a14:hiddenFill xmlns:a14="http://schemas.microsoft.com/office/drawing/2010/main">
+                <a:solidFill>
+                  <a:srgbClr val="FFFFFF"/>
+                </a:solidFill>
+              </a14:hiddenFill>
+            </a:ext>
+          </a:extLst>
+        </p:spPr>
+      </p:pic>
+      <p:pic>
+        <p:nvPicPr>
+          <p:cNvPr id="36" name="Picture 2" descr="フォルダのイラスト">
+            <a:extLst>
+              <a:ext uri="{FF2B5EF4-FFF2-40B4-BE49-F238E27FC236}">
+                <a16:creationId xmlns:a16="http://schemas.microsoft.com/office/drawing/2014/main" id="{F5D3659D-A854-45A2-BA9D-4F4D2CE423DA}"/>
+              </a:ext>
+            </a:extLst>
+          </p:cNvPr>
+          <p:cNvPicPr>
+            <a:picLocks noChangeAspect="1" noChangeArrowheads="1"/>
+          </p:cNvPicPr>
+          <p:nvPr/>
+        </p:nvPicPr>
+        <p:blipFill>
+          <a:blip r:embed="rId2" cstate="print">
+            <a:extLst>
+              <a:ext uri="{28A0092B-C50C-407E-A947-70E740481C1C}">
+                <a14:useLocalDpi xmlns:a14="http://schemas.microsoft.com/office/drawing/2010/main" val="0"/>
+              </a:ext>
+            </a:extLst>
+          </a:blip>
+          <a:srcRect/>
+          <a:stretch>
+            <a:fillRect/>
+          </a:stretch>
+        </p:blipFill>
+        <p:spPr bwMode="auto">
+          <a:xfrm>
+            <a:off x="6084168" y="5157192"/>
+            <a:ext cx="702078" cy="587990"/>
+          </a:xfrm>
+          <a:prstGeom prst="rect">
+            <a:avLst/>
+          </a:prstGeom>
+          <a:noFill/>
+          <a:extLst>
+            <a:ext uri="{909E8E84-426E-40DD-AFC4-6F175D3DCCD1}">
+              <a14:hiddenFill xmlns:a14="http://schemas.microsoft.com/office/drawing/2010/main">
+                <a:solidFill>
+                  <a:srgbClr val="FFFFFF"/>
+                </a:solidFill>
+              </a14:hiddenFill>
+            </a:ext>
+          </a:extLst>
+        </p:spPr>
+      </p:pic>
+      <p:sp>
+        <p:nvSpPr>
+          <p:cNvPr id="37" name="テキスト ボックス 36">
+            <a:extLst>
+              <a:ext uri="{FF2B5EF4-FFF2-40B4-BE49-F238E27FC236}">
+                <a16:creationId xmlns:a16="http://schemas.microsoft.com/office/drawing/2014/main" id="{5EF9FCCA-6BFA-4E02-A703-8517A7458E3A}"/>
+              </a:ext>
+            </a:extLst>
+          </p:cNvPr>
+          <p:cNvSpPr txBox="1"/>
+          <p:nvPr/>
+        </p:nvSpPr>
+        <p:spPr>
+          <a:xfrm>
+            <a:off x="6012160" y="5589240"/>
+            <a:ext cx="813043" cy="369332"/>
+          </a:xfrm>
+          <a:prstGeom prst="rect">
+            <a:avLst/>
+          </a:prstGeom>
+          <a:noFill/>
+        </p:spPr>
+        <p:txBody>
+          <a:bodyPr wrap="none" rtlCol="0">
+            <a:spAutoFit/>
+          </a:bodyPr>
+          <a:lstStyle/>
+          <a:p>
+            <a:r>
+              <a:rPr kumimoji="1" lang="en-US" altLang="ja-JP" dirty="0" err="1"/>
+              <a:t>github</a:t>
+            </a:r>
+            <a:endParaRPr kumimoji="1" lang="ja-JP" altLang="en-US" dirty="0"/>
+          </a:p>
+        </p:txBody>
+      </p:sp>
+      <p:pic>
+        <p:nvPicPr>
+          <p:cNvPr id="38" name="Picture 2" descr="家のイラスト7">
+            <a:extLst>
+              <a:ext uri="{FF2B5EF4-FFF2-40B4-BE49-F238E27FC236}">
+                <a16:creationId xmlns:a16="http://schemas.microsoft.com/office/drawing/2014/main" id="{A7DD775C-2EF4-49AD-8BBA-CB42A18B49E7}"/>
+              </a:ext>
+            </a:extLst>
+          </p:cNvPr>
+          <p:cNvPicPr>
+            <a:picLocks noChangeAspect="1" noChangeArrowheads="1"/>
+          </p:cNvPicPr>
+          <p:nvPr/>
+        </p:nvPicPr>
+        <p:blipFill>
+          <a:blip r:embed="rId3" cstate="print">
+            <a:extLst>
+              <a:ext uri="{28A0092B-C50C-407E-A947-70E740481C1C}">
+                <a14:useLocalDpi xmlns:a14="http://schemas.microsoft.com/office/drawing/2010/main" val="0"/>
+              </a:ext>
+            </a:extLst>
+          </a:blip>
+          <a:srcRect/>
+          <a:stretch>
+            <a:fillRect/>
+          </a:stretch>
+        </p:blipFill>
+        <p:spPr bwMode="auto">
+          <a:xfrm>
+            <a:off x="5004048" y="5301208"/>
+            <a:ext cx="360040" cy="336637"/>
+          </a:xfrm>
+          <a:prstGeom prst="rect">
+            <a:avLst/>
+          </a:prstGeom>
+          <a:noFill/>
+          <a:extLst>
+            <a:ext uri="{909E8E84-426E-40DD-AFC4-6F175D3DCCD1}">
+              <a14:hiddenFill xmlns:a14="http://schemas.microsoft.com/office/drawing/2010/main">
+                <a:solidFill>
+                  <a:srgbClr val="FFFFFF"/>
+                </a:solidFill>
+              </a14:hiddenFill>
+            </a:ext>
+          </a:extLst>
+        </p:spPr>
+      </p:pic>
       <p:cxnSp>
         <p:nvCxnSpPr>
-          <p:cNvPr id="12" name="直線矢印コネクタ 11">
-            <a:extLst>
-              <a:ext uri="{FF2B5EF4-FFF2-40B4-BE49-F238E27FC236}">
-                <a16:creationId xmlns:a16="http://schemas.microsoft.com/office/drawing/2014/main" id="{2906152E-D81B-7999-9D68-B0CB580D28E5}"/>
+          <p:cNvPr id="39" name="直線矢印コネクタ 38">
+            <a:extLst>
+              <a:ext uri="{FF2B5EF4-FFF2-40B4-BE49-F238E27FC236}">
+                <a16:creationId xmlns:a16="http://schemas.microsoft.com/office/drawing/2014/main" id="{4CE213D7-D7E2-47D6-A11C-5501D1473BE3}"/>
               </a:ext>
             </a:extLst>
           </p:cNvPr>
           <p:cNvCxnSpPr>
-            <a:stCxn id="10" idx="1"/>
+            <a:stCxn id="35" idx="3"/>
+            <a:endCxn id="36" idx="1"/>
           </p:cNvCxnSpPr>
           <p:nvPr/>
         </p:nvCxnSpPr>
         <p:spPr>
-          <a:xfrm flipH="1" flipV="1">
-            <a:off x="2843808" y="2564904"/>
-            <a:ext cx="720080" cy="112658"/>
+          <a:xfrm>
+            <a:off x="5562110" y="5451187"/>
+            <a:ext cx="522058" cy="0"/>
           </a:xfrm>
           <a:prstGeom prst="straightConnector1">
             <a:avLst/>
           </a:prstGeom>
-          <a:ln w="28575">
+          <a:ln>
             <a:solidFill>
-              <a:srgbClr val="FF0000"/>
+              <a:schemeClr val="tx1"/>
             </a:solidFill>
             <a:headEnd type="none" w="med" len="med"/>
-            <a:tailEnd type="triangle"/>
+            <a:tailEnd type="none" w="med" len="med"/>
           </a:ln>
         </p:spPr>
         <p:style>
@@ -21661,89 +21312,166 @@
           </a:fontRef>
         </p:style>
       </p:cxnSp>
-      <p:sp>
-        <p:nvSpPr>
-          <p:cNvPr id="13" name="四角形: 角を丸くする 12">
-            <a:extLst>
-              <a:ext uri="{FF2B5EF4-FFF2-40B4-BE49-F238E27FC236}">
-                <a16:creationId xmlns:a16="http://schemas.microsoft.com/office/drawing/2014/main" id="{9A093298-2FC9-BF90-665D-80B83F614E24}"/>
-              </a:ext>
-            </a:extLst>
-          </p:cNvPr>
-          <p:cNvSpPr/>
-          <p:nvPr/>
-        </p:nvSpPr>
-        <p:spPr>
-          <a:xfrm>
-            <a:off x="5436096" y="3645024"/>
-            <a:ext cx="1296144" cy="360040"/>
-          </a:xfrm>
-          <a:prstGeom prst="roundRect">
-            <a:avLst/>
-          </a:prstGeom>
-          <a:noFill/>
-          <a:ln w="19050">
-            <a:solidFill>
-              <a:srgbClr val="FF0000"/>
-            </a:solidFill>
-          </a:ln>
-        </p:spPr>
-        <p:style>
-          <a:lnRef idx="2">
-            <a:schemeClr val="accent1">
-              <a:shade val="50000"/>
-            </a:schemeClr>
-          </a:lnRef>
-          <a:fillRef idx="1">
-            <a:schemeClr val="accent1"/>
-          </a:fillRef>
-          <a:effectRef idx="0">
-            <a:schemeClr val="accent1"/>
-          </a:effectRef>
-          <a:fontRef idx="minor">
-            <a:schemeClr val="lt1"/>
-          </a:fontRef>
-        </p:style>
-        <p:txBody>
-          <a:bodyPr rtlCol="0" anchor="ctr"/>
-          <a:lstStyle/>
-          <a:p>
-            <a:pPr algn="ctr"/>
-            <a:endParaRPr kumimoji="1" lang="ja-JP" altLang="en-US"/>
-          </a:p>
-        </p:txBody>
-      </p:sp>
+      <p:pic>
+        <p:nvPicPr>
+          <p:cNvPr id="40" name="Picture 2" descr="フォルダのイラスト">
+            <a:extLst>
+              <a:ext uri="{FF2B5EF4-FFF2-40B4-BE49-F238E27FC236}">
+                <a16:creationId xmlns:a16="http://schemas.microsoft.com/office/drawing/2014/main" id="{0D4DCE5E-265F-4131-8C70-145C957F5973}"/>
+              </a:ext>
+            </a:extLst>
+          </p:cNvPr>
+          <p:cNvPicPr>
+            <a:picLocks noChangeAspect="1" noChangeArrowheads="1"/>
+          </p:cNvPicPr>
+          <p:nvPr/>
+        </p:nvPicPr>
+        <p:blipFill>
+          <a:blip r:embed="rId2" cstate="print">
+            <a:extLst>
+              <a:ext uri="{28A0092B-C50C-407E-A947-70E740481C1C}">
+                <a14:useLocalDpi xmlns:a14="http://schemas.microsoft.com/office/drawing/2010/main" val="0"/>
+              </a:ext>
+            </a:extLst>
+          </a:blip>
+          <a:srcRect/>
+          <a:stretch>
+            <a:fillRect/>
+          </a:stretch>
+        </p:blipFill>
+        <p:spPr bwMode="auto">
+          <a:xfrm>
+            <a:off x="7380312" y="5157192"/>
+            <a:ext cx="702078" cy="587990"/>
+          </a:xfrm>
+          <a:prstGeom prst="rect">
+            <a:avLst/>
+          </a:prstGeom>
+          <a:noFill/>
+          <a:extLst>
+            <a:ext uri="{909E8E84-426E-40DD-AFC4-6F175D3DCCD1}">
+              <a14:hiddenFill xmlns:a14="http://schemas.microsoft.com/office/drawing/2010/main">
+                <a:solidFill>
+                  <a:srgbClr val="FFFFFF"/>
+                </a:solidFill>
+              </a14:hiddenFill>
+            </a:ext>
+          </a:extLst>
+        </p:spPr>
+      </p:pic>
+      <p:sp>
+        <p:nvSpPr>
+          <p:cNvPr id="41" name="テキスト ボックス 40">
+            <a:extLst>
+              <a:ext uri="{FF2B5EF4-FFF2-40B4-BE49-F238E27FC236}">
+                <a16:creationId xmlns:a16="http://schemas.microsoft.com/office/drawing/2014/main" id="{5021F8FC-BB61-4643-B355-E94A1806EEAB}"/>
+              </a:ext>
+            </a:extLst>
+          </p:cNvPr>
+          <p:cNvSpPr txBox="1"/>
+          <p:nvPr/>
+        </p:nvSpPr>
+        <p:spPr>
+          <a:xfrm>
+            <a:off x="7452320" y="5661248"/>
+            <a:ext cx="556563" cy="369332"/>
+          </a:xfrm>
+          <a:prstGeom prst="rect">
+            <a:avLst/>
+          </a:prstGeom>
+          <a:noFill/>
+        </p:spPr>
+        <p:txBody>
+          <a:bodyPr wrap="none" rtlCol="0">
+            <a:spAutoFit/>
+          </a:bodyPr>
+          <a:lstStyle/>
+          <a:p>
+            <a:r>
+              <a:rPr kumimoji="1" lang="en-US" altLang="ja-JP" dirty="0"/>
+              <a:t>test</a:t>
+            </a:r>
+            <a:endParaRPr kumimoji="1" lang="ja-JP" altLang="en-US" dirty="0"/>
+          </a:p>
+        </p:txBody>
+      </p:sp>
+      <p:pic>
+        <p:nvPicPr>
+          <p:cNvPr id="42" name="Picture 2" descr="手を上げている男の子のイラスト">
+            <a:extLst>
+              <a:ext uri="{FF2B5EF4-FFF2-40B4-BE49-F238E27FC236}">
+                <a16:creationId xmlns:a16="http://schemas.microsoft.com/office/drawing/2014/main" id="{79E650B2-C543-4EED-B3C8-171E65868E67}"/>
+              </a:ext>
+            </a:extLst>
+          </p:cNvPr>
+          <p:cNvPicPr>
+            <a:picLocks noChangeAspect="1" noChangeArrowheads="1"/>
+          </p:cNvPicPr>
+          <p:nvPr/>
+        </p:nvPicPr>
+        <p:blipFill>
+          <a:blip r:embed="rId4" cstate="print">
+            <a:extLst>
+              <a:ext uri="{28A0092B-C50C-407E-A947-70E740481C1C}">
+                <a14:useLocalDpi xmlns:a14="http://schemas.microsoft.com/office/drawing/2010/main" val="0"/>
+              </a:ext>
+            </a:extLst>
+          </a:blip>
+          <a:srcRect/>
+          <a:stretch>
+            <a:fillRect/>
+          </a:stretch>
+        </p:blipFill>
+        <p:spPr bwMode="auto">
+          <a:xfrm>
+            <a:off x="7524328" y="4509120"/>
+            <a:ext cx="385188" cy="536848"/>
+          </a:xfrm>
+          <a:prstGeom prst="rect">
+            <a:avLst/>
+          </a:prstGeom>
+          <a:noFill/>
+          <a:extLst>
+            <a:ext uri="{909E8E84-426E-40DD-AFC4-6F175D3DCCD1}">
+              <a14:hiddenFill xmlns:a14="http://schemas.microsoft.com/office/drawing/2010/main">
+                <a:solidFill>
+                  <a:srgbClr val="FFFFFF"/>
+                </a:solidFill>
+              </a14:hiddenFill>
+            </a:ext>
+          </a:extLst>
+        </p:spPr>
+      </p:pic>
       <p:cxnSp>
         <p:nvCxnSpPr>
-          <p:cNvPr id="14" name="コネクタ: カギ線 13">
-            <a:extLst>
-              <a:ext uri="{FF2B5EF4-FFF2-40B4-BE49-F238E27FC236}">
-                <a16:creationId xmlns:a16="http://schemas.microsoft.com/office/drawing/2014/main" id="{35750E3B-B024-D316-95AB-AC61E38390E9}"/>
+          <p:cNvPr id="43" name="直線矢印コネクタ 42">
+            <a:extLst>
+              <a:ext uri="{FF2B5EF4-FFF2-40B4-BE49-F238E27FC236}">
+                <a16:creationId xmlns:a16="http://schemas.microsoft.com/office/drawing/2014/main" id="{4ED3C703-CDC9-4077-9CE8-80CB0BE692C1}"/>
               </a:ext>
             </a:extLst>
           </p:cNvPr>
           <p:cNvCxnSpPr>
             <a:cxnSpLocks/>
-            <a:endCxn id="13" idx="2"/>
+            <a:stCxn id="40" idx="1"/>
+            <a:endCxn id="36" idx="3"/>
           </p:cNvCxnSpPr>
           <p:nvPr/>
         </p:nvCxnSpPr>
         <p:spPr>
-          <a:xfrm rot="5400000" flipH="1" flipV="1">
-            <a:off x="4443182" y="3444198"/>
-            <a:ext cx="1080120" cy="2201852"/>
-          </a:xfrm>
-          <a:prstGeom prst="bentConnector3">
-            <a:avLst>
-              <a:gd name="adj1" fmla="val 50000"/>
-            </a:avLst>
-          </a:prstGeom>
-          <a:ln w="19050">
+          <a:xfrm flipH="1">
+            <a:off x="6786246" y="5451187"/>
+            <a:ext cx="594066" cy="0"/>
+          </a:xfrm>
+          <a:prstGeom prst="straightConnector1">
+            <a:avLst/>
+          </a:prstGeom>
+          <a:ln>
             <a:solidFill>
-              <a:srgbClr val="FF0000"/>
+              <a:schemeClr val="tx1"/>
             </a:solidFill>
             <a:headEnd type="none" w="med" len="med"/>
-            <a:tailEnd type="triangle"/>
+            <a:tailEnd type="none" w="med" len="med"/>
           </a:ln>
         </p:spPr>
         <p:style>
@@ -21761,89 +21489,10 @@
           </a:fontRef>
         </p:style>
       </p:cxnSp>
-      <p:sp>
-        <p:nvSpPr>
-          <p:cNvPr id="15" name="テキスト ボックス 14">
-            <a:extLst>
-              <a:ext uri="{FF2B5EF4-FFF2-40B4-BE49-F238E27FC236}">
-                <a16:creationId xmlns:a16="http://schemas.microsoft.com/office/drawing/2014/main" id="{170ECCCE-9A1B-F751-6CF2-DA878DC0C7BA}"/>
-              </a:ext>
-            </a:extLst>
-          </p:cNvPr>
-          <p:cNvSpPr txBox="1"/>
-          <p:nvPr/>
-        </p:nvSpPr>
-        <p:spPr>
-          <a:xfrm>
-            <a:off x="395536" y="5157192"/>
-            <a:ext cx="7981672" cy="646331"/>
-          </a:xfrm>
-          <a:prstGeom prst="rect">
-            <a:avLst/>
-          </a:prstGeom>
-          <a:noFill/>
-        </p:spPr>
-        <p:txBody>
-          <a:bodyPr wrap="none" rtlCol="0">
-            <a:spAutoFit/>
-          </a:bodyPr>
-          <a:lstStyle/>
-          <a:p>
-            <a:r>
-              <a:rPr kumimoji="1" lang="ja-JP" altLang="en-US" dirty="0"/>
-              <a:t>「</a:t>
-            </a:r>
-            <a:r>
-              <a:rPr kumimoji="1" lang="en-US" altLang="ja-JP" dirty="0"/>
-              <a:t>cd </a:t>
-            </a:r>
-            <a:r>
-              <a:rPr kumimoji="1" lang="en-US" altLang="ja-JP" dirty="0" err="1"/>
-              <a:t>github</a:t>
-            </a:r>
-            <a:r>
-              <a:rPr kumimoji="1" lang="ja-JP" altLang="en-US" dirty="0"/>
-              <a:t>」コマンドにより、カレントディレクトリを</a:t>
-            </a:r>
-            <a:r>
-              <a:rPr kumimoji="1" lang="en-US" altLang="ja-JP" dirty="0" err="1"/>
-              <a:t>github</a:t>
-            </a:r>
-            <a:r>
-              <a:rPr kumimoji="1" lang="ja-JP" altLang="en-US" dirty="0"/>
-              <a:t>に移動すると</a:t>
-            </a:r>
-            <a:endParaRPr kumimoji="1" lang="en-US" altLang="ja-JP" dirty="0"/>
-          </a:p>
-          <a:p>
-            <a:r>
-              <a:rPr kumimoji="1" lang="ja-JP" altLang="en-US" dirty="0"/>
-              <a:t>右の表示が変わる</a:t>
-            </a:r>
-            <a:r>
-              <a:rPr kumimoji="1" lang="en-US" altLang="ja-JP" dirty="0"/>
-              <a:t>(/z/</a:t>
-            </a:r>
-            <a:r>
-              <a:rPr kumimoji="1" lang="en-US" altLang="ja-JP" dirty="0" err="1"/>
-              <a:t>github</a:t>
-            </a:r>
-            <a:r>
-              <a:rPr kumimoji="1" lang="ja-JP" altLang="en-US" dirty="0"/>
-              <a:t>になるはず</a:t>
-            </a:r>
-            <a:r>
-              <a:rPr kumimoji="1" lang="en-US" altLang="ja-JP" dirty="0"/>
-              <a:t>)</a:t>
-            </a:r>
-            <a:endParaRPr kumimoji="1" lang="ja-JP" altLang="en-US" dirty="0"/>
-          </a:p>
-        </p:txBody>
-      </p:sp>
     </p:spTree>
     <p:extLst>
       <p:ext uri="{BB962C8B-B14F-4D97-AF65-F5344CB8AC3E}">
-        <p14:creationId xmlns:p14="http://schemas.microsoft.com/office/powerpoint/2010/main" val="727614272"/>
+        <p14:creationId xmlns:p14="http://schemas.microsoft.com/office/powerpoint/2010/main" val="555618142"/>
       </p:ext>
     </p:extLst>
   </p:cSld>
@@ -21870,88 +21519,12 @@
           <a:chExt cx="0" cy="0"/>
         </a:xfrm>
       </p:grpSpPr>
-      <p:sp>
-        <p:nvSpPr>
-          <p:cNvPr id="2" name="テキスト プレースホルダー 1">
-            <a:extLst>
-              <a:ext uri="{FF2B5EF4-FFF2-40B4-BE49-F238E27FC236}">
-                <a16:creationId xmlns:a16="http://schemas.microsoft.com/office/drawing/2014/main" id="{FBD201B4-8564-9EEC-7283-7789AB16B4CF}"/>
-              </a:ext>
-            </a:extLst>
-          </p:cNvPr>
-          <p:cNvSpPr>
-            <a:spLocks noGrp="1"/>
-          </p:cNvSpPr>
-          <p:nvPr>
-            <p:ph type="body" sz="quarter" idx="10"/>
-          </p:nvPr>
-        </p:nvSpPr>
-        <p:spPr/>
-        <p:txBody>
-          <a:bodyPr/>
-          <a:lstStyle/>
-          <a:p>
-            <a:r>
-              <a:rPr kumimoji="1" lang="en-US" altLang="ja-JP" dirty="0"/>
-              <a:t>Git Bash</a:t>
-            </a:r>
-            <a:r>
-              <a:rPr kumimoji="1" lang="ja-JP" altLang="en-US" dirty="0"/>
-              <a:t>のプロンプト</a:t>
-            </a:r>
-          </a:p>
-        </p:txBody>
-      </p:sp>
-      <p:sp>
-        <p:nvSpPr>
-          <p:cNvPr id="3" name="テキスト ボックス 2">
-            <a:extLst>
-              <a:ext uri="{FF2B5EF4-FFF2-40B4-BE49-F238E27FC236}">
-                <a16:creationId xmlns:a16="http://schemas.microsoft.com/office/drawing/2014/main" id="{B9677FCC-56E0-B4BA-7C1E-F2C96EDD96FC}"/>
-              </a:ext>
-            </a:extLst>
-          </p:cNvPr>
-          <p:cNvSpPr txBox="1"/>
-          <p:nvPr/>
-        </p:nvSpPr>
-        <p:spPr>
-          <a:xfrm>
-            <a:off x="251520" y="1052736"/>
-            <a:ext cx="7848872" cy="400110"/>
-          </a:xfrm>
-          <a:prstGeom prst="rect">
-            <a:avLst/>
-          </a:prstGeom>
-          <a:noFill/>
-        </p:spPr>
-        <p:txBody>
-          <a:bodyPr wrap="square" rtlCol="0">
-            <a:spAutoFit/>
-          </a:bodyPr>
-          <a:lstStyle/>
-          <a:p>
-            <a:r>
-              <a:rPr kumimoji="1" lang="en-US" altLang="ja-JP" sz="2000" dirty="0"/>
-              <a:t>Git Bash</a:t>
-            </a:r>
-            <a:r>
-              <a:rPr kumimoji="1" lang="ja-JP" altLang="en-US" sz="2000" dirty="0"/>
-              <a:t>はカレントディレクトリとカレントブランチを</a:t>
-            </a:r>
-            <a:r>
-              <a:rPr lang="ja-JP" altLang="en-US" sz="2000" dirty="0"/>
-              <a:t>表示する</a:t>
-            </a:r>
-            <a:endParaRPr kumimoji="1" lang="ja-JP" altLang="en-US" sz="2000" dirty="0"/>
-          </a:p>
-        </p:txBody>
-      </p:sp>
       <p:pic>
         <p:nvPicPr>
-          <p:cNvPr id="5" name="図 4">
-            <a:extLst>
-              <a:ext uri="{FF2B5EF4-FFF2-40B4-BE49-F238E27FC236}">
-                <a16:creationId xmlns:a16="http://schemas.microsoft.com/office/drawing/2014/main" id="{8E48B141-EED6-E679-6425-6F233CBBAFC0}"/>
+          <p:cNvPr id="4" name="図 3">
+            <a:extLst>
+              <a:ext uri="{FF2B5EF4-FFF2-40B4-BE49-F238E27FC236}">
+                <a16:creationId xmlns:a16="http://schemas.microsoft.com/office/drawing/2014/main" id="{BA80F7C2-D7F5-E5E9-4E32-C714966A19CE}"/>
               </a:ext>
             </a:extLst>
           </p:cNvPr>
@@ -21968,8 +21541,8 @@
         </p:blipFill>
         <p:spPr>
           <a:xfrm>
-            <a:off x="1043608" y="2996952"/>
-            <a:ext cx="6919560" cy="1783235"/>
+            <a:off x="683568" y="2132856"/>
+            <a:ext cx="6889077" cy="2697714"/>
           </a:xfrm>
           <a:prstGeom prst="rect">
             <a:avLst/>
@@ -21978,10 +21551,47 @@
       </p:pic>
       <p:sp>
         <p:nvSpPr>
+          <p:cNvPr id="2" name="テキスト プレースホルダー 1">
+            <a:extLst>
+              <a:ext uri="{FF2B5EF4-FFF2-40B4-BE49-F238E27FC236}">
+                <a16:creationId xmlns:a16="http://schemas.microsoft.com/office/drawing/2014/main" id="{0BE38C31-5AF7-9060-7714-867B2AC1D853}"/>
+              </a:ext>
+            </a:extLst>
+          </p:cNvPr>
+          <p:cNvSpPr>
+            <a:spLocks noGrp="1"/>
+          </p:cNvSpPr>
+          <p:nvPr>
+            <p:ph type="body" sz="quarter" idx="10"/>
+          </p:nvPr>
+        </p:nvSpPr>
+        <p:spPr/>
+        <p:txBody>
+          <a:bodyPr/>
+          <a:lstStyle/>
+          <a:p>
+            <a:r>
+              <a:rPr kumimoji="1" lang="ja-JP" altLang="en-US" dirty="0"/>
+              <a:t>課題</a:t>
+            </a:r>
+            <a:r>
+              <a:rPr kumimoji="1" lang="en-US" altLang="ja-JP" dirty="0"/>
+              <a:t> – Step </a:t>
+            </a:r>
+            <a:r>
+              <a:rPr lang="en-US" altLang="ja-JP" dirty="0"/>
+              <a:t>2</a:t>
+            </a:r>
+            <a:endParaRPr kumimoji="1" lang="ja-JP" altLang="en-US" dirty="0"/>
+          </a:p>
+        </p:txBody>
+      </p:sp>
+      <p:sp>
+        <p:nvSpPr>
           <p:cNvPr id="6" name="テキスト ボックス 5">
             <a:extLst>
               <a:ext uri="{FF2B5EF4-FFF2-40B4-BE49-F238E27FC236}">
-                <a16:creationId xmlns:a16="http://schemas.microsoft.com/office/drawing/2014/main" id="{CD8D1EE7-CE52-63C0-D93E-0C46FB692823}"/>
+                <a16:creationId xmlns:a16="http://schemas.microsoft.com/office/drawing/2014/main" id="{1F0F3026-5B00-F671-A05D-C8EDF01A17CC}"/>
               </a:ext>
             </a:extLst>
           </p:cNvPr>
@@ -21990,7 +21600,7 @@
         </p:nvSpPr>
         <p:spPr>
           <a:xfrm>
-            <a:off x="465936" y="1990581"/>
+            <a:off x="179512" y="980728"/>
             <a:ext cx="7994496" cy="646331"/>
           </a:xfrm>
           <a:prstGeom prst="rect">
@@ -22051,91 +21661,57 @@
           </a:p>
         </p:txBody>
       </p:sp>
-      <p:sp>
-        <p:nvSpPr>
-          <p:cNvPr id="7" name="テキスト ボックス 6">
-            <a:extLst>
-              <a:ext uri="{FF2B5EF4-FFF2-40B4-BE49-F238E27FC236}">
-                <a16:creationId xmlns:a16="http://schemas.microsoft.com/office/drawing/2014/main" id="{5B70546C-C6E7-FD5D-61F4-F814FA6EDF47}"/>
-              </a:ext>
-            </a:extLst>
-          </p:cNvPr>
-          <p:cNvSpPr txBox="1"/>
-          <p:nvPr/>
-        </p:nvSpPr>
-        <p:spPr>
-          <a:xfrm>
-            <a:off x="251520" y="5373216"/>
-            <a:ext cx="7981672" cy="646331"/>
-          </a:xfrm>
-          <a:prstGeom prst="rect">
-            <a:avLst/>
-          </a:prstGeom>
-          <a:noFill/>
-        </p:spPr>
-        <p:txBody>
-          <a:bodyPr wrap="none" rtlCol="0">
-            <a:spAutoFit/>
-          </a:bodyPr>
-          <a:lstStyle/>
-          <a:p>
-            <a:r>
-              <a:rPr kumimoji="1" lang="ja-JP" altLang="en-US" dirty="0"/>
-              <a:t>「</a:t>
-            </a:r>
-            <a:r>
-              <a:rPr kumimoji="1" lang="en-US" altLang="ja-JP" dirty="0"/>
-              <a:t>cd </a:t>
-            </a:r>
-            <a:r>
-              <a:rPr kumimoji="1" lang="en-US" altLang="ja-JP" dirty="0" err="1"/>
-              <a:t>github</a:t>
-            </a:r>
-            <a:r>
-              <a:rPr kumimoji="1" lang="ja-JP" altLang="en-US" dirty="0"/>
-              <a:t>」コマンドにより、カレントディレクトリを</a:t>
-            </a:r>
-            <a:r>
-              <a:rPr kumimoji="1" lang="en-US" altLang="ja-JP" dirty="0" err="1"/>
-              <a:t>github</a:t>
-            </a:r>
-            <a:r>
-              <a:rPr kumimoji="1" lang="ja-JP" altLang="en-US" dirty="0"/>
-              <a:t>に移動すると</a:t>
-            </a:r>
-            <a:endParaRPr kumimoji="1" lang="en-US" altLang="ja-JP" dirty="0"/>
-          </a:p>
-          <a:p>
-            <a:r>
-              <a:rPr kumimoji="1" lang="ja-JP" altLang="en-US" dirty="0"/>
-              <a:t>右の表示が変わる</a:t>
-            </a:r>
-            <a:r>
-              <a:rPr kumimoji="1" lang="en-US" altLang="ja-JP" dirty="0"/>
-              <a:t>(/z/</a:t>
-            </a:r>
-            <a:r>
-              <a:rPr kumimoji="1" lang="en-US" altLang="ja-JP" dirty="0" err="1"/>
-              <a:t>github</a:t>
-            </a:r>
-            <a:r>
-              <a:rPr kumimoji="1" lang="ja-JP" altLang="en-US" dirty="0"/>
-              <a:t>になるはず</a:t>
-            </a:r>
-            <a:r>
-              <a:rPr kumimoji="1" lang="en-US" altLang="ja-JP" dirty="0"/>
-              <a:t>)</a:t>
-            </a:r>
-            <a:endParaRPr kumimoji="1" lang="ja-JP" altLang="en-US" dirty="0"/>
-          </a:p>
-        </p:txBody>
-      </p:sp>
+      <p:cxnSp>
+        <p:nvCxnSpPr>
+          <p:cNvPr id="7" name="コネクタ: カギ線 6">
+            <a:extLst>
+              <a:ext uri="{FF2B5EF4-FFF2-40B4-BE49-F238E27FC236}">
+                <a16:creationId xmlns:a16="http://schemas.microsoft.com/office/drawing/2014/main" id="{247A3DFB-B8D4-F0C0-ECAF-EBE1A392AD7D}"/>
+              </a:ext>
+            </a:extLst>
+          </p:cNvPr>
+          <p:cNvCxnSpPr>
+            <a:stCxn id="6" idx="2"/>
+          </p:cNvCxnSpPr>
+          <p:nvPr/>
+        </p:nvCxnSpPr>
+        <p:spPr>
+          <a:xfrm rot="16200000" flipH="1">
+            <a:off x="4645214" y="1158605"/>
+            <a:ext cx="504056" cy="1440964"/>
+          </a:xfrm>
+          <a:prstGeom prst="bentConnector3">
+            <a:avLst/>
+          </a:prstGeom>
+          <a:ln w="19050">
+            <a:solidFill>
+              <a:srgbClr val="FF0000"/>
+            </a:solidFill>
+            <a:headEnd type="none" w="med" len="med"/>
+            <a:tailEnd type="triangle"/>
+          </a:ln>
+        </p:spPr>
+        <p:style>
+          <a:lnRef idx="1">
+            <a:schemeClr val="accent1"/>
+          </a:lnRef>
+          <a:fillRef idx="0">
+            <a:schemeClr val="accent1"/>
+          </a:fillRef>
+          <a:effectRef idx="0">
+            <a:schemeClr val="accent1"/>
+          </a:effectRef>
+          <a:fontRef idx="minor">
+            <a:schemeClr val="tx1"/>
+          </a:fontRef>
+        </p:style>
+      </p:cxnSp>
       <p:sp>
         <p:nvSpPr>
           <p:cNvPr id="8" name="四角形: 角を丸くする 7">
             <a:extLst>
               <a:ext uri="{FF2B5EF4-FFF2-40B4-BE49-F238E27FC236}">
-                <a16:creationId xmlns:a16="http://schemas.microsoft.com/office/drawing/2014/main" id="{9495AE80-03CE-C93E-E8B9-D2CFC05F2275}"/>
+                <a16:creationId xmlns:a16="http://schemas.microsoft.com/office/drawing/2014/main" id="{DB4EC1DF-A5FC-B228-C4F9-78F6422E8053}"/>
               </a:ext>
             </a:extLst>
           </p:cNvPr>
@@ -22144,7 +21720,7 @@
         </p:nvSpPr>
         <p:spPr>
           <a:xfrm>
-            <a:off x="5652120" y="3140968"/>
+            <a:off x="5364088" y="2132856"/>
             <a:ext cx="504056" cy="360040"/>
           </a:xfrm>
           <a:prstGeom prst="roundRect">
@@ -22182,28 +21758,164 @@
           </a:p>
         </p:txBody>
       </p:sp>
+      <p:sp>
+        <p:nvSpPr>
+          <p:cNvPr id="10" name="テキスト ボックス 9">
+            <a:extLst>
+              <a:ext uri="{FF2B5EF4-FFF2-40B4-BE49-F238E27FC236}">
+                <a16:creationId xmlns:a16="http://schemas.microsoft.com/office/drawing/2014/main" id="{4676A922-5056-6ACA-5064-1E622CD11C9C}"/>
+              </a:ext>
+            </a:extLst>
+          </p:cNvPr>
+          <p:cNvSpPr txBox="1"/>
+          <p:nvPr/>
+        </p:nvSpPr>
+        <p:spPr>
+          <a:xfrm>
+            <a:off x="3563888" y="2492896"/>
+            <a:ext cx="2262158" cy="369332"/>
+          </a:xfrm>
+          <a:prstGeom prst="rect">
+            <a:avLst/>
+          </a:prstGeom>
+          <a:solidFill>
+            <a:schemeClr val="bg1"/>
+          </a:solidFill>
+        </p:spPr>
+        <p:txBody>
+          <a:bodyPr wrap="none" rtlCol="0">
+            <a:spAutoFit/>
+          </a:bodyPr>
+          <a:lstStyle/>
+          <a:p>
+            <a:r>
+              <a:rPr kumimoji="1" lang="ja-JP" altLang="en-US" dirty="0"/>
+              <a:t>ディレクトリを作成</a:t>
+            </a:r>
+          </a:p>
+        </p:txBody>
+      </p:sp>
       <p:cxnSp>
         <p:nvCxnSpPr>
-          <p:cNvPr id="10" name="コネクタ: カギ線 9">
-            <a:extLst>
-              <a:ext uri="{FF2B5EF4-FFF2-40B4-BE49-F238E27FC236}">
-                <a16:creationId xmlns:a16="http://schemas.microsoft.com/office/drawing/2014/main" id="{4B855E2C-7F55-73A8-E767-3B7EDA2E6C0D}"/>
+          <p:cNvPr id="12" name="直線矢印コネクタ 11">
+            <a:extLst>
+              <a:ext uri="{FF2B5EF4-FFF2-40B4-BE49-F238E27FC236}">
+                <a16:creationId xmlns:a16="http://schemas.microsoft.com/office/drawing/2014/main" id="{2906152E-D81B-7999-9D68-B0CB580D28E5}"/>
               </a:ext>
             </a:extLst>
           </p:cNvPr>
           <p:cNvCxnSpPr>
-            <a:stCxn id="6" idx="2"/>
-            <a:endCxn id="8" idx="0"/>
+            <a:stCxn id="10" idx="1"/>
           </p:cNvCxnSpPr>
           <p:nvPr/>
         </p:nvCxnSpPr>
         <p:spPr>
-          <a:xfrm rot="16200000" flipH="1">
-            <a:off x="4931638" y="2168458"/>
-            <a:ext cx="504056" cy="1440964"/>
+          <a:xfrm flipH="1" flipV="1">
+            <a:off x="2843808" y="2564904"/>
+            <a:ext cx="720080" cy="112658"/>
+          </a:xfrm>
+          <a:prstGeom prst="straightConnector1">
+            <a:avLst/>
+          </a:prstGeom>
+          <a:ln w="28575">
+            <a:solidFill>
+              <a:srgbClr val="FF0000"/>
+            </a:solidFill>
+            <a:headEnd type="none" w="med" len="med"/>
+            <a:tailEnd type="triangle"/>
+          </a:ln>
+        </p:spPr>
+        <p:style>
+          <a:lnRef idx="1">
+            <a:schemeClr val="accent1"/>
+          </a:lnRef>
+          <a:fillRef idx="0">
+            <a:schemeClr val="accent1"/>
+          </a:fillRef>
+          <a:effectRef idx="0">
+            <a:schemeClr val="accent1"/>
+          </a:effectRef>
+          <a:fontRef idx="minor">
+            <a:schemeClr val="tx1"/>
+          </a:fontRef>
+        </p:style>
+      </p:cxnSp>
+      <p:sp>
+        <p:nvSpPr>
+          <p:cNvPr id="13" name="四角形: 角を丸くする 12">
+            <a:extLst>
+              <a:ext uri="{FF2B5EF4-FFF2-40B4-BE49-F238E27FC236}">
+                <a16:creationId xmlns:a16="http://schemas.microsoft.com/office/drawing/2014/main" id="{9A093298-2FC9-BF90-665D-80B83F614E24}"/>
+              </a:ext>
+            </a:extLst>
+          </p:cNvPr>
+          <p:cNvSpPr/>
+          <p:nvPr/>
+        </p:nvSpPr>
+        <p:spPr>
+          <a:xfrm>
+            <a:off x="5436096" y="3645024"/>
+            <a:ext cx="1296144" cy="360040"/>
+          </a:xfrm>
+          <a:prstGeom prst="roundRect">
+            <a:avLst/>
+          </a:prstGeom>
+          <a:noFill/>
+          <a:ln w="19050">
+            <a:solidFill>
+              <a:srgbClr val="FF0000"/>
+            </a:solidFill>
+          </a:ln>
+        </p:spPr>
+        <p:style>
+          <a:lnRef idx="2">
+            <a:schemeClr val="accent1">
+              <a:shade val="50000"/>
+            </a:schemeClr>
+          </a:lnRef>
+          <a:fillRef idx="1">
+            <a:schemeClr val="accent1"/>
+          </a:fillRef>
+          <a:effectRef idx="0">
+            <a:schemeClr val="accent1"/>
+          </a:effectRef>
+          <a:fontRef idx="minor">
+            <a:schemeClr val="lt1"/>
+          </a:fontRef>
+        </p:style>
+        <p:txBody>
+          <a:bodyPr rtlCol="0" anchor="ctr"/>
+          <a:lstStyle/>
+          <a:p>
+            <a:pPr algn="ctr"/>
+            <a:endParaRPr kumimoji="1" lang="ja-JP" altLang="en-US"/>
+          </a:p>
+        </p:txBody>
+      </p:sp>
+      <p:cxnSp>
+        <p:nvCxnSpPr>
+          <p:cNvPr id="14" name="コネクタ: カギ線 13">
+            <a:extLst>
+              <a:ext uri="{FF2B5EF4-FFF2-40B4-BE49-F238E27FC236}">
+                <a16:creationId xmlns:a16="http://schemas.microsoft.com/office/drawing/2014/main" id="{35750E3B-B024-D316-95AB-AC61E38390E9}"/>
+              </a:ext>
+            </a:extLst>
+          </p:cNvPr>
+          <p:cNvCxnSpPr>
+            <a:cxnSpLocks/>
+            <a:endCxn id="13" idx="2"/>
+          </p:cNvCxnSpPr>
+          <p:nvPr/>
+        </p:nvCxnSpPr>
+        <p:spPr>
+          <a:xfrm rot="5400000" flipH="1" flipV="1">
+            <a:off x="4443182" y="3444198"/>
+            <a:ext cx="1080120" cy="2201852"/>
           </a:xfrm>
           <a:prstGeom prst="bentConnector3">
-            <a:avLst/>
+            <a:avLst>
+              <a:gd name="adj1" fmla="val 50000"/>
+            </a:avLst>
           </a:prstGeom>
           <a:ln w="19050">
             <a:solidFill>
@@ -22230,109 +21942,87 @@
       </p:cxnSp>
       <p:sp>
         <p:nvSpPr>
-          <p:cNvPr id="11" name="四角形: 角を丸くする 10">
-            <a:extLst>
-              <a:ext uri="{FF2B5EF4-FFF2-40B4-BE49-F238E27FC236}">
-                <a16:creationId xmlns:a16="http://schemas.microsoft.com/office/drawing/2014/main" id="{F2340EEE-4C99-1D4E-B685-B5BAFDDBBC03}"/>
-              </a:ext>
-            </a:extLst>
-          </p:cNvPr>
-          <p:cNvSpPr/>
-          <p:nvPr/>
-        </p:nvSpPr>
-        <p:spPr>
-          <a:xfrm>
-            <a:off x="5724128" y="3933056"/>
-            <a:ext cx="1296144" cy="360040"/>
-          </a:xfrm>
-          <a:prstGeom prst="roundRect">
-            <a:avLst/>
-          </a:prstGeom>
-          <a:noFill/>
-          <a:ln w="19050">
-            <a:solidFill>
-              <a:srgbClr val="FF0000"/>
-            </a:solidFill>
-          </a:ln>
-        </p:spPr>
-        <p:style>
-          <a:lnRef idx="2">
-            <a:schemeClr val="accent1">
-              <a:shade val="50000"/>
-            </a:schemeClr>
-          </a:lnRef>
-          <a:fillRef idx="1">
-            <a:schemeClr val="accent1"/>
-          </a:fillRef>
-          <a:effectRef idx="0">
-            <a:schemeClr val="accent1"/>
-          </a:effectRef>
-          <a:fontRef idx="minor">
-            <a:schemeClr val="lt1"/>
-          </a:fontRef>
-        </p:style>
-        <p:txBody>
-          <a:bodyPr rtlCol="0" anchor="ctr"/>
-          <a:lstStyle/>
-          <a:p>
-            <a:pPr algn="ctr"/>
-            <a:endParaRPr kumimoji="1" lang="ja-JP" altLang="en-US"/>
-          </a:p>
-        </p:txBody>
-      </p:sp>
-      <p:cxnSp>
-        <p:nvCxnSpPr>
-          <p:cNvPr id="12" name="コネクタ: カギ線 11">
-            <a:extLst>
-              <a:ext uri="{FF2B5EF4-FFF2-40B4-BE49-F238E27FC236}">
-                <a16:creationId xmlns:a16="http://schemas.microsoft.com/office/drawing/2014/main" id="{A6A5DA05-ED9A-1709-EDFB-9BCD749091CF}"/>
-              </a:ext>
-            </a:extLst>
-          </p:cNvPr>
-          <p:cNvCxnSpPr>
-            <a:cxnSpLocks/>
-            <a:stCxn id="7" idx="0"/>
-            <a:endCxn id="11" idx="2"/>
-          </p:cNvCxnSpPr>
-          <p:nvPr/>
-        </p:nvCxnSpPr>
-        <p:spPr>
-          <a:xfrm rot="5400000" flipH="1" flipV="1">
-            <a:off x="4767218" y="3768234"/>
-            <a:ext cx="1080120" cy="2129844"/>
-          </a:xfrm>
-          <a:prstGeom prst="bentConnector3">
-            <a:avLst>
-              <a:gd name="adj1" fmla="val 50000"/>
-            </a:avLst>
-          </a:prstGeom>
-          <a:ln w="19050">
-            <a:solidFill>
-              <a:srgbClr val="FF0000"/>
-            </a:solidFill>
-            <a:headEnd type="none" w="med" len="med"/>
-            <a:tailEnd type="triangle"/>
-          </a:ln>
-        </p:spPr>
-        <p:style>
-          <a:lnRef idx="1">
-            <a:schemeClr val="accent1"/>
-          </a:lnRef>
-          <a:fillRef idx="0">
-            <a:schemeClr val="accent1"/>
-          </a:fillRef>
-          <a:effectRef idx="0">
-            <a:schemeClr val="accent1"/>
-          </a:effectRef>
-          <a:fontRef idx="minor">
-            <a:schemeClr val="tx1"/>
-          </a:fontRef>
-        </p:style>
-      </p:cxnSp>
+          <p:cNvPr id="15" name="テキスト ボックス 14">
+            <a:extLst>
+              <a:ext uri="{FF2B5EF4-FFF2-40B4-BE49-F238E27FC236}">
+                <a16:creationId xmlns:a16="http://schemas.microsoft.com/office/drawing/2014/main" id="{170ECCCE-9A1B-F751-6CF2-DA878DC0C7BA}"/>
+              </a:ext>
+            </a:extLst>
+          </p:cNvPr>
+          <p:cNvSpPr txBox="1"/>
+          <p:nvPr/>
+        </p:nvSpPr>
+        <p:spPr>
+          <a:xfrm>
+            <a:off x="395536" y="5157192"/>
+            <a:ext cx="7981672" cy="646331"/>
+          </a:xfrm>
+          <a:prstGeom prst="rect">
+            <a:avLst/>
+          </a:prstGeom>
+          <a:noFill/>
+        </p:spPr>
+        <p:txBody>
+          <a:bodyPr wrap="none" rtlCol="0">
+            <a:spAutoFit/>
+          </a:bodyPr>
+          <a:lstStyle/>
+          <a:p>
+            <a:r>
+              <a:rPr kumimoji="1" lang="ja-JP" altLang="en-US" dirty="0"/>
+              <a:t>「</a:t>
+            </a:r>
+            <a:r>
+              <a:rPr kumimoji="1" lang="en-US" altLang="ja-JP" dirty="0"/>
+              <a:t>cd </a:t>
+            </a:r>
+            <a:r>
+              <a:rPr kumimoji="1" lang="en-US" altLang="ja-JP" dirty="0" err="1"/>
+              <a:t>github</a:t>
+            </a:r>
+            <a:r>
+              <a:rPr kumimoji="1" lang="ja-JP" altLang="en-US" dirty="0"/>
+              <a:t>」コマンドにより、カレントディレクトリを</a:t>
+            </a:r>
+            <a:r>
+              <a:rPr kumimoji="1" lang="en-US" altLang="ja-JP" dirty="0" err="1"/>
+              <a:t>github</a:t>
+            </a:r>
+            <a:r>
+              <a:rPr kumimoji="1" lang="ja-JP" altLang="en-US" dirty="0"/>
+              <a:t>に移動すると</a:t>
+            </a:r>
+            <a:endParaRPr kumimoji="1" lang="en-US" altLang="ja-JP" dirty="0"/>
+          </a:p>
+          <a:p>
+            <a:r>
+              <a:rPr kumimoji="1" lang="ja-JP" altLang="en-US" dirty="0"/>
+              <a:t>右の表示が変わる</a:t>
+            </a:r>
+            <a:r>
+              <a:rPr kumimoji="1" lang="en-US" altLang="ja-JP" dirty="0"/>
+              <a:t>(/z/</a:t>
+            </a:r>
+            <a:r>
+              <a:rPr kumimoji="1" lang="en-US" altLang="ja-JP" dirty="0" err="1"/>
+              <a:t>github</a:t>
+            </a:r>
+            <a:r>
+              <a:rPr kumimoji="1" lang="ja-JP" altLang="en-US" dirty="0"/>
+              <a:t>になるはず</a:t>
+            </a:r>
+            <a:r>
+              <a:rPr kumimoji="1" lang="en-US" altLang="ja-JP" dirty="0"/>
+              <a:t>)</a:t>
+            </a:r>
+            <a:endParaRPr kumimoji="1" lang="ja-JP" altLang="en-US" dirty="0"/>
+          </a:p>
+        </p:txBody>
+      </p:sp>
     </p:spTree>
     <p:extLst>
       <p:ext uri="{BB962C8B-B14F-4D97-AF65-F5344CB8AC3E}">
-        <p14:creationId xmlns:p14="http://schemas.microsoft.com/office/powerpoint/2010/main" val="3244075173"/>
+        <p14:creationId xmlns:p14="http://schemas.microsoft.com/office/powerpoint/2010/main" val="727614272"/>
       </p:ext>
     </p:extLst>
   </p:cSld>
